--- a/COMP182/Lectures/Lecture13/Lecture_SetMap.pptx
+++ b/COMP182/Lectures/Lecture13/Lecture_SetMap.pptx
@@ -5,10 +5,10 @@
     <p:sldMasterId id="2147483648" r:id="rId1"/>
   </p:sldMasterIdLst>
   <p:notesMasterIdLst>
-    <p:notesMasterId r:id="rId26"/>
+    <p:notesMasterId r:id="rId28"/>
   </p:notesMasterIdLst>
   <p:handoutMasterIdLst>
-    <p:handoutMasterId r:id="rId27"/>
+    <p:handoutMasterId r:id="rId29"/>
   </p:handoutMasterIdLst>
   <p:sldIdLst>
     <p:sldId id="256" r:id="rId2"/>
@@ -18,23 +18,25 @@
     <p:sldId id="504" r:id="rId6"/>
     <p:sldId id="318" r:id="rId7"/>
     <p:sldId id="509" r:id="rId8"/>
-    <p:sldId id="441" r:id="rId9"/>
-    <p:sldId id="537" r:id="rId10"/>
-    <p:sldId id="449" r:id="rId11"/>
-    <p:sldId id="480" r:id="rId12"/>
-    <p:sldId id="541" r:id="rId13"/>
-    <p:sldId id="500" r:id="rId14"/>
-    <p:sldId id="510" r:id="rId15"/>
-    <p:sldId id="257" r:id="rId16"/>
-    <p:sldId id="259" r:id="rId17"/>
-    <p:sldId id="359" r:id="rId18"/>
-    <p:sldId id="473" r:id="rId19"/>
-    <p:sldId id="499" r:id="rId20"/>
-    <p:sldId id="487" r:id="rId21"/>
-    <p:sldId id="501" r:id="rId22"/>
-    <p:sldId id="474" r:id="rId23"/>
-    <p:sldId id="475" r:id="rId24"/>
-    <p:sldId id="479" r:id="rId25"/>
+    <p:sldId id="543" r:id="rId9"/>
+    <p:sldId id="441" r:id="rId10"/>
+    <p:sldId id="537" r:id="rId11"/>
+    <p:sldId id="449" r:id="rId12"/>
+    <p:sldId id="480" r:id="rId13"/>
+    <p:sldId id="541" r:id="rId14"/>
+    <p:sldId id="500" r:id="rId15"/>
+    <p:sldId id="510" r:id="rId16"/>
+    <p:sldId id="257" r:id="rId17"/>
+    <p:sldId id="259" r:id="rId18"/>
+    <p:sldId id="359" r:id="rId19"/>
+    <p:sldId id="473" r:id="rId20"/>
+    <p:sldId id="542" r:id="rId21"/>
+    <p:sldId id="499" r:id="rId22"/>
+    <p:sldId id="487" r:id="rId23"/>
+    <p:sldId id="501" r:id="rId24"/>
+    <p:sldId id="474" r:id="rId25"/>
+    <p:sldId id="475" r:id="rId26"/>
+    <p:sldId id="479" r:id="rId27"/>
   </p:sldIdLst>
   <p:sldSz cx="9144000" cy="6858000" type="screen4x3"/>
   <p:notesSz cx="7315200" cy="9601200"/>
@@ -891,14 +893,14 @@
           <a:ln/>
           <a:extLst>
             <a:ext uri="{909E8E84-426E-40dd-AFC4-6F175D3DCCD1}">
-              <a14:hiddenFill xmlns:a14="http://schemas.microsoft.com/office/drawing/2010/main" xmlns="">
+              <a14:hiddenFill xmlns="" xmlns:a14="http://schemas.microsoft.com/office/drawing/2010/main">
                 <a:solidFill>
                   <a:srgbClr val="FFFFFF"/>
                 </a:solidFill>
               </a14:hiddenFill>
             </a:ext>
             <a:ext uri="{91240B29-F687-4f45-9708-019B960494DF}">
-              <a14:hiddenLine xmlns:a14="http://schemas.microsoft.com/office/drawing/2010/main" xmlns="" w="9525">
+              <a14:hiddenLine xmlns="" xmlns:a14="http://schemas.microsoft.com/office/drawing/2010/main" w="9525">
                 <a:solidFill>
                   <a:srgbClr val="000000"/>
                 </a:solidFill>
@@ -1043,14 +1045,14 @@
           <a:ln/>
           <a:extLst>
             <a:ext uri="{909E8E84-426E-40dd-AFC4-6F175D3DCCD1}">
-              <a14:hiddenFill xmlns:a14="http://schemas.microsoft.com/office/drawing/2010/main" xmlns="">
+              <a14:hiddenFill xmlns="" xmlns:a14="http://schemas.microsoft.com/office/drawing/2010/main">
                 <a:solidFill>
                   <a:srgbClr val="FFFFFF"/>
                 </a:solidFill>
               </a14:hiddenFill>
             </a:ext>
             <a:ext uri="{91240B29-F687-4f45-9708-019B960494DF}">
-              <a14:hiddenLine xmlns:a14="http://schemas.microsoft.com/office/drawing/2010/main" xmlns="" w="9525">
+              <a14:hiddenLine xmlns="" xmlns:a14="http://schemas.microsoft.com/office/drawing/2010/main" w="9525">
                 <a:solidFill>
                   <a:srgbClr val="000000"/>
                 </a:solidFill>
@@ -1175,7 +1177,7 @@
             <a:pPr eaLnBrk="1" hangingPunct="1"/>
             <a:fld id="{2E45F359-FDD6-2C4C-B23F-D8A99FA33446}" type="datetime1">
               <a:rPr lang="en-US" sz="1400"/>
-              <a:t>11/20/2024</a:t>
+              <a:t>4/23/2025</a:t>
             </a:fld>
             <a:endParaRPr lang="en-US" sz="1400"/>
           </a:p>
@@ -1196,14 +1198,14 @@
           <a:ln/>
           <a:extLst>
             <a:ext uri="{909E8E84-426E-40dd-AFC4-6F175D3DCCD1}">
-              <a14:hiddenFill xmlns:a14="http://schemas.microsoft.com/office/drawing/2010/main" xmlns="">
+              <a14:hiddenFill xmlns="" xmlns:a14="http://schemas.microsoft.com/office/drawing/2010/main">
                 <a:solidFill>
                   <a:srgbClr val="FFFFFF"/>
                 </a:solidFill>
               </a14:hiddenFill>
             </a:ext>
             <a:ext uri="{91240B29-F687-4f45-9708-019B960494DF}">
-              <a14:hiddenLine xmlns:a14="http://schemas.microsoft.com/office/drawing/2010/main" xmlns="" w="9525">
+              <a14:hiddenLine xmlns="" xmlns:a14="http://schemas.microsoft.com/office/drawing/2010/main" w="9525">
                 <a:solidFill>
                   <a:srgbClr val="000000"/>
                 </a:solidFill>
@@ -1364,14 +1366,14 @@
           <a:ln/>
           <a:extLst>
             <a:ext uri="{909E8E84-426E-40dd-AFC4-6F175D3DCCD1}">
-              <a14:hiddenFill xmlns:a14="http://schemas.microsoft.com/office/drawing/2010/main" xmlns="">
+              <a14:hiddenFill xmlns="" xmlns:a14="http://schemas.microsoft.com/office/drawing/2010/main">
                 <a:solidFill>
                   <a:srgbClr val="FFFFFF"/>
                 </a:solidFill>
               </a14:hiddenFill>
             </a:ext>
             <a:ext uri="{91240B29-F687-4f45-9708-019B960494DF}">
-              <a14:hiddenLine xmlns:a14="http://schemas.microsoft.com/office/drawing/2010/main" xmlns="" w="9525">
+              <a14:hiddenLine xmlns="" xmlns:a14="http://schemas.microsoft.com/office/drawing/2010/main" w="9525">
                 <a:solidFill>
                   <a:srgbClr val="000000"/>
                 </a:solidFill>
@@ -1381,7 +1383,7 @@
               </a14:hiddenLine>
             </a:ext>
             <a:ext uri="{FAA26D3D-D897-4be2-8F04-BA451C77F1D7}">
-              <ma14:placeholderFlag xmlns:ma14="http://schemas.microsoft.com/office/mac/drawingml/2011/main" xmlns="" val="1"/>
+              <ma14:placeholderFlag xmlns="" xmlns:ma14="http://schemas.microsoft.com/office/mac/drawingml/2011/main" val="1"/>
             </a:ext>
           </a:extLst>
         </p:spPr>
@@ -1431,12 +1433,7 @@
             <p:ph type="sldImg"/>
           </p:nvPr>
         </p:nvSpPr>
-        <p:spPr>
-          <a:xfrm>
-            <a:off x="1266825" y="727075"/>
-            <a:ext cx="4781550" cy="3586163"/>
-          </a:xfrm>
-        </p:spPr>
+        <p:spPr/>
       </p:sp>
       <p:sp>
         <p:nvSpPr>
@@ -1453,80 +1450,7 @@
           <a:bodyPr/>
           <a:lstStyle/>
           <a:p>
-            <a:pPr>
-              <a:lnSpc>
-                <a:spcPct val="90000"/>
-              </a:lnSpc>
-            </a:pPr>
-            <a:r>
-              <a:rPr lang="en-US" altLang="en-US" dirty="0">
-                <a:cs typeface="Courier New" panose="02070309020205020404" pitchFamily="49" charset="0"/>
-              </a:rPr>
-              <a:t>You can simplify the code in Lines 19-21 using a JDK 1.5 enhanced for loop without using an iterator, as follows:</a:t>
-            </a:r>
-          </a:p>
-          <a:p>
-            <a:pPr>
-              <a:lnSpc>
-                <a:spcPct val="90000"/>
-              </a:lnSpc>
-            </a:pPr>
-            <a:endParaRPr lang="en-US" altLang="en-US" dirty="0">
-              <a:cs typeface="Times New Roman" panose="02020603050405020304" pitchFamily="18" charset="0"/>
-            </a:endParaRPr>
-          </a:p>
-          <a:p>
-            <a:pPr>
-              <a:lnSpc>
-                <a:spcPct val="90000"/>
-              </a:lnSpc>
-            </a:pPr>
-            <a:r>
-              <a:rPr lang="en-US" altLang="en-US" dirty="0">
-                <a:cs typeface="Times New Roman" panose="02020603050405020304" pitchFamily="18" charset="0"/>
-              </a:rPr>
-              <a:t>for (Object element: set)</a:t>
-            </a:r>
-          </a:p>
-          <a:p>
-            <a:pPr>
-              <a:lnSpc>
-                <a:spcPct val="90000"/>
-              </a:lnSpc>
-            </a:pPr>
-            <a:r>
-              <a:rPr lang="en-US" altLang="en-US" dirty="0">
-                <a:cs typeface="Times New Roman" panose="02020603050405020304" pitchFamily="18" charset="0"/>
-              </a:rPr>
-              <a:t>  </a:t>
-            </a:r>
-            <a:r>
-              <a:rPr lang="en-US" altLang="en-US" dirty="0" err="1">
-                <a:cs typeface="Times New Roman" panose="02020603050405020304" pitchFamily="18" charset="0"/>
-              </a:rPr>
-              <a:t>System.out.print</a:t>
-            </a:r>
-            <a:r>
-              <a:rPr lang="en-US" altLang="en-US" dirty="0">
-                <a:cs typeface="Times New Roman" panose="02020603050405020304" pitchFamily="18" charset="0"/>
-              </a:rPr>
-              <a:t>(</a:t>
-            </a:r>
-            <a:r>
-              <a:rPr lang="en-US" altLang="en-US" dirty="0" err="1">
-                <a:cs typeface="Times New Roman" panose="02020603050405020304" pitchFamily="18" charset="0"/>
-              </a:rPr>
-              <a:t>element.toString</a:t>
-            </a:r>
-            <a:r>
-              <a:rPr lang="en-US" altLang="en-US" dirty="0">
-                <a:cs typeface="Times New Roman" panose="02020603050405020304" pitchFamily="18" charset="0"/>
-              </a:rPr>
-              <a:t>() + " ");</a:t>
-            </a:r>
-          </a:p>
-          <a:p>
-            <a:endParaRPr lang="en-US" dirty="0"/>
+            <a:endParaRPr lang="en-US"/>
           </a:p>
         </p:txBody>
       </p:sp>
@@ -1562,7 +1486,7 @@
     </p:spTree>
     <p:extLst>
       <p:ext uri="{BB962C8B-B14F-4D97-AF65-F5344CB8AC3E}">
-        <p14:creationId xmlns:p14="http://schemas.microsoft.com/office/powerpoint/2010/main" val="179759424"/>
+        <p14:creationId xmlns:p14="http://schemas.microsoft.com/office/powerpoint/2010/main" val="287066619"/>
       </p:ext>
     </p:extLst>
   </p:cSld>
@@ -1621,7 +1545,80 @@
           <a:bodyPr/>
           <a:lstStyle/>
           <a:p>
-            <a:endParaRPr lang="en-US"/>
+            <a:pPr>
+              <a:lnSpc>
+                <a:spcPct val="90000"/>
+              </a:lnSpc>
+            </a:pPr>
+            <a:r>
+              <a:rPr lang="en-US" altLang="en-US" dirty="0">
+                <a:cs typeface="Courier New" panose="02070309020205020404" pitchFamily="49" charset="0"/>
+              </a:rPr>
+              <a:t>You can simplify the code in Lines 19-21 using a JDK 1.5 enhanced for loop without using an iterator, as follows:</a:t>
+            </a:r>
+          </a:p>
+          <a:p>
+            <a:pPr>
+              <a:lnSpc>
+                <a:spcPct val="90000"/>
+              </a:lnSpc>
+            </a:pPr>
+            <a:endParaRPr lang="en-US" altLang="en-US" dirty="0">
+              <a:cs typeface="Times New Roman" panose="02020603050405020304" pitchFamily="18" charset="0"/>
+            </a:endParaRPr>
+          </a:p>
+          <a:p>
+            <a:pPr>
+              <a:lnSpc>
+                <a:spcPct val="90000"/>
+              </a:lnSpc>
+            </a:pPr>
+            <a:r>
+              <a:rPr lang="en-US" altLang="en-US" dirty="0">
+                <a:cs typeface="Times New Roman" panose="02020603050405020304" pitchFamily="18" charset="0"/>
+              </a:rPr>
+              <a:t>for (Object element: set)</a:t>
+            </a:r>
+          </a:p>
+          <a:p>
+            <a:pPr>
+              <a:lnSpc>
+                <a:spcPct val="90000"/>
+              </a:lnSpc>
+            </a:pPr>
+            <a:r>
+              <a:rPr lang="en-US" altLang="en-US" dirty="0">
+                <a:cs typeface="Times New Roman" panose="02020603050405020304" pitchFamily="18" charset="0"/>
+              </a:rPr>
+              <a:t>  </a:t>
+            </a:r>
+            <a:r>
+              <a:rPr lang="en-US" altLang="en-US" dirty="0" err="1">
+                <a:cs typeface="Times New Roman" panose="02020603050405020304" pitchFamily="18" charset="0"/>
+              </a:rPr>
+              <a:t>System.out.print</a:t>
+            </a:r>
+            <a:r>
+              <a:rPr lang="en-US" altLang="en-US" dirty="0">
+                <a:cs typeface="Times New Roman" panose="02020603050405020304" pitchFamily="18" charset="0"/>
+              </a:rPr>
+              <a:t>(</a:t>
+            </a:r>
+            <a:r>
+              <a:rPr lang="en-US" altLang="en-US" dirty="0" err="1">
+                <a:cs typeface="Times New Roman" panose="02020603050405020304" pitchFamily="18" charset="0"/>
+              </a:rPr>
+              <a:t>element.toString</a:t>
+            </a:r>
+            <a:r>
+              <a:rPr lang="en-US" altLang="en-US" dirty="0">
+                <a:cs typeface="Times New Roman" panose="02020603050405020304" pitchFamily="18" charset="0"/>
+              </a:rPr>
+              <a:t>() + " ");</a:t>
+            </a:r>
+          </a:p>
+          <a:p>
+            <a:endParaRPr lang="en-US" dirty="0"/>
           </a:p>
         </p:txBody>
       </p:sp>
@@ -1657,7 +1654,7 @@
     </p:spTree>
     <p:extLst>
       <p:ext uri="{BB962C8B-B14F-4D97-AF65-F5344CB8AC3E}">
-        <p14:creationId xmlns:p14="http://schemas.microsoft.com/office/powerpoint/2010/main" val="3521675206"/>
+        <p14:creationId xmlns:p14="http://schemas.microsoft.com/office/powerpoint/2010/main" val="179759424"/>
       </p:ext>
     </p:extLst>
   </p:cSld>
@@ -1668,96 +1665,6 @@
 </file>
 
 <file path=ppt/notesSlides/notesSlide12.xml><?xml version="1.0" encoding="utf-8"?>
-<p:notes xmlns:a="http://schemas.openxmlformats.org/drawingml/2006/main" xmlns:r="http://schemas.openxmlformats.org/officeDocument/2006/relationships" xmlns:p="http://schemas.openxmlformats.org/presentationml/2006/main">
-  <p:cSld>
-    <p:spTree>
-      <p:nvGrpSpPr>
-        <p:cNvPr id="1" name=""/>
-        <p:cNvGrpSpPr/>
-        <p:nvPr/>
-      </p:nvGrpSpPr>
-      <p:grpSpPr>
-        <a:xfrm>
-          <a:off x="0" y="0"/>
-          <a:ext cx="0" cy="0"/>
-          <a:chOff x="0" y="0"/>
-          <a:chExt cx="0" cy="0"/>
-        </a:xfrm>
-      </p:grpSpPr>
-      <p:sp>
-        <p:nvSpPr>
-          <p:cNvPr id="2" name="Slide Image Placeholder 1"/>
-          <p:cNvSpPr>
-            <a:spLocks noGrp="1" noRot="1" noChangeAspect="1"/>
-          </p:cNvSpPr>
-          <p:nvPr>
-            <p:ph type="sldImg"/>
-          </p:nvPr>
-        </p:nvSpPr>
-        <p:spPr/>
-      </p:sp>
-      <p:sp>
-        <p:nvSpPr>
-          <p:cNvPr id="3" name="Notes Placeholder 2"/>
-          <p:cNvSpPr>
-            <a:spLocks noGrp="1"/>
-          </p:cNvSpPr>
-          <p:nvPr>
-            <p:ph type="body" idx="1"/>
-          </p:nvPr>
-        </p:nvSpPr>
-        <p:spPr/>
-        <p:txBody>
-          <a:bodyPr/>
-          <a:lstStyle/>
-          <a:p>
-            <a:endParaRPr lang="en-US"/>
-          </a:p>
-        </p:txBody>
-      </p:sp>
-      <p:sp>
-        <p:nvSpPr>
-          <p:cNvPr id="4" name="Slide Number Placeholder 3"/>
-          <p:cNvSpPr>
-            <a:spLocks noGrp="1"/>
-          </p:cNvSpPr>
-          <p:nvPr>
-            <p:ph type="sldNum" sz="quarter" idx="5"/>
-          </p:nvPr>
-        </p:nvSpPr>
-        <p:spPr/>
-        <p:txBody>
-          <a:bodyPr/>
-          <a:lstStyle/>
-          <a:p>
-            <a:pPr>
-              <a:defRPr/>
-            </a:pPr>
-            <a:fld id="{B8378557-9440-479E-8829-B26054EBEED3}" type="slidenum">
-              <a:rPr lang="en-US" altLang="en-US" smtClean="0"/>
-              <a:pPr>
-                <a:defRPr/>
-              </a:pPr>
-              <a:t>12</a:t>
-            </a:fld>
-            <a:endParaRPr lang="en-US" altLang="en-US"/>
-          </a:p>
-        </p:txBody>
-      </p:sp>
-    </p:spTree>
-    <p:extLst>
-      <p:ext uri="{BB962C8B-B14F-4D97-AF65-F5344CB8AC3E}">
-        <p14:creationId xmlns:p14="http://schemas.microsoft.com/office/powerpoint/2010/main" val="2267048302"/>
-      </p:ext>
-    </p:extLst>
-  </p:cSld>
-  <p:clrMapOvr>
-    <a:masterClrMapping/>
-  </p:clrMapOvr>
-</p:notes>
-</file>
-
-<file path=ppt/notesSlides/notesSlide13.xml><?xml version="1.0" encoding="utf-8"?>
 <p:notes xmlns:a="http://schemas.openxmlformats.org/drawingml/2006/main" xmlns:r="http://schemas.openxmlformats.org/officeDocument/2006/relationships" xmlns:p="http://schemas.openxmlformats.org/presentationml/2006/main">
   <p:cSld>
     <p:spTree>
@@ -1833,7 +1740,7 @@
               <a:pPr>
                 <a:defRPr/>
               </a:pPr>
-              <a:t>13</a:t>
+              <a:t>12</a:t>
             </a:fld>
             <a:endParaRPr lang="en-US" altLang="en-US"/>
           </a:p>
@@ -1842,7 +1749,7 @@
     </p:spTree>
     <p:extLst>
       <p:ext uri="{BB962C8B-B14F-4D97-AF65-F5344CB8AC3E}">
-        <p14:creationId xmlns:p14="http://schemas.microsoft.com/office/powerpoint/2010/main" val="2356819800"/>
+        <p14:creationId xmlns:p14="http://schemas.microsoft.com/office/powerpoint/2010/main" val="3521675206"/>
       </p:ext>
     </p:extLst>
   </p:cSld>
@@ -1852,549 +1759,7 @@
 </p:notes>
 </file>
 
-<file path=ppt/notesSlides/notesSlide14.xml><?xml version="1.0" encoding="utf-8"?>
-<p:notes xmlns:a="http://schemas.openxmlformats.org/drawingml/2006/main" xmlns:r="http://schemas.openxmlformats.org/officeDocument/2006/relationships" xmlns:p="http://schemas.openxmlformats.org/presentationml/2006/main">
-  <p:cSld>
-    <p:spTree>
-      <p:nvGrpSpPr>
-        <p:cNvPr id="1" name=""/>
-        <p:cNvGrpSpPr/>
-        <p:nvPr/>
-      </p:nvGrpSpPr>
-      <p:grpSpPr>
-        <a:xfrm>
-          <a:off x="0" y="0"/>
-          <a:ext cx="0" cy="0"/>
-          <a:chOff x="0" y="0"/>
-          <a:chExt cx="0" cy="0"/>
-        </a:xfrm>
-      </p:grpSpPr>
-      <p:sp>
-        <p:nvSpPr>
-          <p:cNvPr id="13314" name="Rectangle 2"/>
-          <p:cNvSpPr>
-            <a:spLocks noGrp="1" noChangeArrowheads="1"/>
-          </p:cNvSpPr>
-          <p:nvPr>
-            <p:ph type="hdr" sz="quarter"/>
-          </p:nvPr>
-        </p:nvSpPr>
-        <p:spPr>
-          <a:noFill/>
-          <a:ln/>
-          <a:extLst>
-            <a:ext uri="{909E8E84-426E-40dd-AFC4-6F175D3DCCD1}">
-              <a14:hiddenFill xmlns:a14="http://schemas.microsoft.com/office/drawing/2010/main" xmlns="">
-                <a:solidFill>
-                  <a:srgbClr val="FFFFFF"/>
-                </a:solidFill>
-              </a14:hiddenFill>
-            </a:ext>
-            <a:ext uri="{91240B29-F687-4f45-9708-019B960494DF}">
-              <a14:hiddenLine xmlns:a14="http://schemas.microsoft.com/office/drawing/2010/main" xmlns="" w="9525">
-                <a:solidFill>
-                  <a:srgbClr val="000000"/>
-                </a:solidFill>
-                <a:miter lim="800000"/>
-                <a:headEnd/>
-                <a:tailEnd/>
-              </a14:hiddenLine>
-            </a:ext>
-          </a:extLst>
-        </p:spPr>
-        <p:txBody>
-          <a:bodyPr/>
-          <a:lstStyle>
-            <a:lvl1pPr defTabSz="1009213" eaLnBrk="0" hangingPunct="0">
-              <a:defRPr sz="2500">
-                <a:solidFill>
-                  <a:schemeClr val="tx1"/>
-                </a:solidFill>
-                <a:latin typeface="Tahoma" charset="0"/>
-                <a:ea typeface="ＭＳ Ｐゴシック" charset="0"/>
-              </a:defRPr>
-            </a:lvl1pPr>
-            <a:lvl2pPr marL="776829" indent="-298780" defTabSz="1009213" eaLnBrk="0" hangingPunct="0">
-              <a:defRPr sz="2500">
-                <a:solidFill>
-                  <a:schemeClr val="tx1"/>
-                </a:solidFill>
-                <a:latin typeface="Tahoma" charset="0"/>
-                <a:ea typeface="ＭＳ Ｐゴシック" charset="0"/>
-              </a:defRPr>
-            </a:lvl2pPr>
-            <a:lvl3pPr marL="1195121" indent="-239024" defTabSz="1009213" eaLnBrk="0" hangingPunct="0">
-              <a:defRPr sz="2500">
-                <a:solidFill>
-                  <a:schemeClr val="tx1"/>
-                </a:solidFill>
-                <a:latin typeface="Tahoma" charset="0"/>
-                <a:ea typeface="ＭＳ Ｐゴシック" charset="0"/>
-              </a:defRPr>
-            </a:lvl3pPr>
-            <a:lvl4pPr marL="1673169" indent="-239024" defTabSz="1009213" eaLnBrk="0" hangingPunct="0">
-              <a:defRPr sz="2500">
-                <a:solidFill>
-                  <a:schemeClr val="tx1"/>
-                </a:solidFill>
-                <a:latin typeface="Tahoma" charset="0"/>
-                <a:ea typeface="ＭＳ Ｐゴシック" charset="0"/>
-              </a:defRPr>
-            </a:lvl4pPr>
-            <a:lvl5pPr marL="2151217" indent="-239024" defTabSz="1009213" eaLnBrk="0" hangingPunct="0">
-              <a:defRPr sz="2500">
-                <a:solidFill>
-                  <a:schemeClr val="tx1"/>
-                </a:solidFill>
-                <a:latin typeface="Tahoma" charset="0"/>
-                <a:ea typeface="ＭＳ Ｐゴシック" charset="0"/>
-              </a:defRPr>
-            </a:lvl5pPr>
-            <a:lvl6pPr marL="2629266" indent="-239024" algn="ctr" defTabSz="1009213" eaLnBrk="0" fontAlgn="base" hangingPunct="0">
-              <a:spcBef>
-                <a:spcPct val="0"/>
-              </a:spcBef>
-              <a:spcAft>
-                <a:spcPct val="0"/>
-              </a:spcAft>
-              <a:defRPr sz="2500">
-                <a:solidFill>
-                  <a:schemeClr val="tx1"/>
-                </a:solidFill>
-                <a:latin typeface="Tahoma" charset="0"/>
-                <a:ea typeface="ＭＳ Ｐゴシック" charset="0"/>
-              </a:defRPr>
-            </a:lvl6pPr>
-            <a:lvl7pPr marL="3107314" indent="-239024" algn="ctr" defTabSz="1009213" eaLnBrk="0" fontAlgn="base" hangingPunct="0">
-              <a:spcBef>
-                <a:spcPct val="0"/>
-              </a:spcBef>
-              <a:spcAft>
-                <a:spcPct val="0"/>
-              </a:spcAft>
-              <a:defRPr sz="2500">
-                <a:solidFill>
-                  <a:schemeClr val="tx1"/>
-                </a:solidFill>
-                <a:latin typeface="Tahoma" charset="0"/>
-                <a:ea typeface="ＭＳ Ｐゴシック" charset="0"/>
-              </a:defRPr>
-            </a:lvl7pPr>
-            <a:lvl8pPr marL="3585362" indent="-239024" algn="ctr" defTabSz="1009213" eaLnBrk="0" fontAlgn="base" hangingPunct="0">
-              <a:spcBef>
-                <a:spcPct val="0"/>
-              </a:spcBef>
-              <a:spcAft>
-                <a:spcPct val="0"/>
-              </a:spcAft>
-              <a:defRPr sz="2500">
-                <a:solidFill>
-                  <a:schemeClr val="tx1"/>
-                </a:solidFill>
-                <a:latin typeface="Tahoma" charset="0"/>
-                <a:ea typeface="ＭＳ Ｐゴシック" charset="0"/>
-              </a:defRPr>
-            </a:lvl8pPr>
-            <a:lvl9pPr marL="4063411" indent="-239024" algn="ctr" defTabSz="1009213" eaLnBrk="0" fontAlgn="base" hangingPunct="0">
-              <a:spcBef>
-                <a:spcPct val="0"/>
-              </a:spcBef>
-              <a:spcAft>
-                <a:spcPct val="0"/>
-              </a:spcAft>
-              <a:defRPr sz="2500">
-                <a:solidFill>
-                  <a:schemeClr val="tx1"/>
-                </a:solidFill>
-                <a:latin typeface="Tahoma" charset="0"/>
-                <a:ea typeface="ＭＳ Ｐゴシック" charset="0"/>
-              </a:defRPr>
-            </a:lvl9pPr>
-          </a:lstStyle>
-          <a:p>
-            <a:pPr eaLnBrk="1" hangingPunct="1"/>
-            <a:r>
-              <a:rPr lang="en-US" sz="1400"/>
-              <a:t>Maps</a:t>
-            </a:r>
-          </a:p>
-        </p:txBody>
-      </p:sp>
-      <p:sp>
-        <p:nvSpPr>
-          <p:cNvPr id="13315" name="Rectangle 3"/>
-          <p:cNvSpPr>
-            <a:spLocks noGrp="1" noChangeArrowheads="1"/>
-          </p:cNvSpPr>
-          <p:nvPr>
-            <p:ph type="dt" sz="quarter" idx="1"/>
-          </p:nvPr>
-        </p:nvSpPr>
-        <p:spPr>
-          <a:noFill/>
-          <a:ln/>
-          <a:extLst>
-            <a:ext uri="{909E8E84-426E-40dd-AFC4-6F175D3DCCD1}">
-              <a14:hiddenFill xmlns:a14="http://schemas.microsoft.com/office/drawing/2010/main" xmlns="">
-                <a:solidFill>
-                  <a:srgbClr val="FFFFFF"/>
-                </a:solidFill>
-              </a14:hiddenFill>
-            </a:ext>
-            <a:ext uri="{91240B29-F687-4f45-9708-019B960494DF}">
-              <a14:hiddenLine xmlns:a14="http://schemas.microsoft.com/office/drawing/2010/main" xmlns="" w="9525">
-                <a:solidFill>
-                  <a:srgbClr val="000000"/>
-                </a:solidFill>
-                <a:miter lim="800000"/>
-                <a:headEnd/>
-                <a:tailEnd/>
-              </a14:hiddenLine>
-            </a:ext>
-          </a:extLst>
-        </p:spPr>
-        <p:txBody>
-          <a:bodyPr/>
-          <a:lstStyle>
-            <a:lvl1pPr defTabSz="1009213" eaLnBrk="0" hangingPunct="0">
-              <a:defRPr sz="2500">
-                <a:solidFill>
-                  <a:schemeClr val="tx1"/>
-                </a:solidFill>
-                <a:latin typeface="Tahoma" charset="0"/>
-                <a:ea typeface="ＭＳ Ｐゴシック" charset="0"/>
-              </a:defRPr>
-            </a:lvl1pPr>
-            <a:lvl2pPr marL="776829" indent="-298780" defTabSz="1009213" eaLnBrk="0" hangingPunct="0">
-              <a:defRPr sz="2500">
-                <a:solidFill>
-                  <a:schemeClr val="tx1"/>
-                </a:solidFill>
-                <a:latin typeface="Tahoma" charset="0"/>
-                <a:ea typeface="ＭＳ Ｐゴシック" charset="0"/>
-              </a:defRPr>
-            </a:lvl2pPr>
-            <a:lvl3pPr marL="1195121" indent="-239024" defTabSz="1009213" eaLnBrk="0" hangingPunct="0">
-              <a:defRPr sz="2500">
-                <a:solidFill>
-                  <a:schemeClr val="tx1"/>
-                </a:solidFill>
-                <a:latin typeface="Tahoma" charset="0"/>
-                <a:ea typeface="ＭＳ Ｐゴシック" charset="0"/>
-              </a:defRPr>
-            </a:lvl3pPr>
-            <a:lvl4pPr marL="1673169" indent="-239024" defTabSz="1009213" eaLnBrk="0" hangingPunct="0">
-              <a:defRPr sz="2500">
-                <a:solidFill>
-                  <a:schemeClr val="tx1"/>
-                </a:solidFill>
-                <a:latin typeface="Tahoma" charset="0"/>
-                <a:ea typeface="ＭＳ Ｐゴシック" charset="0"/>
-              </a:defRPr>
-            </a:lvl4pPr>
-            <a:lvl5pPr marL="2151217" indent="-239024" defTabSz="1009213" eaLnBrk="0" hangingPunct="0">
-              <a:defRPr sz="2500">
-                <a:solidFill>
-                  <a:schemeClr val="tx1"/>
-                </a:solidFill>
-                <a:latin typeface="Tahoma" charset="0"/>
-                <a:ea typeface="ＭＳ Ｐゴシック" charset="0"/>
-              </a:defRPr>
-            </a:lvl5pPr>
-            <a:lvl6pPr marL="2629266" indent="-239024" algn="ctr" defTabSz="1009213" eaLnBrk="0" fontAlgn="base" hangingPunct="0">
-              <a:spcBef>
-                <a:spcPct val="0"/>
-              </a:spcBef>
-              <a:spcAft>
-                <a:spcPct val="0"/>
-              </a:spcAft>
-              <a:defRPr sz="2500">
-                <a:solidFill>
-                  <a:schemeClr val="tx1"/>
-                </a:solidFill>
-                <a:latin typeface="Tahoma" charset="0"/>
-                <a:ea typeface="ＭＳ Ｐゴシック" charset="0"/>
-              </a:defRPr>
-            </a:lvl6pPr>
-            <a:lvl7pPr marL="3107314" indent="-239024" algn="ctr" defTabSz="1009213" eaLnBrk="0" fontAlgn="base" hangingPunct="0">
-              <a:spcBef>
-                <a:spcPct val="0"/>
-              </a:spcBef>
-              <a:spcAft>
-                <a:spcPct val="0"/>
-              </a:spcAft>
-              <a:defRPr sz="2500">
-                <a:solidFill>
-                  <a:schemeClr val="tx1"/>
-                </a:solidFill>
-                <a:latin typeface="Tahoma" charset="0"/>
-                <a:ea typeface="ＭＳ Ｐゴシック" charset="0"/>
-              </a:defRPr>
-            </a:lvl7pPr>
-            <a:lvl8pPr marL="3585362" indent="-239024" algn="ctr" defTabSz="1009213" eaLnBrk="0" fontAlgn="base" hangingPunct="0">
-              <a:spcBef>
-                <a:spcPct val="0"/>
-              </a:spcBef>
-              <a:spcAft>
-                <a:spcPct val="0"/>
-              </a:spcAft>
-              <a:defRPr sz="2500">
-                <a:solidFill>
-                  <a:schemeClr val="tx1"/>
-                </a:solidFill>
-                <a:latin typeface="Tahoma" charset="0"/>
-                <a:ea typeface="ＭＳ Ｐゴシック" charset="0"/>
-              </a:defRPr>
-            </a:lvl8pPr>
-            <a:lvl9pPr marL="4063411" indent="-239024" algn="ctr" defTabSz="1009213" eaLnBrk="0" fontAlgn="base" hangingPunct="0">
-              <a:spcBef>
-                <a:spcPct val="0"/>
-              </a:spcBef>
-              <a:spcAft>
-                <a:spcPct val="0"/>
-              </a:spcAft>
-              <a:defRPr sz="2500">
-                <a:solidFill>
-                  <a:schemeClr val="tx1"/>
-                </a:solidFill>
-                <a:latin typeface="Tahoma" charset="0"/>
-                <a:ea typeface="ＭＳ Ｐゴシック" charset="0"/>
-              </a:defRPr>
-            </a:lvl9pPr>
-          </a:lstStyle>
-          <a:p>
-            <a:pPr eaLnBrk="1" hangingPunct="1"/>
-            <a:fld id="{254273B8-01BA-B842-A81D-0E161D5BCB65}" type="datetime1">
-              <a:rPr lang="en-US" sz="1400"/>
-              <a:t>11/20/2024</a:t>
-            </a:fld>
-            <a:endParaRPr lang="en-US" sz="1400"/>
-          </a:p>
-        </p:txBody>
-      </p:sp>
-      <p:sp>
-        <p:nvSpPr>
-          <p:cNvPr id="13316" name="Rectangle 7"/>
-          <p:cNvSpPr>
-            <a:spLocks noGrp="1" noChangeArrowheads="1"/>
-          </p:cNvSpPr>
-          <p:nvPr>
-            <p:ph type="sldNum" sz="quarter" idx="5"/>
-          </p:nvPr>
-        </p:nvSpPr>
-        <p:spPr>
-          <a:noFill/>
-          <a:ln/>
-          <a:extLst>
-            <a:ext uri="{909E8E84-426E-40dd-AFC4-6F175D3DCCD1}">
-              <a14:hiddenFill xmlns:a14="http://schemas.microsoft.com/office/drawing/2010/main" xmlns="">
-                <a:solidFill>
-                  <a:srgbClr val="FFFFFF"/>
-                </a:solidFill>
-              </a14:hiddenFill>
-            </a:ext>
-            <a:ext uri="{91240B29-F687-4f45-9708-019B960494DF}">
-              <a14:hiddenLine xmlns:a14="http://schemas.microsoft.com/office/drawing/2010/main" xmlns="" w="9525">
-                <a:solidFill>
-                  <a:srgbClr val="000000"/>
-                </a:solidFill>
-                <a:miter lim="800000"/>
-                <a:headEnd/>
-                <a:tailEnd/>
-              </a14:hiddenLine>
-            </a:ext>
-          </a:extLst>
-        </p:spPr>
-        <p:txBody>
-          <a:bodyPr/>
-          <a:lstStyle>
-            <a:lvl1pPr defTabSz="1009213" eaLnBrk="0" hangingPunct="0">
-              <a:defRPr sz="2500">
-                <a:solidFill>
-                  <a:schemeClr val="tx1"/>
-                </a:solidFill>
-                <a:latin typeface="Tahoma" charset="0"/>
-                <a:ea typeface="ＭＳ Ｐゴシック" charset="0"/>
-              </a:defRPr>
-            </a:lvl1pPr>
-            <a:lvl2pPr marL="776829" indent="-298780" defTabSz="1009213" eaLnBrk="0" hangingPunct="0">
-              <a:defRPr sz="2500">
-                <a:solidFill>
-                  <a:schemeClr val="tx1"/>
-                </a:solidFill>
-                <a:latin typeface="Tahoma" charset="0"/>
-                <a:ea typeface="ＭＳ Ｐゴシック" charset="0"/>
-              </a:defRPr>
-            </a:lvl2pPr>
-            <a:lvl3pPr marL="1195121" indent="-239024" defTabSz="1009213" eaLnBrk="0" hangingPunct="0">
-              <a:defRPr sz="2500">
-                <a:solidFill>
-                  <a:schemeClr val="tx1"/>
-                </a:solidFill>
-                <a:latin typeface="Tahoma" charset="0"/>
-                <a:ea typeface="ＭＳ Ｐゴシック" charset="0"/>
-              </a:defRPr>
-            </a:lvl3pPr>
-            <a:lvl4pPr marL="1673169" indent="-239024" defTabSz="1009213" eaLnBrk="0" hangingPunct="0">
-              <a:defRPr sz="2500">
-                <a:solidFill>
-                  <a:schemeClr val="tx1"/>
-                </a:solidFill>
-                <a:latin typeface="Tahoma" charset="0"/>
-                <a:ea typeface="ＭＳ Ｐゴシック" charset="0"/>
-              </a:defRPr>
-            </a:lvl4pPr>
-            <a:lvl5pPr marL="2151217" indent="-239024" defTabSz="1009213" eaLnBrk="0" hangingPunct="0">
-              <a:defRPr sz="2500">
-                <a:solidFill>
-                  <a:schemeClr val="tx1"/>
-                </a:solidFill>
-                <a:latin typeface="Tahoma" charset="0"/>
-                <a:ea typeface="ＭＳ Ｐゴシック" charset="0"/>
-              </a:defRPr>
-            </a:lvl5pPr>
-            <a:lvl6pPr marL="2629266" indent="-239024" algn="ctr" defTabSz="1009213" eaLnBrk="0" fontAlgn="base" hangingPunct="0">
-              <a:spcBef>
-                <a:spcPct val="0"/>
-              </a:spcBef>
-              <a:spcAft>
-                <a:spcPct val="0"/>
-              </a:spcAft>
-              <a:defRPr sz="2500">
-                <a:solidFill>
-                  <a:schemeClr val="tx1"/>
-                </a:solidFill>
-                <a:latin typeface="Tahoma" charset="0"/>
-                <a:ea typeface="ＭＳ Ｐゴシック" charset="0"/>
-              </a:defRPr>
-            </a:lvl6pPr>
-            <a:lvl7pPr marL="3107314" indent="-239024" algn="ctr" defTabSz="1009213" eaLnBrk="0" fontAlgn="base" hangingPunct="0">
-              <a:spcBef>
-                <a:spcPct val="0"/>
-              </a:spcBef>
-              <a:spcAft>
-                <a:spcPct val="0"/>
-              </a:spcAft>
-              <a:defRPr sz="2500">
-                <a:solidFill>
-                  <a:schemeClr val="tx1"/>
-                </a:solidFill>
-                <a:latin typeface="Tahoma" charset="0"/>
-                <a:ea typeface="ＭＳ Ｐゴシック" charset="0"/>
-              </a:defRPr>
-            </a:lvl7pPr>
-            <a:lvl8pPr marL="3585362" indent="-239024" algn="ctr" defTabSz="1009213" eaLnBrk="0" fontAlgn="base" hangingPunct="0">
-              <a:spcBef>
-                <a:spcPct val="0"/>
-              </a:spcBef>
-              <a:spcAft>
-                <a:spcPct val="0"/>
-              </a:spcAft>
-              <a:defRPr sz="2500">
-                <a:solidFill>
-                  <a:schemeClr val="tx1"/>
-                </a:solidFill>
-                <a:latin typeface="Tahoma" charset="0"/>
-                <a:ea typeface="ＭＳ Ｐゴシック" charset="0"/>
-              </a:defRPr>
-            </a:lvl8pPr>
-            <a:lvl9pPr marL="4063411" indent="-239024" algn="ctr" defTabSz="1009213" eaLnBrk="0" fontAlgn="base" hangingPunct="0">
-              <a:spcBef>
-                <a:spcPct val="0"/>
-              </a:spcBef>
-              <a:spcAft>
-                <a:spcPct val="0"/>
-              </a:spcAft>
-              <a:defRPr sz="2500">
-                <a:solidFill>
-                  <a:schemeClr val="tx1"/>
-                </a:solidFill>
-                <a:latin typeface="Tahoma" charset="0"/>
-                <a:ea typeface="ＭＳ Ｐゴシック" charset="0"/>
-              </a:defRPr>
-            </a:lvl9pPr>
-          </a:lstStyle>
-          <a:p>
-            <a:pPr eaLnBrk="1" hangingPunct="1"/>
-            <a:fld id="{7B77E0FB-41B3-3E43-9315-872A851C0831}" type="slidenum">
-              <a:rPr lang="en-US" sz="1400"/>
-              <a:pPr eaLnBrk="1" hangingPunct="1"/>
-              <a:t>14</a:t>
-            </a:fld>
-            <a:endParaRPr lang="en-US" sz="1400"/>
-          </a:p>
-        </p:txBody>
-      </p:sp>
-      <p:sp>
-        <p:nvSpPr>
-          <p:cNvPr id="13317" name="Rectangle 2"/>
-          <p:cNvSpPr>
-            <a:spLocks noGrp="1" noRot="1" noChangeAspect="1" noChangeArrowheads="1" noTextEdit="1"/>
-          </p:cNvSpPr>
-          <p:nvPr>
-            <p:ph type="sldImg"/>
-          </p:nvPr>
-        </p:nvSpPr>
-        <p:spPr>
-          <a:ln/>
-        </p:spPr>
-      </p:sp>
-      <p:sp>
-        <p:nvSpPr>
-          <p:cNvPr id="13318" name="Rectangle 3"/>
-          <p:cNvSpPr>
-            <a:spLocks noGrp="1" noChangeArrowheads="1"/>
-          </p:cNvSpPr>
-          <p:nvPr>
-            <p:ph type="body" idx="1"/>
-          </p:nvPr>
-        </p:nvSpPr>
-        <p:spPr>
-          <a:noFill/>
-          <a:ln/>
-          <a:extLst>
-            <a:ext uri="{909E8E84-426E-40dd-AFC4-6F175D3DCCD1}">
-              <a14:hiddenFill xmlns:a14="http://schemas.microsoft.com/office/drawing/2010/main" xmlns="">
-                <a:solidFill>
-                  <a:srgbClr val="FFFFFF"/>
-                </a:solidFill>
-              </a14:hiddenFill>
-            </a:ext>
-            <a:ext uri="{91240B29-F687-4f45-9708-019B960494DF}">
-              <a14:hiddenLine xmlns:a14="http://schemas.microsoft.com/office/drawing/2010/main" xmlns="" w="9525">
-                <a:solidFill>
-                  <a:srgbClr val="000000"/>
-                </a:solidFill>
-                <a:miter lim="800000"/>
-                <a:headEnd/>
-                <a:tailEnd/>
-              </a14:hiddenLine>
-            </a:ext>
-            <a:ext uri="{FAA26D3D-D897-4be2-8F04-BA451C77F1D7}">
-              <ma14:placeholderFlag xmlns:ma14="http://schemas.microsoft.com/office/mac/drawingml/2011/main" xmlns="" val="1"/>
-            </a:ext>
-          </a:extLst>
-        </p:spPr>
-        <p:txBody>
-          <a:bodyPr/>
-          <a:lstStyle/>
-          <a:p>
-            <a:pPr eaLnBrk="1" hangingPunct="1"/>
-            <a:endParaRPr lang="en-US">
-              <a:latin typeface="Times New Roman" charset="0"/>
-            </a:endParaRPr>
-          </a:p>
-        </p:txBody>
-      </p:sp>
-    </p:spTree>
-  </p:cSld>
-  <p:clrMapOvr>
-    <a:masterClrMapping/>
-  </p:clrMapOvr>
-</p:notes>
-</file>
-
-<file path=ppt/notesSlides/notesSlide15.xml><?xml version="1.0" encoding="utf-8"?>
+<file path=ppt/notesSlides/notesSlide13.xml><?xml version="1.0" encoding="utf-8"?>
 <p:notes xmlns:a="http://schemas.openxmlformats.org/drawingml/2006/main" xmlns:r="http://schemas.openxmlformats.org/officeDocument/2006/relationships" xmlns:p="http://schemas.openxmlformats.org/presentationml/2006/main">
   <p:cSld>
     <p:spTree>
@@ -2438,54 +1803,7 @@
           <a:bodyPr/>
           <a:lstStyle/>
           <a:p>
-            <a:r>
-              <a:rPr lang="en-US" dirty="0"/>
-              <a:t>Synonyms for ADT Dictionary</a:t>
-            </a:r>
-          </a:p>
-          <a:p>
-            <a:pPr lvl="1"/>
-            <a:r>
-              <a:rPr lang="en-US" dirty="0"/>
-              <a:t>Map</a:t>
-            </a:r>
-          </a:p>
-          <a:p>
-            <a:pPr lvl="1"/>
-            <a:r>
-              <a:rPr lang="en-US" dirty="0"/>
-              <a:t>Table</a:t>
-            </a:r>
-          </a:p>
-          <a:p>
-            <a:pPr lvl="1"/>
-            <a:r>
-              <a:rPr lang="en-US" dirty="0"/>
-              <a:t>Associative array</a:t>
-            </a:r>
-          </a:p>
-          <a:p>
-            <a:r>
-              <a:rPr lang="en-US" dirty="0"/>
-              <a:t>An entry in the dictionary contains</a:t>
-            </a:r>
-          </a:p>
-          <a:p>
-            <a:pPr lvl="1"/>
-            <a:r>
-              <a:rPr lang="en-US" dirty="0"/>
-              <a:t>Keyword, search key</a:t>
-            </a:r>
-          </a:p>
-          <a:p>
-            <a:pPr lvl="1"/>
-            <a:r>
-              <a:rPr lang="en-US" dirty="0"/>
-              <a:t>Value</a:t>
-            </a:r>
-          </a:p>
-          <a:p>
-            <a:endParaRPr lang="en-US" dirty="0"/>
+            <a:endParaRPr lang="en-US"/>
           </a:p>
         </p:txBody>
       </p:sp>
@@ -2512,7 +1830,7 @@
               <a:pPr>
                 <a:defRPr/>
               </a:pPr>
-              <a:t>15</a:t>
+              <a:t>13</a:t>
             </a:fld>
             <a:endParaRPr lang="en-US" altLang="en-US"/>
           </a:p>
@@ -2521,9 +1839,646 @@
     </p:spTree>
     <p:extLst>
       <p:ext uri="{BB962C8B-B14F-4D97-AF65-F5344CB8AC3E}">
-        <p14:creationId xmlns:p14="http://schemas.microsoft.com/office/powerpoint/2010/main" val="44258362"/>
+        <p14:creationId xmlns:p14="http://schemas.microsoft.com/office/powerpoint/2010/main" val="2267048302"/>
       </p:ext>
     </p:extLst>
+  </p:cSld>
+  <p:clrMapOvr>
+    <a:masterClrMapping/>
+  </p:clrMapOvr>
+</p:notes>
+</file>
+
+<file path=ppt/notesSlides/notesSlide14.xml><?xml version="1.0" encoding="utf-8"?>
+<p:notes xmlns:a="http://schemas.openxmlformats.org/drawingml/2006/main" xmlns:r="http://schemas.openxmlformats.org/officeDocument/2006/relationships" xmlns:p="http://schemas.openxmlformats.org/presentationml/2006/main">
+  <p:cSld>
+    <p:spTree>
+      <p:nvGrpSpPr>
+        <p:cNvPr id="1" name=""/>
+        <p:cNvGrpSpPr/>
+        <p:nvPr/>
+      </p:nvGrpSpPr>
+      <p:grpSpPr>
+        <a:xfrm>
+          <a:off x="0" y="0"/>
+          <a:ext cx="0" cy="0"/>
+          <a:chOff x="0" y="0"/>
+          <a:chExt cx="0" cy="0"/>
+        </a:xfrm>
+      </p:grpSpPr>
+      <p:sp>
+        <p:nvSpPr>
+          <p:cNvPr id="2" name="Slide Image Placeholder 1"/>
+          <p:cNvSpPr>
+            <a:spLocks noGrp="1" noRot="1" noChangeAspect="1"/>
+          </p:cNvSpPr>
+          <p:nvPr>
+            <p:ph type="sldImg"/>
+          </p:nvPr>
+        </p:nvSpPr>
+        <p:spPr>
+          <a:xfrm>
+            <a:off x="1266825" y="727075"/>
+            <a:ext cx="4781550" cy="3586163"/>
+          </a:xfrm>
+        </p:spPr>
+      </p:sp>
+      <p:sp>
+        <p:nvSpPr>
+          <p:cNvPr id="3" name="Notes Placeholder 2"/>
+          <p:cNvSpPr>
+            <a:spLocks noGrp="1"/>
+          </p:cNvSpPr>
+          <p:nvPr>
+            <p:ph type="body" idx="1"/>
+          </p:nvPr>
+        </p:nvSpPr>
+        <p:spPr/>
+        <p:txBody>
+          <a:bodyPr/>
+          <a:lstStyle/>
+          <a:p>
+            <a:endParaRPr lang="en-US"/>
+          </a:p>
+        </p:txBody>
+      </p:sp>
+      <p:sp>
+        <p:nvSpPr>
+          <p:cNvPr id="4" name="Slide Number Placeholder 3"/>
+          <p:cNvSpPr>
+            <a:spLocks noGrp="1"/>
+          </p:cNvSpPr>
+          <p:nvPr>
+            <p:ph type="sldNum" sz="quarter" idx="5"/>
+          </p:nvPr>
+        </p:nvSpPr>
+        <p:spPr/>
+        <p:txBody>
+          <a:bodyPr/>
+          <a:lstStyle/>
+          <a:p>
+            <a:pPr>
+              <a:defRPr/>
+            </a:pPr>
+            <a:fld id="{B8378557-9440-479E-8829-B26054EBEED3}" type="slidenum">
+              <a:rPr lang="en-US" altLang="en-US" smtClean="0"/>
+              <a:pPr>
+                <a:defRPr/>
+              </a:pPr>
+              <a:t>14</a:t>
+            </a:fld>
+            <a:endParaRPr lang="en-US" altLang="en-US"/>
+          </a:p>
+        </p:txBody>
+      </p:sp>
+    </p:spTree>
+    <p:extLst>
+      <p:ext uri="{BB962C8B-B14F-4D97-AF65-F5344CB8AC3E}">
+        <p14:creationId xmlns:p14="http://schemas.microsoft.com/office/powerpoint/2010/main" val="2356819800"/>
+      </p:ext>
+    </p:extLst>
+  </p:cSld>
+  <p:clrMapOvr>
+    <a:masterClrMapping/>
+  </p:clrMapOvr>
+</p:notes>
+</file>
+
+<file path=ppt/notesSlides/notesSlide15.xml><?xml version="1.0" encoding="utf-8"?>
+<p:notes xmlns:a="http://schemas.openxmlformats.org/drawingml/2006/main" xmlns:r="http://schemas.openxmlformats.org/officeDocument/2006/relationships" xmlns:p="http://schemas.openxmlformats.org/presentationml/2006/main">
+  <p:cSld>
+    <p:spTree>
+      <p:nvGrpSpPr>
+        <p:cNvPr id="1" name=""/>
+        <p:cNvGrpSpPr/>
+        <p:nvPr/>
+      </p:nvGrpSpPr>
+      <p:grpSpPr>
+        <a:xfrm>
+          <a:off x="0" y="0"/>
+          <a:ext cx="0" cy="0"/>
+          <a:chOff x="0" y="0"/>
+          <a:chExt cx="0" cy="0"/>
+        </a:xfrm>
+      </p:grpSpPr>
+      <p:sp>
+        <p:nvSpPr>
+          <p:cNvPr id="13314" name="Rectangle 2"/>
+          <p:cNvSpPr>
+            <a:spLocks noGrp="1" noChangeArrowheads="1"/>
+          </p:cNvSpPr>
+          <p:nvPr>
+            <p:ph type="hdr" sz="quarter"/>
+          </p:nvPr>
+        </p:nvSpPr>
+        <p:spPr>
+          <a:noFill/>
+          <a:ln/>
+          <a:extLst>
+            <a:ext uri="{909E8E84-426E-40dd-AFC4-6F175D3DCCD1}">
+              <a14:hiddenFill xmlns="" xmlns:a14="http://schemas.microsoft.com/office/drawing/2010/main">
+                <a:solidFill>
+                  <a:srgbClr val="FFFFFF"/>
+                </a:solidFill>
+              </a14:hiddenFill>
+            </a:ext>
+            <a:ext uri="{91240B29-F687-4f45-9708-019B960494DF}">
+              <a14:hiddenLine xmlns="" xmlns:a14="http://schemas.microsoft.com/office/drawing/2010/main" w="9525">
+                <a:solidFill>
+                  <a:srgbClr val="000000"/>
+                </a:solidFill>
+                <a:miter lim="800000"/>
+                <a:headEnd/>
+                <a:tailEnd/>
+              </a14:hiddenLine>
+            </a:ext>
+          </a:extLst>
+        </p:spPr>
+        <p:txBody>
+          <a:bodyPr/>
+          <a:lstStyle>
+            <a:lvl1pPr defTabSz="1009213" eaLnBrk="0" hangingPunct="0">
+              <a:defRPr sz="2500">
+                <a:solidFill>
+                  <a:schemeClr val="tx1"/>
+                </a:solidFill>
+                <a:latin typeface="Tahoma" charset="0"/>
+                <a:ea typeface="ＭＳ Ｐゴシック" charset="0"/>
+              </a:defRPr>
+            </a:lvl1pPr>
+            <a:lvl2pPr marL="776829" indent="-298780" defTabSz="1009213" eaLnBrk="0" hangingPunct="0">
+              <a:defRPr sz="2500">
+                <a:solidFill>
+                  <a:schemeClr val="tx1"/>
+                </a:solidFill>
+                <a:latin typeface="Tahoma" charset="0"/>
+                <a:ea typeface="ＭＳ Ｐゴシック" charset="0"/>
+              </a:defRPr>
+            </a:lvl2pPr>
+            <a:lvl3pPr marL="1195121" indent="-239024" defTabSz="1009213" eaLnBrk="0" hangingPunct="0">
+              <a:defRPr sz="2500">
+                <a:solidFill>
+                  <a:schemeClr val="tx1"/>
+                </a:solidFill>
+                <a:latin typeface="Tahoma" charset="0"/>
+                <a:ea typeface="ＭＳ Ｐゴシック" charset="0"/>
+              </a:defRPr>
+            </a:lvl3pPr>
+            <a:lvl4pPr marL="1673169" indent="-239024" defTabSz="1009213" eaLnBrk="0" hangingPunct="0">
+              <a:defRPr sz="2500">
+                <a:solidFill>
+                  <a:schemeClr val="tx1"/>
+                </a:solidFill>
+                <a:latin typeface="Tahoma" charset="0"/>
+                <a:ea typeface="ＭＳ Ｐゴシック" charset="0"/>
+              </a:defRPr>
+            </a:lvl4pPr>
+            <a:lvl5pPr marL="2151217" indent="-239024" defTabSz="1009213" eaLnBrk="0" hangingPunct="0">
+              <a:defRPr sz="2500">
+                <a:solidFill>
+                  <a:schemeClr val="tx1"/>
+                </a:solidFill>
+                <a:latin typeface="Tahoma" charset="0"/>
+                <a:ea typeface="ＭＳ Ｐゴシック" charset="0"/>
+              </a:defRPr>
+            </a:lvl5pPr>
+            <a:lvl6pPr marL="2629266" indent="-239024" algn="ctr" defTabSz="1009213" eaLnBrk="0" fontAlgn="base" hangingPunct="0">
+              <a:spcBef>
+                <a:spcPct val="0"/>
+              </a:spcBef>
+              <a:spcAft>
+                <a:spcPct val="0"/>
+              </a:spcAft>
+              <a:defRPr sz="2500">
+                <a:solidFill>
+                  <a:schemeClr val="tx1"/>
+                </a:solidFill>
+                <a:latin typeface="Tahoma" charset="0"/>
+                <a:ea typeface="ＭＳ Ｐゴシック" charset="0"/>
+              </a:defRPr>
+            </a:lvl6pPr>
+            <a:lvl7pPr marL="3107314" indent="-239024" algn="ctr" defTabSz="1009213" eaLnBrk="0" fontAlgn="base" hangingPunct="0">
+              <a:spcBef>
+                <a:spcPct val="0"/>
+              </a:spcBef>
+              <a:spcAft>
+                <a:spcPct val="0"/>
+              </a:spcAft>
+              <a:defRPr sz="2500">
+                <a:solidFill>
+                  <a:schemeClr val="tx1"/>
+                </a:solidFill>
+                <a:latin typeface="Tahoma" charset="0"/>
+                <a:ea typeface="ＭＳ Ｐゴシック" charset="0"/>
+              </a:defRPr>
+            </a:lvl7pPr>
+            <a:lvl8pPr marL="3585362" indent="-239024" algn="ctr" defTabSz="1009213" eaLnBrk="0" fontAlgn="base" hangingPunct="0">
+              <a:spcBef>
+                <a:spcPct val="0"/>
+              </a:spcBef>
+              <a:spcAft>
+                <a:spcPct val="0"/>
+              </a:spcAft>
+              <a:defRPr sz="2500">
+                <a:solidFill>
+                  <a:schemeClr val="tx1"/>
+                </a:solidFill>
+                <a:latin typeface="Tahoma" charset="0"/>
+                <a:ea typeface="ＭＳ Ｐゴシック" charset="0"/>
+              </a:defRPr>
+            </a:lvl8pPr>
+            <a:lvl9pPr marL="4063411" indent="-239024" algn="ctr" defTabSz="1009213" eaLnBrk="0" fontAlgn="base" hangingPunct="0">
+              <a:spcBef>
+                <a:spcPct val="0"/>
+              </a:spcBef>
+              <a:spcAft>
+                <a:spcPct val="0"/>
+              </a:spcAft>
+              <a:defRPr sz="2500">
+                <a:solidFill>
+                  <a:schemeClr val="tx1"/>
+                </a:solidFill>
+                <a:latin typeface="Tahoma" charset="0"/>
+                <a:ea typeface="ＭＳ Ｐゴシック" charset="0"/>
+              </a:defRPr>
+            </a:lvl9pPr>
+          </a:lstStyle>
+          <a:p>
+            <a:pPr eaLnBrk="1" hangingPunct="1"/>
+            <a:r>
+              <a:rPr lang="en-US" sz="1400"/>
+              <a:t>Maps</a:t>
+            </a:r>
+          </a:p>
+        </p:txBody>
+      </p:sp>
+      <p:sp>
+        <p:nvSpPr>
+          <p:cNvPr id="13315" name="Rectangle 3"/>
+          <p:cNvSpPr>
+            <a:spLocks noGrp="1" noChangeArrowheads="1"/>
+          </p:cNvSpPr>
+          <p:nvPr>
+            <p:ph type="dt" sz="quarter" idx="1"/>
+          </p:nvPr>
+        </p:nvSpPr>
+        <p:spPr>
+          <a:noFill/>
+          <a:ln/>
+          <a:extLst>
+            <a:ext uri="{909E8E84-426E-40dd-AFC4-6F175D3DCCD1}">
+              <a14:hiddenFill xmlns="" xmlns:a14="http://schemas.microsoft.com/office/drawing/2010/main">
+                <a:solidFill>
+                  <a:srgbClr val="FFFFFF"/>
+                </a:solidFill>
+              </a14:hiddenFill>
+            </a:ext>
+            <a:ext uri="{91240B29-F687-4f45-9708-019B960494DF}">
+              <a14:hiddenLine xmlns="" xmlns:a14="http://schemas.microsoft.com/office/drawing/2010/main" w="9525">
+                <a:solidFill>
+                  <a:srgbClr val="000000"/>
+                </a:solidFill>
+                <a:miter lim="800000"/>
+                <a:headEnd/>
+                <a:tailEnd/>
+              </a14:hiddenLine>
+            </a:ext>
+          </a:extLst>
+        </p:spPr>
+        <p:txBody>
+          <a:bodyPr/>
+          <a:lstStyle>
+            <a:lvl1pPr defTabSz="1009213" eaLnBrk="0" hangingPunct="0">
+              <a:defRPr sz="2500">
+                <a:solidFill>
+                  <a:schemeClr val="tx1"/>
+                </a:solidFill>
+                <a:latin typeface="Tahoma" charset="0"/>
+                <a:ea typeface="ＭＳ Ｐゴシック" charset="0"/>
+              </a:defRPr>
+            </a:lvl1pPr>
+            <a:lvl2pPr marL="776829" indent="-298780" defTabSz="1009213" eaLnBrk="0" hangingPunct="0">
+              <a:defRPr sz="2500">
+                <a:solidFill>
+                  <a:schemeClr val="tx1"/>
+                </a:solidFill>
+                <a:latin typeface="Tahoma" charset="0"/>
+                <a:ea typeface="ＭＳ Ｐゴシック" charset="0"/>
+              </a:defRPr>
+            </a:lvl2pPr>
+            <a:lvl3pPr marL="1195121" indent="-239024" defTabSz="1009213" eaLnBrk="0" hangingPunct="0">
+              <a:defRPr sz="2500">
+                <a:solidFill>
+                  <a:schemeClr val="tx1"/>
+                </a:solidFill>
+                <a:latin typeface="Tahoma" charset="0"/>
+                <a:ea typeface="ＭＳ Ｐゴシック" charset="0"/>
+              </a:defRPr>
+            </a:lvl3pPr>
+            <a:lvl4pPr marL="1673169" indent="-239024" defTabSz="1009213" eaLnBrk="0" hangingPunct="0">
+              <a:defRPr sz="2500">
+                <a:solidFill>
+                  <a:schemeClr val="tx1"/>
+                </a:solidFill>
+                <a:latin typeface="Tahoma" charset="0"/>
+                <a:ea typeface="ＭＳ Ｐゴシック" charset="0"/>
+              </a:defRPr>
+            </a:lvl4pPr>
+            <a:lvl5pPr marL="2151217" indent="-239024" defTabSz="1009213" eaLnBrk="0" hangingPunct="0">
+              <a:defRPr sz="2500">
+                <a:solidFill>
+                  <a:schemeClr val="tx1"/>
+                </a:solidFill>
+                <a:latin typeface="Tahoma" charset="0"/>
+                <a:ea typeface="ＭＳ Ｐゴシック" charset="0"/>
+              </a:defRPr>
+            </a:lvl5pPr>
+            <a:lvl6pPr marL="2629266" indent="-239024" algn="ctr" defTabSz="1009213" eaLnBrk="0" fontAlgn="base" hangingPunct="0">
+              <a:spcBef>
+                <a:spcPct val="0"/>
+              </a:spcBef>
+              <a:spcAft>
+                <a:spcPct val="0"/>
+              </a:spcAft>
+              <a:defRPr sz="2500">
+                <a:solidFill>
+                  <a:schemeClr val="tx1"/>
+                </a:solidFill>
+                <a:latin typeface="Tahoma" charset="0"/>
+                <a:ea typeface="ＭＳ Ｐゴシック" charset="0"/>
+              </a:defRPr>
+            </a:lvl6pPr>
+            <a:lvl7pPr marL="3107314" indent="-239024" algn="ctr" defTabSz="1009213" eaLnBrk="0" fontAlgn="base" hangingPunct="0">
+              <a:spcBef>
+                <a:spcPct val="0"/>
+              </a:spcBef>
+              <a:spcAft>
+                <a:spcPct val="0"/>
+              </a:spcAft>
+              <a:defRPr sz="2500">
+                <a:solidFill>
+                  <a:schemeClr val="tx1"/>
+                </a:solidFill>
+                <a:latin typeface="Tahoma" charset="0"/>
+                <a:ea typeface="ＭＳ Ｐゴシック" charset="0"/>
+              </a:defRPr>
+            </a:lvl7pPr>
+            <a:lvl8pPr marL="3585362" indent="-239024" algn="ctr" defTabSz="1009213" eaLnBrk="0" fontAlgn="base" hangingPunct="0">
+              <a:spcBef>
+                <a:spcPct val="0"/>
+              </a:spcBef>
+              <a:spcAft>
+                <a:spcPct val="0"/>
+              </a:spcAft>
+              <a:defRPr sz="2500">
+                <a:solidFill>
+                  <a:schemeClr val="tx1"/>
+                </a:solidFill>
+                <a:latin typeface="Tahoma" charset="0"/>
+                <a:ea typeface="ＭＳ Ｐゴシック" charset="0"/>
+              </a:defRPr>
+            </a:lvl8pPr>
+            <a:lvl9pPr marL="4063411" indent="-239024" algn="ctr" defTabSz="1009213" eaLnBrk="0" fontAlgn="base" hangingPunct="0">
+              <a:spcBef>
+                <a:spcPct val="0"/>
+              </a:spcBef>
+              <a:spcAft>
+                <a:spcPct val="0"/>
+              </a:spcAft>
+              <a:defRPr sz="2500">
+                <a:solidFill>
+                  <a:schemeClr val="tx1"/>
+                </a:solidFill>
+                <a:latin typeface="Tahoma" charset="0"/>
+                <a:ea typeface="ＭＳ Ｐゴシック" charset="0"/>
+              </a:defRPr>
+            </a:lvl9pPr>
+          </a:lstStyle>
+          <a:p>
+            <a:pPr eaLnBrk="1" hangingPunct="1"/>
+            <a:fld id="{254273B8-01BA-B842-A81D-0E161D5BCB65}" type="datetime1">
+              <a:rPr lang="en-US" sz="1400"/>
+              <a:t>4/23/2025</a:t>
+            </a:fld>
+            <a:endParaRPr lang="en-US" sz="1400"/>
+          </a:p>
+        </p:txBody>
+      </p:sp>
+      <p:sp>
+        <p:nvSpPr>
+          <p:cNvPr id="13316" name="Rectangle 7"/>
+          <p:cNvSpPr>
+            <a:spLocks noGrp="1" noChangeArrowheads="1"/>
+          </p:cNvSpPr>
+          <p:nvPr>
+            <p:ph type="sldNum" sz="quarter" idx="5"/>
+          </p:nvPr>
+        </p:nvSpPr>
+        <p:spPr>
+          <a:noFill/>
+          <a:ln/>
+          <a:extLst>
+            <a:ext uri="{909E8E84-426E-40dd-AFC4-6F175D3DCCD1}">
+              <a14:hiddenFill xmlns="" xmlns:a14="http://schemas.microsoft.com/office/drawing/2010/main">
+                <a:solidFill>
+                  <a:srgbClr val="FFFFFF"/>
+                </a:solidFill>
+              </a14:hiddenFill>
+            </a:ext>
+            <a:ext uri="{91240B29-F687-4f45-9708-019B960494DF}">
+              <a14:hiddenLine xmlns="" xmlns:a14="http://schemas.microsoft.com/office/drawing/2010/main" w="9525">
+                <a:solidFill>
+                  <a:srgbClr val="000000"/>
+                </a:solidFill>
+                <a:miter lim="800000"/>
+                <a:headEnd/>
+                <a:tailEnd/>
+              </a14:hiddenLine>
+            </a:ext>
+          </a:extLst>
+        </p:spPr>
+        <p:txBody>
+          <a:bodyPr/>
+          <a:lstStyle>
+            <a:lvl1pPr defTabSz="1009213" eaLnBrk="0" hangingPunct="0">
+              <a:defRPr sz="2500">
+                <a:solidFill>
+                  <a:schemeClr val="tx1"/>
+                </a:solidFill>
+                <a:latin typeface="Tahoma" charset="0"/>
+                <a:ea typeface="ＭＳ Ｐゴシック" charset="0"/>
+              </a:defRPr>
+            </a:lvl1pPr>
+            <a:lvl2pPr marL="776829" indent="-298780" defTabSz="1009213" eaLnBrk="0" hangingPunct="0">
+              <a:defRPr sz="2500">
+                <a:solidFill>
+                  <a:schemeClr val="tx1"/>
+                </a:solidFill>
+                <a:latin typeface="Tahoma" charset="0"/>
+                <a:ea typeface="ＭＳ Ｐゴシック" charset="0"/>
+              </a:defRPr>
+            </a:lvl2pPr>
+            <a:lvl3pPr marL="1195121" indent="-239024" defTabSz="1009213" eaLnBrk="0" hangingPunct="0">
+              <a:defRPr sz="2500">
+                <a:solidFill>
+                  <a:schemeClr val="tx1"/>
+                </a:solidFill>
+                <a:latin typeface="Tahoma" charset="0"/>
+                <a:ea typeface="ＭＳ Ｐゴシック" charset="0"/>
+              </a:defRPr>
+            </a:lvl3pPr>
+            <a:lvl4pPr marL="1673169" indent="-239024" defTabSz="1009213" eaLnBrk="0" hangingPunct="0">
+              <a:defRPr sz="2500">
+                <a:solidFill>
+                  <a:schemeClr val="tx1"/>
+                </a:solidFill>
+                <a:latin typeface="Tahoma" charset="0"/>
+                <a:ea typeface="ＭＳ Ｐゴシック" charset="0"/>
+              </a:defRPr>
+            </a:lvl4pPr>
+            <a:lvl5pPr marL="2151217" indent="-239024" defTabSz="1009213" eaLnBrk="0" hangingPunct="0">
+              <a:defRPr sz="2500">
+                <a:solidFill>
+                  <a:schemeClr val="tx1"/>
+                </a:solidFill>
+                <a:latin typeface="Tahoma" charset="0"/>
+                <a:ea typeface="ＭＳ Ｐゴシック" charset="0"/>
+              </a:defRPr>
+            </a:lvl5pPr>
+            <a:lvl6pPr marL="2629266" indent="-239024" algn="ctr" defTabSz="1009213" eaLnBrk="0" fontAlgn="base" hangingPunct="0">
+              <a:spcBef>
+                <a:spcPct val="0"/>
+              </a:spcBef>
+              <a:spcAft>
+                <a:spcPct val="0"/>
+              </a:spcAft>
+              <a:defRPr sz="2500">
+                <a:solidFill>
+                  <a:schemeClr val="tx1"/>
+                </a:solidFill>
+                <a:latin typeface="Tahoma" charset="0"/>
+                <a:ea typeface="ＭＳ Ｐゴシック" charset="0"/>
+              </a:defRPr>
+            </a:lvl6pPr>
+            <a:lvl7pPr marL="3107314" indent="-239024" algn="ctr" defTabSz="1009213" eaLnBrk="0" fontAlgn="base" hangingPunct="0">
+              <a:spcBef>
+                <a:spcPct val="0"/>
+              </a:spcBef>
+              <a:spcAft>
+                <a:spcPct val="0"/>
+              </a:spcAft>
+              <a:defRPr sz="2500">
+                <a:solidFill>
+                  <a:schemeClr val="tx1"/>
+                </a:solidFill>
+                <a:latin typeface="Tahoma" charset="0"/>
+                <a:ea typeface="ＭＳ Ｐゴシック" charset="0"/>
+              </a:defRPr>
+            </a:lvl7pPr>
+            <a:lvl8pPr marL="3585362" indent="-239024" algn="ctr" defTabSz="1009213" eaLnBrk="0" fontAlgn="base" hangingPunct="0">
+              <a:spcBef>
+                <a:spcPct val="0"/>
+              </a:spcBef>
+              <a:spcAft>
+                <a:spcPct val="0"/>
+              </a:spcAft>
+              <a:defRPr sz="2500">
+                <a:solidFill>
+                  <a:schemeClr val="tx1"/>
+                </a:solidFill>
+                <a:latin typeface="Tahoma" charset="0"/>
+                <a:ea typeface="ＭＳ Ｐゴシック" charset="0"/>
+              </a:defRPr>
+            </a:lvl8pPr>
+            <a:lvl9pPr marL="4063411" indent="-239024" algn="ctr" defTabSz="1009213" eaLnBrk="0" fontAlgn="base" hangingPunct="0">
+              <a:spcBef>
+                <a:spcPct val="0"/>
+              </a:spcBef>
+              <a:spcAft>
+                <a:spcPct val="0"/>
+              </a:spcAft>
+              <a:defRPr sz="2500">
+                <a:solidFill>
+                  <a:schemeClr val="tx1"/>
+                </a:solidFill>
+                <a:latin typeface="Tahoma" charset="0"/>
+                <a:ea typeface="ＭＳ Ｐゴシック" charset="0"/>
+              </a:defRPr>
+            </a:lvl9pPr>
+          </a:lstStyle>
+          <a:p>
+            <a:pPr eaLnBrk="1" hangingPunct="1"/>
+            <a:fld id="{7B77E0FB-41B3-3E43-9315-872A851C0831}" type="slidenum">
+              <a:rPr lang="en-US" sz="1400"/>
+              <a:pPr eaLnBrk="1" hangingPunct="1"/>
+              <a:t>15</a:t>
+            </a:fld>
+            <a:endParaRPr lang="en-US" sz="1400"/>
+          </a:p>
+        </p:txBody>
+      </p:sp>
+      <p:sp>
+        <p:nvSpPr>
+          <p:cNvPr id="13317" name="Rectangle 2"/>
+          <p:cNvSpPr>
+            <a:spLocks noGrp="1" noRot="1" noChangeAspect="1" noChangeArrowheads="1" noTextEdit="1"/>
+          </p:cNvSpPr>
+          <p:nvPr>
+            <p:ph type="sldImg"/>
+          </p:nvPr>
+        </p:nvSpPr>
+        <p:spPr>
+          <a:ln/>
+        </p:spPr>
+      </p:sp>
+      <p:sp>
+        <p:nvSpPr>
+          <p:cNvPr id="13318" name="Rectangle 3"/>
+          <p:cNvSpPr>
+            <a:spLocks noGrp="1" noChangeArrowheads="1"/>
+          </p:cNvSpPr>
+          <p:nvPr>
+            <p:ph type="body" idx="1"/>
+          </p:nvPr>
+        </p:nvSpPr>
+        <p:spPr>
+          <a:noFill/>
+          <a:ln/>
+          <a:extLst>
+            <a:ext uri="{909E8E84-426E-40dd-AFC4-6F175D3DCCD1}">
+              <a14:hiddenFill xmlns="" xmlns:a14="http://schemas.microsoft.com/office/drawing/2010/main">
+                <a:solidFill>
+                  <a:srgbClr val="FFFFFF"/>
+                </a:solidFill>
+              </a14:hiddenFill>
+            </a:ext>
+            <a:ext uri="{91240B29-F687-4f45-9708-019B960494DF}">
+              <a14:hiddenLine xmlns="" xmlns:a14="http://schemas.microsoft.com/office/drawing/2010/main" w="9525">
+                <a:solidFill>
+                  <a:srgbClr val="000000"/>
+                </a:solidFill>
+                <a:miter lim="800000"/>
+                <a:headEnd/>
+                <a:tailEnd/>
+              </a14:hiddenLine>
+            </a:ext>
+            <a:ext uri="{FAA26D3D-D897-4be2-8F04-BA451C77F1D7}">
+              <ma14:placeholderFlag xmlns="" xmlns:ma14="http://schemas.microsoft.com/office/mac/drawingml/2011/main" val="1"/>
+            </a:ext>
+          </a:extLst>
+        </p:spPr>
+        <p:txBody>
+          <a:bodyPr/>
+          <a:lstStyle/>
+          <a:p>
+            <a:pPr eaLnBrk="1" hangingPunct="1"/>
+            <a:endParaRPr lang="en-US">
+              <a:latin typeface="Times New Roman" charset="0"/>
+            </a:endParaRPr>
+          </a:p>
+        </p:txBody>
+      </p:sp>
+    </p:spTree>
   </p:cSld>
   <p:clrMapOvr>
     <a:masterClrMapping/>
@@ -2577,32 +2532,52 @@
           <a:p>
             <a:r>
               <a:rPr lang="en-US" dirty="0"/>
-              <a:t>Map is a container object that stores a collection of key/value pairs.</a:t>
-            </a:r>
-          </a:p>
-          <a:p>
+              <a:t>Synonyms for ADT Dictionary</a:t>
+            </a:r>
+          </a:p>
+          <a:p>
+            <a:pPr lvl="1"/>
             <a:r>
               <a:rPr lang="en-US" dirty="0"/>
-              <a:t>It enables fast retrieval, deletion, and updating of the pair using key</a:t>
-            </a:r>
-          </a:p>
-          <a:p>
+              <a:t>Map</a:t>
+            </a:r>
+          </a:p>
+          <a:p>
+            <a:pPr lvl="1"/>
             <a:r>
               <a:rPr lang="en-US" dirty="0"/>
-              <a:t>Keys are like indexes</a:t>
-            </a:r>
-          </a:p>
-          <a:p>
+              <a:t>Table</a:t>
+            </a:r>
+          </a:p>
+          <a:p>
+            <a:pPr lvl="1"/>
             <a:r>
               <a:rPr lang="en-US" dirty="0"/>
-              <a:t>In list indexes are integers</a:t>
+              <a:t>Associative array</a:t>
             </a:r>
           </a:p>
           <a:p>
             <a:r>
               <a:rPr lang="en-US" dirty="0"/>
-              <a:t>In map key can be any object</a:t>
-            </a:r>
+              <a:t>An entry in the dictionary contains</a:t>
+            </a:r>
+          </a:p>
+          <a:p>
+            <a:pPr lvl="1"/>
+            <a:r>
+              <a:rPr lang="en-US" dirty="0"/>
+              <a:t>Keyword, search key</a:t>
+            </a:r>
+          </a:p>
+          <a:p>
+            <a:pPr lvl="1"/>
+            <a:r>
+              <a:rPr lang="en-US" dirty="0"/>
+              <a:t>Value</a:t>
+            </a:r>
+          </a:p>
+          <a:p>
+            <a:endParaRPr lang="en-US" dirty="0"/>
           </a:p>
         </p:txBody>
       </p:sp>
@@ -2638,7 +2613,7 @@
     </p:spTree>
     <p:extLst>
       <p:ext uri="{BB962C8B-B14F-4D97-AF65-F5344CB8AC3E}">
-        <p14:creationId xmlns:p14="http://schemas.microsoft.com/office/powerpoint/2010/main" val="289191529"/>
+        <p14:creationId xmlns:p14="http://schemas.microsoft.com/office/powerpoint/2010/main" val="44258362"/>
       </p:ext>
     </p:extLst>
   </p:cSld>
@@ -2692,7 +2667,34 @@
           <a:bodyPr/>
           <a:lstStyle/>
           <a:p>
-            <a:endParaRPr lang="en-US"/>
+            <a:r>
+              <a:rPr lang="en-US" dirty="0"/>
+              <a:t>Map is a container object that stores a collection of key/value pairs.</a:t>
+            </a:r>
+          </a:p>
+          <a:p>
+            <a:r>
+              <a:rPr lang="en-US" dirty="0"/>
+              <a:t>It enables fast retrieval, deletion, and updating of the pair using key</a:t>
+            </a:r>
+          </a:p>
+          <a:p>
+            <a:r>
+              <a:rPr lang="en-US" dirty="0"/>
+              <a:t>Keys are like indexes</a:t>
+            </a:r>
+          </a:p>
+          <a:p>
+            <a:r>
+              <a:rPr lang="en-US" dirty="0"/>
+              <a:t>In list indexes are integers</a:t>
+            </a:r>
+          </a:p>
+          <a:p>
+            <a:r>
+              <a:rPr lang="en-US" dirty="0"/>
+              <a:t>In map key can be any object</a:t>
+            </a:r>
           </a:p>
         </p:txBody>
       </p:sp>
@@ -2728,7 +2730,7 @@
     </p:spTree>
     <p:extLst>
       <p:ext uri="{BB962C8B-B14F-4D97-AF65-F5344CB8AC3E}">
-        <p14:creationId xmlns:p14="http://schemas.microsoft.com/office/powerpoint/2010/main" val="4102694706"/>
+        <p14:creationId xmlns:p14="http://schemas.microsoft.com/office/powerpoint/2010/main" val="289191529"/>
       </p:ext>
     </p:extLst>
   </p:cSld>
@@ -2765,12 +2767,7 @@
             <p:ph type="sldImg"/>
           </p:nvPr>
         </p:nvSpPr>
-        <p:spPr>
-          <a:xfrm>
-            <a:off x="1266825" y="727075"/>
-            <a:ext cx="4781550" cy="3586163"/>
-          </a:xfrm>
-        </p:spPr>
+        <p:spPr/>
       </p:sp>
       <p:sp>
         <p:nvSpPr>
@@ -2787,7 +2784,7 @@
           <a:bodyPr/>
           <a:lstStyle/>
           <a:p>
-            <a:endParaRPr lang="en-US" dirty="0"/>
+            <a:endParaRPr lang="en-US"/>
           </a:p>
         </p:txBody>
       </p:sp>
@@ -2823,7 +2820,7 @@
     </p:spTree>
     <p:extLst>
       <p:ext uri="{BB962C8B-B14F-4D97-AF65-F5344CB8AC3E}">
-        <p14:creationId xmlns:p14="http://schemas.microsoft.com/office/powerpoint/2010/main" val="4138145828"/>
+        <p14:creationId xmlns:p14="http://schemas.microsoft.com/office/powerpoint/2010/main" val="4102694706"/>
       </p:ext>
     </p:extLst>
   </p:cSld>
@@ -2882,46 +2879,6 @@
           <a:bodyPr/>
           <a:lstStyle/>
           <a:p>
-            <a:r>
-              <a:rPr lang="en-US" dirty="0"/>
-              <a:t>There are three types of maps:</a:t>
-            </a:r>
-          </a:p>
-          <a:p>
-            <a:r>
-              <a:rPr lang="en-US" dirty="0"/>
-              <a:t>HashMap, </a:t>
-            </a:r>
-            <a:r>
-              <a:rPr lang="en-US" dirty="0" err="1"/>
-              <a:t>LinkedHashMap</a:t>
-            </a:r>
-            <a:r>
-              <a:rPr lang="en-US" dirty="0"/>
-              <a:t>, and </a:t>
-            </a:r>
-            <a:r>
-              <a:rPr lang="en-US" dirty="0" err="1"/>
-              <a:t>TreeMap</a:t>
-            </a:r>
-            <a:r>
-              <a:rPr lang="en-US" dirty="0"/>
-              <a:t>.</a:t>
-            </a:r>
-          </a:p>
-          <a:p>
-            <a:r>
-              <a:rPr lang="en-US" dirty="0"/>
-              <a:t>Common features of the three are defined in the Map interface</a:t>
-            </a:r>
-          </a:p>
-          <a:p>
-            <a:r>
-              <a:rPr lang="en-US" dirty="0"/>
-              <a:t>Figure shows heir relationship</a:t>
-            </a:r>
-          </a:p>
-          <a:p>
             <a:endParaRPr lang="en-US" dirty="0"/>
           </a:p>
         </p:txBody>
@@ -2958,7 +2915,7 @@
     </p:spTree>
     <p:extLst>
       <p:ext uri="{BB962C8B-B14F-4D97-AF65-F5344CB8AC3E}">
-        <p14:creationId xmlns:p14="http://schemas.microsoft.com/office/powerpoint/2010/main" val="4202141726"/>
+        <p14:creationId xmlns:p14="http://schemas.microsoft.com/office/powerpoint/2010/main" val="4138145828"/>
       </p:ext>
     </p:extLst>
   </p:cSld>
@@ -3085,12 +3042,7 @@
             <p:ph type="sldImg"/>
           </p:nvPr>
         </p:nvSpPr>
-        <p:spPr>
-          <a:xfrm>
-            <a:off x="1266825" y="727075"/>
-            <a:ext cx="4781550" cy="3586163"/>
-          </a:xfrm>
-        </p:spPr>
+        <p:spPr/>
       </p:sp>
       <p:sp>
         <p:nvSpPr>
@@ -3107,63 +3059,771 @@
           <a:bodyPr/>
           <a:lstStyle/>
           <a:p>
-            <a:r>
-              <a:rPr lang="en-US" dirty="0"/>
-              <a:t>Map interface provides the methods for</a:t>
-            </a:r>
-          </a:p>
-          <a:p>
-            <a:r>
-              <a:rPr lang="en-US" dirty="0"/>
-              <a:t>Querying, updating, and getting a collection of values and a set of keys.</a:t>
-            </a:r>
-          </a:p>
-          <a:p>
-            <a:r>
-              <a:rPr lang="en-US" dirty="0"/>
-              <a:t>Update methods (clear, put, </a:t>
-            </a:r>
-            <a:r>
-              <a:rPr lang="en-US" dirty="0" err="1"/>
-              <a:t>putAll</a:t>
-            </a:r>
-            <a:r>
-              <a:rPr lang="en-US" dirty="0"/>
-              <a:t>, remove)</a:t>
-            </a:r>
-          </a:p>
-          <a:p>
-            <a:r>
-              <a:rPr lang="en-US" dirty="0"/>
-              <a:t>Query methods (</a:t>
-            </a:r>
-            <a:r>
-              <a:rPr lang="en-US" dirty="0" err="1"/>
-              <a:t>containKey</a:t>
-            </a:r>
-            <a:r>
-              <a:rPr lang="en-US" dirty="0"/>
-              <a:t>, </a:t>
-            </a:r>
-            <a:r>
-              <a:rPr lang="en-US" dirty="0" err="1"/>
-              <a:t>containsValue</a:t>
-            </a:r>
-            <a:r>
-              <a:rPr lang="en-US" dirty="0"/>
-              <a:t>, </a:t>
-            </a:r>
-            <a:r>
-              <a:rPr lang="en-US" dirty="0" err="1"/>
-              <a:t>isEmpt</a:t>
-            </a:r>
-            <a:r>
-              <a:rPr lang="en-US" dirty="0"/>
-              <a:t>, size)</a:t>
-            </a:r>
-          </a:p>
-          <a:p>
-            <a:endParaRPr lang="en-US" dirty="0"/>
+            <a:pPr marL="0" marR="0" lvl="0" indent="0" algn="l" defTabSz="457200" rtl="0" eaLnBrk="1" fontAlgn="auto" latinLnBrk="0" hangingPunct="1">
+              <a:lnSpc>
+                <a:spcPct val="100000"/>
+              </a:lnSpc>
+              <a:spcBef>
+                <a:spcPts val="0"/>
+              </a:spcBef>
+              <a:spcAft>
+                <a:spcPts val="0"/>
+              </a:spcAft>
+              <a:buClrTx/>
+              <a:buSzTx/>
+              <a:buFontTx/>
+              <a:buNone/>
+              <a:tabLst/>
+              <a:defRPr/>
+            </a:pPr>
+            <a:r>
+              <a:rPr lang="en-US" sz="1200" dirty="0"/>
+              <a:t>Entry less than symbol K, V greater than symbol and MyHashMap less than symbol K, V greater than symbol leading to the interface MyMap less than symbol K, V greater than symbol, each with the codes and description as follows.</a:t>
+            </a:r>
+          </a:p>
+          <a:p>
+            <a:pPr marL="0" marR="0" lvl="0" indent="0" algn="l" defTabSz="457200" rtl="0" eaLnBrk="1" fontAlgn="auto" latinLnBrk="0" hangingPunct="1">
+              <a:lnSpc>
+                <a:spcPct val="100000"/>
+              </a:lnSpc>
+              <a:spcBef>
+                <a:spcPts val="0"/>
+              </a:spcBef>
+              <a:spcAft>
+                <a:spcPts val="0"/>
+              </a:spcAft>
+              <a:buClrTx/>
+              <a:buSzTx/>
+              <a:buFontTx/>
+              <a:buNone/>
+              <a:tabLst/>
+              <a:defRPr/>
+            </a:pPr>
+            <a:r>
+              <a:rPr lang="en-US" sz="1200" dirty="0"/>
+              <a:t>Interface, MyMap less than symbol K, V greater than symbol.</a:t>
+            </a:r>
+          </a:p>
+          <a:p>
+            <a:pPr marL="0" marR="0" lvl="0" indent="0" algn="l" defTabSz="457200" rtl="0" eaLnBrk="1" fontAlgn="auto" latinLnBrk="0" hangingPunct="1">
+              <a:lnSpc>
+                <a:spcPct val="100000"/>
+              </a:lnSpc>
+              <a:spcBef>
+                <a:spcPts val="0"/>
+              </a:spcBef>
+              <a:spcAft>
+                <a:spcPts val="0"/>
+              </a:spcAft>
+              <a:buClrTx/>
+              <a:buSzTx/>
+              <a:buFontTx/>
+              <a:buNone/>
+              <a:tabLst/>
+              <a:defRPr/>
+            </a:pPr>
+            <a:r>
+              <a:rPr lang="en-US" sz="1200" dirty="0"/>
+              <a:t>+clear left parenthesis right parenthesis semi colon void. Removes all entries from this map.</a:t>
+            </a:r>
+          </a:p>
+          <a:p>
+            <a:pPr marL="0" marR="0" lvl="0" indent="0" algn="l" defTabSz="457200" rtl="0" eaLnBrk="1" fontAlgn="auto" latinLnBrk="0" hangingPunct="1">
+              <a:lnSpc>
+                <a:spcPct val="100000"/>
+              </a:lnSpc>
+              <a:spcBef>
+                <a:spcPts val="0"/>
+              </a:spcBef>
+              <a:spcAft>
+                <a:spcPts val="0"/>
+              </a:spcAft>
+              <a:buClrTx/>
+              <a:buSzTx/>
+              <a:buFontTx/>
+              <a:buNone/>
+              <a:tabLst/>
+              <a:defRPr/>
+            </a:pPr>
+            <a:r>
+              <a:rPr lang="en-US" sz="1200" dirty="0"/>
+              <a:t>+</a:t>
+            </a:r>
+            <a:r>
+              <a:rPr lang="en-US" sz="1200" dirty="0" err="1"/>
+              <a:t>containsKey</a:t>
+            </a:r>
+            <a:r>
+              <a:rPr lang="en-US" sz="1200" dirty="0"/>
+              <a:t> left parenthesis key colon K right parenthesis colon Boolean. Returns true if this map contains an entry for the specified key.</a:t>
+            </a:r>
+          </a:p>
+          <a:p>
+            <a:pPr marL="0" marR="0" lvl="0" indent="0" algn="l" defTabSz="457200" rtl="0" eaLnBrk="1" fontAlgn="auto" latinLnBrk="0" hangingPunct="1">
+              <a:lnSpc>
+                <a:spcPct val="100000"/>
+              </a:lnSpc>
+              <a:spcBef>
+                <a:spcPts val="0"/>
+              </a:spcBef>
+              <a:spcAft>
+                <a:spcPts val="0"/>
+              </a:spcAft>
+              <a:buClrTx/>
+              <a:buSzTx/>
+              <a:buFontTx/>
+              <a:buNone/>
+              <a:tabLst/>
+              <a:defRPr/>
+            </a:pPr>
+            <a:r>
+              <a:rPr lang="en-US" sz="1200" dirty="0"/>
+              <a:t>+</a:t>
+            </a:r>
+            <a:r>
+              <a:rPr lang="en-US" sz="1200" dirty="0" err="1"/>
+              <a:t>containsVOue</a:t>
+            </a:r>
+            <a:r>
+              <a:rPr lang="en-US" sz="1200" dirty="0"/>
+              <a:t> left parenthesis value colon V right parenthesis colon Boolean. Returns true if this map maps one or more keys to the specified value.</a:t>
+            </a:r>
+          </a:p>
+          <a:p>
+            <a:pPr marL="0" marR="0" lvl="0" indent="0" algn="l" defTabSz="457200" rtl="0" eaLnBrk="1" fontAlgn="auto" latinLnBrk="0" hangingPunct="1">
+              <a:lnSpc>
+                <a:spcPct val="100000"/>
+              </a:lnSpc>
+              <a:spcBef>
+                <a:spcPts val="0"/>
+              </a:spcBef>
+              <a:spcAft>
+                <a:spcPts val="0"/>
+              </a:spcAft>
+              <a:buClrTx/>
+              <a:buSzTx/>
+              <a:buFontTx/>
+              <a:buNone/>
+              <a:tabLst/>
+              <a:defRPr/>
+            </a:pPr>
+            <a:r>
+              <a:rPr lang="en-US" sz="1200" dirty="0"/>
+              <a:t>+</a:t>
+            </a:r>
+            <a:r>
+              <a:rPr lang="en-US" sz="1200" dirty="0" err="1"/>
+              <a:t>entrySet</a:t>
+            </a:r>
+            <a:r>
+              <a:rPr lang="en-US" sz="1200" dirty="0"/>
+              <a:t> left parenthesis right parenthesis colon Set less than symbol Entry less than symbol K, V greater than symbol, greater than symbol. Returns a set consisting of the entries in this map.</a:t>
+            </a:r>
+          </a:p>
+          <a:p>
+            <a:pPr marL="0" marR="0" lvl="0" indent="0" algn="l" defTabSz="457200" rtl="0" eaLnBrk="1" fontAlgn="auto" latinLnBrk="0" hangingPunct="1">
+              <a:lnSpc>
+                <a:spcPct val="100000"/>
+              </a:lnSpc>
+              <a:spcBef>
+                <a:spcPts val="0"/>
+              </a:spcBef>
+              <a:spcAft>
+                <a:spcPts val="0"/>
+              </a:spcAft>
+              <a:buClrTx/>
+              <a:buSzTx/>
+              <a:buFontTx/>
+              <a:buNone/>
+              <a:tabLst/>
+              <a:defRPr/>
+            </a:pPr>
+            <a:r>
+              <a:rPr lang="en-US" sz="1200" dirty="0"/>
+              <a:t>+get left parenthesis key colon K right parenthesis colon V. Returns a value for the specified key in this map.</a:t>
+            </a:r>
+          </a:p>
+          <a:p>
+            <a:pPr marL="0" marR="0" lvl="0" indent="0" algn="l" defTabSz="457200" rtl="0" eaLnBrk="1" fontAlgn="auto" latinLnBrk="0" hangingPunct="1">
+              <a:lnSpc>
+                <a:spcPct val="100000"/>
+              </a:lnSpc>
+              <a:spcBef>
+                <a:spcPts val="0"/>
+              </a:spcBef>
+              <a:spcAft>
+                <a:spcPts val="0"/>
+              </a:spcAft>
+              <a:buClrTx/>
+              <a:buSzTx/>
+              <a:buFontTx/>
+              <a:buNone/>
+              <a:tabLst/>
+              <a:defRPr/>
+            </a:pPr>
+            <a:r>
+              <a:rPr lang="en-US" sz="1200" dirty="0"/>
+              <a:t>+</a:t>
+            </a:r>
+            <a:r>
+              <a:rPr lang="en-US" sz="1200" dirty="0" err="1"/>
+              <a:t>isEmpty</a:t>
+            </a:r>
+            <a:r>
+              <a:rPr lang="en-US" sz="1200" dirty="0"/>
+              <a:t> left parenthesis right parenthesis colon Boolean. Returns true if this map contains no mappings.</a:t>
+            </a:r>
+          </a:p>
+          <a:p>
+            <a:pPr marL="0" marR="0" lvl="0" indent="0" algn="l" defTabSz="457200" rtl="0" eaLnBrk="1" fontAlgn="auto" latinLnBrk="0" hangingPunct="1">
+              <a:lnSpc>
+                <a:spcPct val="100000"/>
+              </a:lnSpc>
+              <a:spcBef>
+                <a:spcPts val="0"/>
+              </a:spcBef>
+              <a:spcAft>
+                <a:spcPts val="0"/>
+              </a:spcAft>
+              <a:buClrTx/>
+              <a:buSzTx/>
+              <a:buFontTx/>
+              <a:buNone/>
+              <a:tabLst/>
+              <a:defRPr/>
+            </a:pPr>
+            <a:r>
+              <a:rPr lang="en-US" sz="1200" dirty="0"/>
+              <a:t>+keyset left parenthesis right parenthesis colon Set less than symbol K greater than symbol. Returns a set consisting of the keys in this map.</a:t>
+            </a:r>
+          </a:p>
+          <a:p>
+            <a:pPr marL="0" marR="0" lvl="0" indent="0" algn="l" defTabSz="457200" rtl="0" eaLnBrk="1" fontAlgn="auto" latinLnBrk="0" hangingPunct="1">
+              <a:lnSpc>
+                <a:spcPct val="100000"/>
+              </a:lnSpc>
+              <a:spcBef>
+                <a:spcPts val="0"/>
+              </a:spcBef>
+              <a:spcAft>
+                <a:spcPts val="0"/>
+              </a:spcAft>
+              <a:buClrTx/>
+              <a:buSzTx/>
+              <a:buFontTx/>
+              <a:buNone/>
+              <a:tabLst/>
+              <a:defRPr/>
+            </a:pPr>
+            <a:r>
+              <a:rPr lang="en-US" sz="1200" dirty="0"/>
+              <a:t>+put left parenthesis key colon K, value colon V right parenthesis colon V. Puts a mapping in this map.</a:t>
+            </a:r>
+          </a:p>
+          <a:p>
+            <a:pPr marL="0" marR="0" lvl="0" indent="0" algn="l" defTabSz="457200" rtl="0" eaLnBrk="1" fontAlgn="auto" latinLnBrk="0" hangingPunct="1">
+              <a:lnSpc>
+                <a:spcPct val="100000"/>
+              </a:lnSpc>
+              <a:spcBef>
+                <a:spcPts val="0"/>
+              </a:spcBef>
+              <a:spcAft>
+                <a:spcPts val="0"/>
+              </a:spcAft>
+              <a:buClrTx/>
+              <a:buSzTx/>
+              <a:buFontTx/>
+              <a:buNone/>
+              <a:tabLst/>
+              <a:defRPr/>
+            </a:pPr>
+            <a:r>
+              <a:rPr lang="en-US" sz="1200" dirty="0"/>
+              <a:t>+remove left parenthesis key colon K right parenthesis colon void. Removes the entries for the specified key.</a:t>
+            </a:r>
+          </a:p>
+          <a:p>
+            <a:pPr marL="0" marR="0" lvl="0" indent="0" algn="l" defTabSz="457200" rtl="0" eaLnBrk="1" fontAlgn="auto" latinLnBrk="0" hangingPunct="1">
+              <a:lnSpc>
+                <a:spcPct val="100000"/>
+              </a:lnSpc>
+              <a:spcBef>
+                <a:spcPts val="0"/>
+              </a:spcBef>
+              <a:spcAft>
+                <a:spcPts val="0"/>
+              </a:spcAft>
+              <a:buClrTx/>
+              <a:buSzTx/>
+              <a:buFontTx/>
+              <a:buNone/>
+              <a:tabLst/>
+              <a:defRPr/>
+            </a:pPr>
+            <a:r>
+              <a:rPr lang="en-US" sz="1200" dirty="0"/>
+              <a:t>+size left parenthesis right parenthesis colon int. Returns the number of mappings in this map.</a:t>
+            </a:r>
+          </a:p>
+          <a:p>
+            <a:pPr marL="0" marR="0" lvl="0" indent="0" algn="l" defTabSz="457200" rtl="0" eaLnBrk="1" fontAlgn="auto" latinLnBrk="0" hangingPunct="1">
+              <a:lnSpc>
+                <a:spcPct val="100000"/>
+              </a:lnSpc>
+              <a:spcBef>
+                <a:spcPts val="0"/>
+              </a:spcBef>
+              <a:spcAft>
+                <a:spcPts val="0"/>
+              </a:spcAft>
+              <a:buClrTx/>
+              <a:buSzTx/>
+              <a:buFontTx/>
+              <a:buNone/>
+              <a:tabLst/>
+              <a:defRPr/>
+            </a:pPr>
+            <a:r>
+              <a:rPr lang="en-US" sz="1200" dirty="0"/>
+              <a:t>+values left parenthesis right parenthesis colon Set less than symbol V greater than symbol. Returns a set consisting of the values in this map.</a:t>
+            </a:r>
+          </a:p>
+          <a:p>
+            <a:pPr marL="0" marR="0" lvl="0" indent="0" algn="l" defTabSz="457200" rtl="0" eaLnBrk="1" fontAlgn="auto" latinLnBrk="0" hangingPunct="1">
+              <a:lnSpc>
+                <a:spcPct val="100000"/>
+              </a:lnSpc>
+              <a:spcBef>
+                <a:spcPts val="0"/>
+              </a:spcBef>
+              <a:spcAft>
+                <a:spcPts val="0"/>
+              </a:spcAft>
+              <a:buClrTx/>
+              <a:buSzTx/>
+              <a:buFontTx/>
+              <a:buNone/>
+              <a:tabLst/>
+              <a:defRPr/>
+            </a:pPr>
+            <a:endParaRPr lang="en-US" sz="1200" dirty="0"/>
+          </a:p>
+          <a:p>
+            <a:pPr marL="0" marR="0" lvl="0" indent="0" algn="l" defTabSz="457200" rtl="0" eaLnBrk="1" fontAlgn="auto" latinLnBrk="0" hangingPunct="1">
+              <a:lnSpc>
+                <a:spcPct val="100000"/>
+              </a:lnSpc>
+              <a:spcBef>
+                <a:spcPts val="0"/>
+              </a:spcBef>
+              <a:spcAft>
+                <a:spcPts val="0"/>
+              </a:spcAft>
+              <a:buClrTx/>
+              <a:buSzTx/>
+              <a:buFontTx/>
+              <a:buNone/>
+              <a:tabLst/>
+              <a:defRPr/>
+            </a:pPr>
+            <a:r>
+              <a:rPr lang="en-US" sz="1200" dirty="0"/>
+              <a:t>May HashMap less than symbol K, V greater than symbol.</a:t>
+            </a:r>
+          </a:p>
+          <a:p>
+            <a:pPr marL="0" marR="0" lvl="0" indent="0" algn="l" defTabSz="457200" rtl="0" eaLnBrk="1" fontAlgn="auto" latinLnBrk="0" hangingPunct="1">
+              <a:lnSpc>
+                <a:spcPct val="100000"/>
+              </a:lnSpc>
+              <a:spcBef>
+                <a:spcPts val="0"/>
+              </a:spcBef>
+              <a:spcAft>
+                <a:spcPts val="0"/>
+              </a:spcAft>
+              <a:buClrTx/>
+              <a:buSzTx/>
+              <a:buFontTx/>
+              <a:buNone/>
+              <a:tabLst/>
+              <a:defRPr/>
+            </a:pPr>
+            <a:endParaRPr lang="en-US" sz="1200" dirty="0"/>
+          </a:p>
+          <a:p>
+            <a:pPr marL="0" marR="0" lvl="0" indent="0" algn="l" defTabSz="457200" rtl="0" eaLnBrk="1" fontAlgn="auto" latinLnBrk="0" hangingPunct="1">
+              <a:lnSpc>
+                <a:spcPct val="100000"/>
+              </a:lnSpc>
+              <a:spcBef>
+                <a:spcPts val="0"/>
+              </a:spcBef>
+              <a:spcAft>
+                <a:spcPts val="0"/>
+              </a:spcAft>
+              <a:buClrTx/>
+              <a:buSzTx/>
+              <a:buFontTx/>
+              <a:buNone/>
+              <a:tabLst/>
+              <a:defRPr/>
+            </a:pPr>
+            <a:r>
+              <a:rPr lang="en-US" sz="1200" dirty="0"/>
+              <a:t>+MyHashMap left parenthesis right parenthesis. Creates an empty map with default capacity 4 and default load factor threshold 0.75f.</a:t>
+            </a:r>
+          </a:p>
+          <a:p>
+            <a:pPr marL="0" marR="0" lvl="0" indent="0" algn="l" defTabSz="457200" rtl="0" eaLnBrk="1" fontAlgn="auto" latinLnBrk="0" hangingPunct="1">
+              <a:lnSpc>
+                <a:spcPct val="100000"/>
+              </a:lnSpc>
+              <a:spcBef>
+                <a:spcPts val="0"/>
+              </a:spcBef>
+              <a:spcAft>
+                <a:spcPts val="0"/>
+              </a:spcAft>
+              <a:buClrTx/>
+              <a:buSzTx/>
+              <a:buFontTx/>
+              <a:buNone/>
+              <a:tabLst/>
+              <a:defRPr/>
+            </a:pPr>
+            <a:r>
+              <a:rPr lang="en-US" sz="1200" dirty="0"/>
+              <a:t>+MyHashMap left parenthesis capacity colon int right parenthesis. Creates a map with a specified capacity and default load factor threshold 0. 75f.</a:t>
+            </a:r>
+          </a:p>
+          <a:p>
+            <a:pPr marL="0" marR="0" lvl="0" indent="0" algn="l" defTabSz="457200" rtl="0" eaLnBrk="1" fontAlgn="auto" latinLnBrk="0" hangingPunct="1">
+              <a:lnSpc>
+                <a:spcPct val="100000"/>
+              </a:lnSpc>
+              <a:spcBef>
+                <a:spcPts val="0"/>
+              </a:spcBef>
+              <a:spcAft>
+                <a:spcPts val="0"/>
+              </a:spcAft>
+              <a:buClrTx/>
+              <a:buSzTx/>
+              <a:buFontTx/>
+              <a:buNone/>
+              <a:tabLst/>
+              <a:defRPr/>
+            </a:pPr>
+            <a:r>
+              <a:rPr lang="en-US" sz="1200" dirty="0"/>
+              <a:t>+MyHashMap left parenthesis capacity colon int, </a:t>
+            </a:r>
+            <a:r>
+              <a:rPr lang="en-US" sz="1200" dirty="0" err="1"/>
+              <a:t>loadFactorThreshold</a:t>
+            </a:r>
+            <a:r>
+              <a:rPr lang="en-US" sz="1200" dirty="0"/>
+              <a:t> colon float right parenthesis. Creates a map with a specified capacity and load factor threshold.</a:t>
+            </a:r>
+          </a:p>
+          <a:p>
+            <a:pPr marL="0" marR="0" lvl="0" indent="0" algn="l" defTabSz="457200" rtl="0" eaLnBrk="1" fontAlgn="auto" latinLnBrk="0" hangingPunct="1">
+              <a:lnSpc>
+                <a:spcPct val="100000"/>
+              </a:lnSpc>
+              <a:spcBef>
+                <a:spcPts val="0"/>
+              </a:spcBef>
+              <a:spcAft>
+                <a:spcPts val="0"/>
+              </a:spcAft>
+              <a:buClrTx/>
+              <a:buSzTx/>
+              <a:buFontTx/>
+              <a:buNone/>
+              <a:tabLst/>
+              <a:defRPr/>
+            </a:pPr>
+            <a:endParaRPr lang="en-US" sz="1200" dirty="0"/>
+          </a:p>
+          <a:p>
+            <a:pPr marL="0" marR="0" lvl="0" indent="0" algn="l" defTabSz="457200" rtl="0" eaLnBrk="1" fontAlgn="auto" latinLnBrk="0" hangingPunct="1">
+              <a:lnSpc>
+                <a:spcPct val="100000"/>
+              </a:lnSpc>
+              <a:spcBef>
+                <a:spcPts val="0"/>
+              </a:spcBef>
+              <a:spcAft>
+                <a:spcPts val="0"/>
+              </a:spcAft>
+              <a:buClrTx/>
+              <a:buSzTx/>
+              <a:buFontTx/>
+              <a:buNone/>
+              <a:tabLst/>
+              <a:defRPr/>
+            </a:pPr>
+            <a:r>
+              <a:rPr lang="en-US" sz="1200" dirty="0" err="1"/>
+              <a:t>MyMapEntry</a:t>
+            </a:r>
+            <a:r>
+              <a:rPr lang="en-US" sz="1200" dirty="0"/>
+              <a:t> less than symbol K, V greater than symbol.</a:t>
+            </a:r>
+          </a:p>
+          <a:p>
+            <a:pPr marL="0" marR="0" lvl="0" indent="0" algn="l" defTabSz="457200" rtl="0" eaLnBrk="1" fontAlgn="auto" latinLnBrk="0" hangingPunct="1">
+              <a:lnSpc>
+                <a:spcPct val="100000"/>
+              </a:lnSpc>
+              <a:spcBef>
+                <a:spcPts val="0"/>
+              </a:spcBef>
+              <a:spcAft>
+                <a:spcPts val="0"/>
+              </a:spcAft>
+              <a:buClrTx/>
+              <a:buSzTx/>
+              <a:buFontTx/>
+              <a:buNone/>
+              <a:tabLst/>
+              <a:defRPr/>
+            </a:pPr>
+            <a:r>
+              <a:rPr lang="en-US" sz="1200" dirty="0"/>
+              <a:t>Hyphen key colon K.</a:t>
+            </a:r>
+          </a:p>
+          <a:p>
+            <a:pPr marL="0" marR="0" lvl="0" indent="0" algn="l" defTabSz="457200" rtl="0" eaLnBrk="1" fontAlgn="auto" latinLnBrk="0" hangingPunct="1">
+              <a:lnSpc>
+                <a:spcPct val="100000"/>
+              </a:lnSpc>
+              <a:spcBef>
+                <a:spcPts val="0"/>
+              </a:spcBef>
+              <a:spcAft>
+                <a:spcPts val="0"/>
+              </a:spcAft>
+              <a:buClrTx/>
+              <a:buSzTx/>
+              <a:buFontTx/>
+              <a:buNone/>
+              <a:tabLst/>
+              <a:defRPr/>
+            </a:pPr>
+            <a:r>
+              <a:rPr lang="en-US" sz="1200" dirty="0"/>
+              <a:t>Hyphen value colon V.</a:t>
+            </a:r>
+          </a:p>
+          <a:p>
+            <a:pPr marL="0" marR="0" lvl="0" indent="0" algn="l" defTabSz="457200" rtl="0" eaLnBrk="1" fontAlgn="auto" latinLnBrk="0" hangingPunct="1">
+              <a:lnSpc>
+                <a:spcPct val="100000"/>
+              </a:lnSpc>
+              <a:spcBef>
+                <a:spcPts val="0"/>
+              </a:spcBef>
+              <a:spcAft>
+                <a:spcPts val="0"/>
+              </a:spcAft>
+              <a:buClrTx/>
+              <a:buSzTx/>
+              <a:buFontTx/>
+              <a:buNone/>
+              <a:tabLst/>
+              <a:defRPr/>
+            </a:pPr>
+            <a:r>
+              <a:rPr lang="en-US" sz="1200" dirty="0"/>
+              <a:t>+Entry left parenthesis key colon K, value colon V right parenthesis. Constructs an entry with the specified key and value.</a:t>
+            </a:r>
+          </a:p>
+          <a:p>
+            <a:pPr marL="0" marR="0" lvl="0" indent="0" algn="l" defTabSz="457200" rtl="0" eaLnBrk="1" fontAlgn="auto" latinLnBrk="0" hangingPunct="1">
+              <a:lnSpc>
+                <a:spcPct val="100000"/>
+              </a:lnSpc>
+              <a:spcBef>
+                <a:spcPts val="0"/>
+              </a:spcBef>
+              <a:spcAft>
+                <a:spcPts val="0"/>
+              </a:spcAft>
+              <a:buClrTx/>
+              <a:buSzTx/>
+              <a:buFontTx/>
+              <a:buNone/>
+              <a:tabLst/>
+              <a:defRPr/>
+            </a:pPr>
+            <a:r>
+              <a:rPr lang="en-US" sz="1200" dirty="0"/>
+              <a:t>+</a:t>
+            </a:r>
+            <a:r>
+              <a:rPr lang="en-US" sz="1200" dirty="0" err="1"/>
+              <a:t>getkey</a:t>
+            </a:r>
+            <a:r>
+              <a:rPr lang="en-US" sz="1200" dirty="0"/>
+              <a:t> left parenthesis right parenthesis colon K. Returns the key in the entry.</a:t>
+            </a:r>
+          </a:p>
+          <a:p>
+            <a:pPr marL="0" marR="0" lvl="0" indent="0" algn="l" defTabSz="457200" rtl="0" eaLnBrk="1" fontAlgn="auto" latinLnBrk="0" hangingPunct="1">
+              <a:lnSpc>
+                <a:spcPct val="100000"/>
+              </a:lnSpc>
+              <a:spcBef>
+                <a:spcPts val="0"/>
+              </a:spcBef>
+              <a:spcAft>
+                <a:spcPts val="0"/>
+              </a:spcAft>
+              <a:buClrTx/>
+              <a:buSzTx/>
+              <a:buFontTx/>
+              <a:buNone/>
+              <a:tabLst/>
+              <a:defRPr/>
+            </a:pPr>
+            <a:r>
+              <a:rPr lang="en-US" sz="1200" dirty="0"/>
+              <a:t>+</a:t>
+            </a:r>
+            <a:r>
+              <a:rPr lang="en-US" sz="1200" dirty="0" err="1"/>
+              <a:t>getValue</a:t>
+            </a:r>
+            <a:r>
+              <a:rPr lang="en-US" sz="1200" dirty="0"/>
+              <a:t> left parenthesis right parenthesis colon V. Returns the value in the entry.</a:t>
+            </a:r>
+          </a:p>
+          <a:p>
+            <a:pPr marL="0" marR="0" lvl="0" indent="0" algn="l" defTabSz="457200" rtl="0" eaLnBrk="1" fontAlgn="auto" latinLnBrk="0" hangingPunct="1">
+              <a:lnSpc>
+                <a:spcPct val="100000"/>
+              </a:lnSpc>
+              <a:spcBef>
+                <a:spcPts val="0"/>
+              </a:spcBef>
+              <a:spcAft>
+                <a:spcPts val="0"/>
+              </a:spcAft>
+              <a:buClrTx/>
+              <a:buSzTx/>
+              <a:buFontTx/>
+              <a:buNone/>
+              <a:tabLst/>
+              <a:defRPr/>
+            </a:pPr>
+            <a:endParaRPr lang="en-IN" sz="1200" dirty="0"/>
+          </a:p>
+          <a:p>
+            <a:pPr marL="0" marR="0" lvl="0" indent="0" algn="l" defTabSz="457200" rtl="0" eaLnBrk="1" fontAlgn="auto" latinLnBrk="0" hangingPunct="1">
+              <a:lnSpc>
+                <a:spcPct val="100000"/>
+              </a:lnSpc>
+              <a:spcBef>
+                <a:spcPts val="0"/>
+              </a:spcBef>
+              <a:spcAft>
+                <a:spcPts val="0"/>
+              </a:spcAft>
+              <a:buClrTx/>
+              <a:buSzTx/>
+              <a:buFontTx/>
+              <a:buNone/>
+              <a:tabLst/>
+              <a:defRPr/>
+            </a:pPr>
+            <a:r>
+              <a:rPr lang="en-IN" sz="1200" dirty="0" err="1"/>
+              <a:t>MyMap</a:t>
+            </a:r>
+            <a:r>
+              <a:rPr lang="en-IN" sz="1200" dirty="0"/>
+              <a:t>: </a:t>
+            </a:r>
+            <a:r>
+              <a:rPr lang="en-IN" dirty="0">
+                <a:hlinkClick r:id="rId3"/>
+              </a:rPr>
+              <a:t>https://liveexample.pearsoncmg.com/html/MyMap.html</a:t>
+            </a:r>
+            <a:endParaRPr lang="en-IN" dirty="0"/>
+          </a:p>
+          <a:p>
+            <a:pPr marL="0" marR="0" lvl="0" indent="0" algn="l" defTabSz="457200" rtl="0" eaLnBrk="1" fontAlgn="auto" latinLnBrk="0" hangingPunct="1">
+              <a:lnSpc>
+                <a:spcPct val="100000"/>
+              </a:lnSpc>
+              <a:spcBef>
+                <a:spcPts val="0"/>
+              </a:spcBef>
+              <a:spcAft>
+                <a:spcPts val="0"/>
+              </a:spcAft>
+              <a:buClrTx/>
+              <a:buSzTx/>
+              <a:buFontTx/>
+              <a:buNone/>
+              <a:tabLst/>
+              <a:defRPr/>
+            </a:pPr>
+            <a:r>
+              <a:rPr lang="en-US" altLang="en-US" sz="1200" dirty="0"/>
+              <a:t>MyHashMap</a:t>
+            </a:r>
+            <a:r>
+              <a:rPr lang="en-IN" altLang="en-US" sz="1200" dirty="0"/>
+              <a:t>: </a:t>
+            </a:r>
+            <a:r>
+              <a:rPr lang="en-IN" dirty="0">
+                <a:hlinkClick r:id="rId4"/>
+              </a:rPr>
+              <a:t>https://liveexample.pearsoncmg.com/html/MyHashMap.html</a:t>
+            </a:r>
+            <a:endParaRPr lang="en-IN" dirty="0"/>
+          </a:p>
+          <a:p>
+            <a:pPr marL="0" marR="0" lvl="0" indent="0" algn="l" defTabSz="457200" rtl="0" eaLnBrk="1" fontAlgn="auto" latinLnBrk="0" hangingPunct="1">
+              <a:lnSpc>
+                <a:spcPct val="100000"/>
+              </a:lnSpc>
+              <a:spcBef>
+                <a:spcPts val="0"/>
+              </a:spcBef>
+              <a:spcAft>
+                <a:spcPts val="0"/>
+              </a:spcAft>
+              <a:buClrTx/>
+              <a:buSzTx/>
+              <a:buFontTx/>
+              <a:buNone/>
+              <a:tabLst/>
+              <a:defRPr/>
+            </a:pPr>
+            <a:r>
+              <a:rPr lang="en-US" altLang="en-US" sz="1200" dirty="0"/>
+              <a:t>TestMyHashMap: </a:t>
+            </a:r>
+            <a:r>
+              <a:rPr lang="en-IN" dirty="0">
+                <a:hlinkClick r:id="rId5"/>
+              </a:rPr>
+              <a:t>https://liveexample.pearsoncmg.com/html/TestMyHashMap.html</a:t>
+            </a:r>
+            <a:endParaRPr lang="en-US" altLang="en-US" sz="1200" dirty="0"/>
           </a:p>
         </p:txBody>
       </p:sp>
@@ -3174,7 +3834,7 @@
             <a:spLocks noGrp="1"/>
           </p:cNvSpPr>
           <p:nvPr>
-            <p:ph type="sldNum" sz="quarter" idx="5"/>
+            <p:ph type="sldNum" idx="12"/>
           </p:nvPr>
         </p:nvSpPr>
         <p:spPr/>
@@ -3182,24 +3842,41 @@
           <a:bodyPr/>
           <a:lstStyle/>
           <a:p>
-            <a:pPr>
-              <a:defRPr/>
+            <a:pPr marL="0" marR="0" lvl="0" indent="0" algn="r" rtl="0">
+              <a:spcBef>
+                <a:spcPts val="0"/>
+              </a:spcBef>
+              <a:buSzPct val="25000"/>
+              <a:buNone/>
             </a:pPr>
-            <a:fld id="{B8378557-9440-479E-8829-B26054EBEED3}" type="slidenum">
-              <a:rPr lang="en-US" altLang="en-US" smtClean="0"/>
-              <a:pPr>
-                <a:defRPr/>
-              </a:pPr>
+            <a:fld id="{00000000-1234-1234-1234-123412341234}" type="slidenum">
+              <a:rPr lang="en-US" sz="1200" b="0" i="0" u="none" strike="noStrike" cap="none" smtClean="0">
+                <a:solidFill>
+                  <a:schemeClr val="dk1"/>
+                </a:solidFill>
+                <a:latin typeface="Arial"/>
+                <a:ea typeface="Arial"/>
+                <a:cs typeface="Arial"/>
+                <a:sym typeface="Arial"/>
+              </a:rPr>
               <a:t>20</a:t>
             </a:fld>
-            <a:endParaRPr lang="en-US" altLang="en-US"/>
+            <a:endParaRPr lang="en-US" sz="1200" b="0" i="0" u="none" strike="noStrike" cap="none" dirty="0">
+              <a:solidFill>
+                <a:schemeClr val="dk1"/>
+              </a:solidFill>
+              <a:latin typeface="Arial"/>
+              <a:ea typeface="Arial"/>
+              <a:cs typeface="Arial"/>
+              <a:sym typeface="Arial"/>
+            </a:endParaRPr>
           </a:p>
         </p:txBody>
       </p:sp>
     </p:spTree>
     <p:extLst>
       <p:ext uri="{BB962C8B-B14F-4D97-AF65-F5344CB8AC3E}">
-        <p14:creationId xmlns:p14="http://schemas.microsoft.com/office/powerpoint/2010/main" val="1387968533"/>
+        <p14:creationId xmlns:p14="http://schemas.microsoft.com/office/powerpoint/2010/main" val="422097539"/>
       </p:ext>
     </p:extLst>
   </p:cSld>
@@ -3259,27 +3936,46 @@
           <a:lstStyle/>
           <a:p>
             <a:r>
+              <a:rPr lang="en-US" dirty="0"/>
+              <a:t>There are three types of maps:</a:t>
+            </a:r>
+          </a:p>
+          <a:p>
+            <a:r>
+              <a:rPr lang="en-US" dirty="0"/>
+              <a:t>HashMap, </a:t>
+            </a:r>
+            <a:r>
               <a:rPr lang="en-US" dirty="0" err="1"/>
-              <a:t>Map.Entry</a:t>
+              <a:t>LinkedHashMap</a:t>
             </a:r>
             <a:r>
               <a:rPr lang="en-US" dirty="0"/>
-              <a:t> interface operates on an entry in the map</a:t>
-            </a:r>
-          </a:p>
-          <a:p>
+              <a:t>, and </a:t>
+            </a:r>
+            <a:r>
+              <a:rPr lang="en-US" dirty="0" err="1"/>
+              <a:t>TreeMap</a:t>
+            </a:r>
             <a:r>
               <a:rPr lang="en-US" dirty="0"/>
-              <a:t>Java 8 added a default </a:t>
-            </a:r>
-            <a:r>
-              <a:rPr lang="en-US" dirty="0" err="1"/>
-              <a:t>forEach</a:t>
-            </a:r>
+              <a:t>.</a:t>
+            </a:r>
+          </a:p>
+          <a:p>
             <a:r>
               <a:rPr lang="en-US" dirty="0"/>
-              <a:t> method in the Map interface</a:t>
-            </a:r>
+              <a:t>Common features of the three are defined in the Map interface</a:t>
+            </a:r>
+          </a:p>
+          <a:p>
+            <a:r>
+              <a:rPr lang="en-US" dirty="0"/>
+              <a:t>Figure shows heir relationship</a:t>
+            </a:r>
+          </a:p>
+          <a:p>
+            <a:endParaRPr lang="en-US" dirty="0"/>
           </a:p>
         </p:txBody>
       </p:sp>
@@ -3315,7 +4011,7 @@
     </p:spTree>
     <p:extLst>
       <p:ext uri="{BB962C8B-B14F-4D97-AF65-F5344CB8AC3E}">
-        <p14:creationId xmlns:p14="http://schemas.microsoft.com/office/powerpoint/2010/main" val="4031537114"/>
+        <p14:creationId xmlns:p14="http://schemas.microsoft.com/office/powerpoint/2010/main" val="4202141726"/>
       </p:ext>
     </p:extLst>
   </p:cSld>
@@ -3374,6 +4070,62 @@
           <a:bodyPr/>
           <a:lstStyle/>
           <a:p>
+            <a:r>
+              <a:rPr lang="en-US" dirty="0"/>
+              <a:t>Map interface provides the methods for</a:t>
+            </a:r>
+          </a:p>
+          <a:p>
+            <a:r>
+              <a:rPr lang="en-US" dirty="0"/>
+              <a:t>Querying, updating, and getting a collection of values and a set of keys.</a:t>
+            </a:r>
+          </a:p>
+          <a:p>
+            <a:r>
+              <a:rPr lang="en-US" dirty="0"/>
+              <a:t>Update methods (clear, put, </a:t>
+            </a:r>
+            <a:r>
+              <a:rPr lang="en-US" dirty="0" err="1"/>
+              <a:t>putAll</a:t>
+            </a:r>
+            <a:r>
+              <a:rPr lang="en-US" dirty="0"/>
+              <a:t>, remove)</a:t>
+            </a:r>
+          </a:p>
+          <a:p>
+            <a:r>
+              <a:rPr lang="en-US" dirty="0"/>
+              <a:t>Query methods (</a:t>
+            </a:r>
+            <a:r>
+              <a:rPr lang="en-US" dirty="0" err="1"/>
+              <a:t>containKey</a:t>
+            </a:r>
+            <a:r>
+              <a:rPr lang="en-US" dirty="0"/>
+              <a:t>, </a:t>
+            </a:r>
+            <a:r>
+              <a:rPr lang="en-US" dirty="0" err="1"/>
+              <a:t>containsValue</a:t>
+            </a:r>
+            <a:r>
+              <a:rPr lang="en-US" dirty="0"/>
+              <a:t>, </a:t>
+            </a:r>
+            <a:r>
+              <a:rPr lang="en-US" dirty="0" err="1"/>
+              <a:t>isEmpt</a:t>
+            </a:r>
+            <a:r>
+              <a:rPr lang="en-US" dirty="0"/>
+              <a:t>, size)</a:t>
+            </a:r>
+          </a:p>
+          <a:p>
             <a:endParaRPr lang="en-US" dirty="0"/>
           </a:p>
         </p:txBody>
@@ -3410,7 +4162,7 @@
     </p:spTree>
     <p:extLst>
       <p:ext uri="{BB962C8B-B14F-4D97-AF65-F5344CB8AC3E}">
-        <p14:creationId xmlns:p14="http://schemas.microsoft.com/office/powerpoint/2010/main" val="817213215"/>
+        <p14:creationId xmlns:p14="http://schemas.microsoft.com/office/powerpoint/2010/main" val="1387968533"/>
       </p:ext>
     </p:extLst>
   </p:cSld>
@@ -3469,7 +4221,28 @@
           <a:bodyPr/>
           <a:lstStyle/>
           <a:p>
-            <a:endParaRPr lang="en-US"/>
+            <a:r>
+              <a:rPr lang="en-US" dirty="0" err="1"/>
+              <a:t>Map.Entry</a:t>
+            </a:r>
+            <a:r>
+              <a:rPr lang="en-US" dirty="0"/>
+              <a:t> interface operates on an entry in the map</a:t>
+            </a:r>
+          </a:p>
+          <a:p>
+            <a:r>
+              <a:rPr lang="en-US" dirty="0"/>
+              <a:t>Java 8 added a default </a:t>
+            </a:r>
+            <a:r>
+              <a:rPr lang="en-US" dirty="0" err="1"/>
+              <a:t>forEach</a:t>
+            </a:r>
+            <a:r>
+              <a:rPr lang="en-US" dirty="0"/>
+              <a:t> method in the Map interface</a:t>
+            </a:r>
           </a:p>
         </p:txBody>
       </p:sp>
@@ -3505,7 +4278,7 @@
     </p:spTree>
     <p:extLst>
       <p:ext uri="{BB962C8B-B14F-4D97-AF65-F5344CB8AC3E}">
-        <p14:creationId xmlns:p14="http://schemas.microsoft.com/office/powerpoint/2010/main" val="3195336867"/>
+        <p14:creationId xmlns:p14="http://schemas.microsoft.com/office/powerpoint/2010/main" val="4031537114"/>
       </p:ext>
     </p:extLst>
   </p:cSld>
@@ -3592,6 +4365,196 @@
                 <a:defRPr/>
               </a:pPr>
               <a:t>24</a:t>
+            </a:fld>
+            <a:endParaRPr lang="en-US" altLang="en-US"/>
+          </a:p>
+        </p:txBody>
+      </p:sp>
+    </p:spTree>
+    <p:extLst>
+      <p:ext uri="{BB962C8B-B14F-4D97-AF65-F5344CB8AC3E}">
+        <p14:creationId xmlns:p14="http://schemas.microsoft.com/office/powerpoint/2010/main" val="817213215"/>
+      </p:ext>
+    </p:extLst>
+  </p:cSld>
+  <p:clrMapOvr>
+    <a:masterClrMapping/>
+  </p:clrMapOvr>
+</p:notes>
+</file>
+
+<file path=ppt/notesSlides/notesSlide25.xml><?xml version="1.0" encoding="utf-8"?>
+<p:notes xmlns:a="http://schemas.openxmlformats.org/drawingml/2006/main" xmlns:r="http://schemas.openxmlformats.org/officeDocument/2006/relationships" xmlns:p="http://schemas.openxmlformats.org/presentationml/2006/main">
+  <p:cSld>
+    <p:spTree>
+      <p:nvGrpSpPr>
+        <p:cNvPr id="1" name=""/>
+        <p:cNvGrpSpPr/>
+        <p:nvPr/>
+      </p:nvGrpSpPr>
+      <p:grpSpPr>
+        <a:xfrm>
+          <a:off x="0" y="0"/>
+          <a:ext cx="0" cy="0"/>
+          <a:chOff x="0" y="0"/>
+          <a:chExt cx="0" cy="0"/>
+        </a:xfrm>
+      </p:grpSpPr>
+      <p:sp>
+        <p:nvSpPr>
+          <p:cNvPr id="2" name="Slide Image Placeholder 1"/>
+          <p:cNvSpPr>
+            <a:spLocks noGrp="1" noRot="1" noChangeAspect="1"/>
+          </p:cNvSpPr>
+          <p:nvPr>
+            <p:ph type="sldImg"/>
+          </p:nvPr>
+        </p:nvSpPr>
+        <p:spPr>
+          <a:xfrm>
+            <a:off x="1266825" y="727075"/>
+            <a:ext cx="4781550" cy="3586163"/>
+          </a:xfrm>
+        </p:spPr>
+      </p:sp>
+      <p:sp>
+        <p:nvSpPr>
+          <p:cNvPr id="3" name="Notes Placeholder 2"/>
+          <p:cNvSpPr>
+            <a:spLocks noGrp="1"/>
+          </p:cNvSpPr>
+          <p:nvPr>
+            <p:ph type="body" idx="1"/>
+          </p:nvPr>
+        </p:nvSpPr>
+        <p:spPr/>
+        <p:txBody>
+          <a:bodyPr/>
+          <a:lstStyle/>
+          <a:p>
+            <a:endParaRPr lang="en-US"/>
+          </a:p>
+        </p:txBody>
+      </p:sp>
+      <p:sp>
+        <p:nvSpPr>
+          <p:cNvPr id="4" name="Slide Number Placeholder 3"/>
+          <p:cNvSpPr>
+            <a:spLocks noGrp="1"/>
+          </p:cNvSpPr>
+          <p:nvPr>
+            <p:ph type="sldNum" sz="quarter" idx="5"/>
+          </p:nvPr>
+        </p:nvSpPr>
+        <p:spPr/>
+        <p:txBody>
+          <a:bodyPr/>
+          <a:lstStyle/>
+          <a:p>
+            <a:pPr>
+              <a:defRPr/>
+            </a:pPr>
+            <a:fld id="{B8378557-9440-479E-8829-B26054EBEED3}" type="slidenum">
+              <a:rPr lang="en-US" altLang="en-US" smtClean="0"/>
+              <a:pPr>
+                <a:defRPr/>
+              </a:pPr>
+              <a:t>25</a:t>
+            </a:fld>
+            <a:endParaRPr lang="en-US" altLang="en-US"/>
+          </a:p>
+        </p:txBody>
+      </p:sp>
+    </p:spTree>
+    <p:extLst>
+      <p:ext uri="{BB962C8B-B14F-4D97-AF65-F5344CB8AC3E}">
+        <p14:creationId xmlns:p14="http://schemas.microsoft.com/office/powerpoint/2010/main" val="3195336867"/>
+      </p:ext>
+    </p:extLst>
+  </p:cSld>
+  <p:clrMapOvr>
+    <a:masterClrMapping/>
+  </p:clrMapOvr>
+</p:notes>
+</file>
+
+<file path=ppt/notesSlides/notesSlide26.xml><?xml version="1.0" encoding="utf-8"?>
+<p:notes xmlns:a="http://schemas.openxmlformats.org/drawingml/2006/main" xmlns:r="http://schemas.openxmlformats.org/officeDocument/2006/relationships" xmlns:p="http://schemas.openxmlformats.org/presentationml/2006/main">
+  <p:cSld>
+    <p:spTree>
+      <p:nvGrpSpPr>
+        <p:cNvPr id="1" name=""/>
+        <p:cNvGrpSpPr/>
+        <p:nvPr/>
+      </p:nvGrpSpPr>
+      <p:grpSpPr>
+        <a:xfrm>
+          <a:off x="0" y="0"/>
+          <a:ext cx="0" cy="0"/>
+          <a:chOff x="0" y="0"/>
+          <a:chExt cx="0" cy="0"/>
+        </a:xfrm>
+      </p:grpSpPr>
+      <p:sp>
+        <p:nvSpPr>
+          <p:cNvPr id="2" name="Slide Image Placeholder 1"/>
+          <p:cNvSpPr>
+            <a:spLocks noGrp="1" noRot="1" noChangeAspect="1"/>
+          </p:cNvSpPr>
+          <p:nvPr>
+            <p:ph type="sldImg"/>
+          </p:nvPr>
+        </p:nvSpPr>
+        <p:spPr>
+          <a:xfrm>
+            <a:off x="1266825" y="727075"/>
+            <a:ext cx="4781550" cy="3586163"/>
+          </a:xfrm>
+        </p:spPr>
+      </p:sp>
+      <p:sp>
+        <p:nvSpPr>
+          <p:cNvPr id="3" name="Notes Placeholder 2"/>
+          <p:cNvSpPr>
+            <a:spLocks noGrp="1"/>
+          </p:cNvSpPr>
+          <p:nvPr>
+            <p:ph type="body" idx="1"/>
+          </p:nvPr>
+        </p:nvSpPr>
+        <p:spPr/>
+        <p:txBody>
+          <a:bodyPr/>
+          <a:lstStyle/>
+          <a:p>
+            <a:endParaRPr lang="en-US" dirty="0"/>
+          </a:p>
+        </p:txBody>
+      </p:sp>
+      <p:sp>
+        <p:nvSpPr>
+          <p:cNvPr id="4" name="Slide Number Placeholder 3"/>
+          <p:cNvSpPr>
+            <a:spLocks noGrp="1"/>
+          </p:cNvSpPr>
+          <p:nvPr>
+            <p:ph type="sldNum" sz="quarter" idx="5"/>
+          </p:nvPr>
+        </p:nvSpPr>
+        <p:spPr/>
+        <p:txBody>
+          <a:bodyPr/>
+          <a:lstStyle/>
+          <a:p>
+            <a:pPr>
+              <a:defRPr/>
+            </a:pPr>
+            <a:fld id="{B8378557-9440-479E-8829-B26054EBEED3}" type="slidenum">
+              <a:rPr lang="en-US" altLang="en-US" smtClean="0"/>
+              <a:pPr>
+                <a:defRPr/>
+              </a:pPr>
+              <a:t>26</a:t>
             </a:fld>
             <a:endParaRPr lang="en-US" altLang="en-US"/>
           </a:p>
@@ -4337,12 +5300,7 @@
             <p:ph type="sldImg"/>
           </p:nvPr>
         </p:nvSpPr>
-        <p:spPr>
-          <a:xfrm>
-            <a:off x="1266825" y="727075"/>
-            <a:ext cx="4781550" cy="3586163"/>
-          </a:xfrm>
-        </p:spPr>
+        <p:spPr/>
       </p:sp>
       <p:sp>
         <p:nvSpPr>
@@ -4359,51 +5317,571 @@
           <a:bodyPr/>
           <a:lstStyle/>
           <a:p>
-            <a:pPr defTabSz="948257">
+            <a:pPr marL="0" marR="0" lvl="0" indent="0" algn="l" defTabSz="457200" rtl="0" eaLnBrk="1" fontAlgn="auto" latinLnBrk="0" hangingPunct="1">
+              <a:lnSpc>
+                <a:spcPct val="100000"/>
+              </a:lnSpc>
+              <a:spcBef>
+                <a:spcPts val="0"/>
+              </a:spcBef>
+              <a:spcAft>
+                <a:spcPts val="0"/>
+              </a:spcAft>
+              <a:buClrTx/>
+              <a:buSzTx/>
+              <a:buFontTx/>
+              <a:buNone/>
+              <a:tabLst/>
               <a:defRPr/>
             </a:pPr>
             <a:r>
-              <a:rPr lang="en-US" altLang="en-US" dirty="0">
-                <a:cs typeface="Times New Roman" panose="02020603050405020304" pitchFamily="18" charset="0"/>
-              </a:rPr>
-              <a:t>The Set interface extends the Collection interface. </a:t>
-            </a:r>
-          </a:p>
-          <a:p>
-            <a:pPr defTabSz="948257">
+              <a:rPr lang="en-US" altLang="en-US" sz="1200" dirty="0"/>
+              <a:t>MySet less than symbol E greater than symbol which leads to the interface </a:t>
+            </a:r>
+            <a:r>
+              <a:rPr lang="en-US" altLang="en-US" sz="1200" dirty="0" err="1"/>
+              <a:t>java.lang.lterable</a:t>
+            </a:r>
+            <a:r>
+              <a:rPr lang="en-US" altLang="en-US" sz="1200" dirty="0"/>
+              <a:t> less than symbol E greater than symbol.</a:t>
+            </a:r>
+          </a:p>
+          <a:p>
+            <a:pPr marL="0" marR="0" lvl="0" indent="0" algn="l" defTabSz="457200" rtl="0" eaLnBrk="1" fontAlgn="auto" latinLnBrk="0" hangingPunct="1">
+              <a:lnSpc>
+                <a:spcPct val="100000"/>
+              </a:lnSpc>
+              <a:spcBef>
+                <a:spcPts val="0"/>
+              </a:spcBef>
+              <a:spcAft>
+                <a:spcPts val="0"/>
+              </a:spcAft>
+              <a:buClrTx/>
+              <a:buSzTx/>
+              <a:buFontTx/>
+              <a:buNone/>
+              <a:tabLst/>
               <a:defRPr/>
             </a:pPr>
             <a:r>
-              <a:rPr lang="en-US" altLang="en-US" dirty="0">
-                <a:cs typeface="Times New Roman" panose="02020603050405020304" pitchFamily="18" charset="0"/>
-              </a:rPr>
-              <a:t>It does not introduce new methods or constants, but it stipulates that an instance of Set contains no duplicate elements. </a:t>
-            </a:r>
-          </a:p>
-          <a:p>
-            <a:pPr defTabSz="948257">
+              <a:rPr lang="en-US" altLang="en-US" sz="1200" dirty="0"/>
+              <a:t>The codes for each are as follows.</a:t>
+            </a:r>
+          </a:p>
+          <a:p>
+            <a:pPr marL="0" marR="0" lvl="0" indent="0" algn="l" defTabSz="457200" rtl="0" eaLnBrk="1" fontAlgn="auto" latinLnBrk="0" hangingPunct="1">
+              <a:lnSpc>
+                <a:spcPct val="100000"/>
+              </a:lnSpc>
+              <a:spcBef>
+                <a:spcPts val="0"/>
+              </a:spcBef>
+              <a:spcAft>
+                <a:spcPts val="0"/>
+              </a:spcAft>
+              <a:buClrTx/>
+              <a:buSzTx/>
+              <a:buFontTx/>
+              <a:buNone/>
+              <a:tabLst/>
               <a:defRPr/>
             </a:pPr>
             <a:r>
-              <a:rPr lang="en-US" altLang="en-US" dirty="0">
-                <a:cs typeface="Times New Roman" panose="02020603050405020304" pitchFamily="18" charset="0"/>
-              </a:rPr>
-              <a:t>The concrete classes that implement Set must ensure that no duplicate elements can be added to the set. </a:t>
-            </a:r>
-          </a:p>
-          <a:p>
-            <a:pPr defTabSz="948257">
+              <a:rPr lang="en-US" altLang="en-US" sz="1200" dirty="0" err="1"/>
+              <a:t>java.lang.lterable</a:t>
+            </a:r>
+            <a:r>
+              <a:rPr lang="en-US" altLang="en-US" sz="1200" dirty="0"/>
+              <a:t> less than symbol E greater than symbol.</a:t>
+            </a:r>
+          </a:p>
+          <a:p>
+            <a:pPr marL="0" marR="0" lvl="0" indent="0" algn="l" defTabSz="457200" rtl="0" eaLnBrk="1" fontAlgn="auto" latinLnBrk="0" hangingPunct="1">
+              <a:lnSpc>
+                <a:spcPct val="100000"/>
+              </a:lnSpc>
+              <a:spcBef>
+                <a:spcPts val="0"/>
+              </a:spcBef>
+              <a:spcAft>
+                <a:spcPts val="0"/>
+              </a:spcAft>
+              <a:buClrTx/>
+              <a:buSzTx/>
+              <a:buFontTx/>
+              <a:buNone/>
+              <a:tabLst/>
               <a:defRPr/>
             </a:pPr>
             <a:r>
-              <a:rPr lang="en-US" altLang="en-US" dirty="0">
-                <a:cs typeface="Times New Roman" panose="02020603050405020304" pitchFamily="18" charset="0"/>
+              <a:rPr lang="en-US" altLang="en-US" sz="1200" dirty="0"/>
+              <a:t>+iterator left parenthesis right parenthesis colon </a:t>
+            </a:r>
+            <a:r>
+              <a:rPr lang="en-US" altLang="en-US" sz="1200" dirty="0" err="1"/>
+              <a:t>java.util.Iterator</a:t>
+            </a:r>
+            <a:r>
+              <a:rPr lang="en-US" altLang="en-US" sz="1200" dirty="0"/>
+              <a:t> less than symbol E greater than symbol.</a:t>
+            </a:r>
+          </a:p>
+          <a:p>
+            <a:pPr marL="0" marR="0" lvl="0" indent="0" algn="l" defTabSz="457200" rtl="0" eaLnBrk="1" fontAlgn="auto" latinLnBrk="0" hangingPunct="1">
+              <a:lnSpc>
+                <a:spcPct val="100000"/>
+              </a:lnSpc>
+              <a:spcBef>
+                <a:spcPts val="0"/>
+              </a:spcBef>
+              <a:spcAft>
+                <a:spcPts val="0"/>
+              </a:spcAft>
+              <a:buClrTx/>
+              <a:buSzTx/>
+              <a:buFontTx/>
+              <a:buNone/>
+              <a:tabLst/>
+              <a:defRPr/>
+            </a:pPr>
+            <a:r>
+              <a:rPr lang="en-US" altLang="en-US" sz="1200" dirty="0"/>
+              <a:t>Interface, MySet less than symbol E greater than symbol</a:t>
+            </a:r>
+          </a:p>
+          <a:p>
+            <a:pPr marL="0" marR="0" lvl="0" indent="0" algn="l" defTabSz="457200" rtl="0" eaLnBrk="1" fontAlgn="auto" latinLnBrk="0" hangingPunct="1">
+              <a:lnSpc>
+                <a:spcPct val="100000"/>
+              </a:lnSpc>
+              <a:spcBef>
+                <a:spcPts val="0"/>
+              </a:spcBef>
+              <a:spcAft>
+                <a:spcPts val="0"/>
+              </a:spcAft>
+              <a:buClrTx/>
+              <a:buSzTx/>
+              <a:buFontTx/>
+              <a:buNone/>
+              <a:tabLst/>
+              <a:defRPr/>
+            </a:pPr>
+            <a:r>
+              <a:rPr lang="en-US" altLang="en-US" sz="1200" dirty="0"/>
+              <a:t>+clear left parenthesis right parenthesis colon void. Removes all elements from this set.</a:t>
+            </a:r>
+          </a:p>
+          <a:p>
+            <a:pPr marL="0" marR="0" lvl="0" indent="0" algn="l" defTabSz="457200" rtl="0" eaLnBrk="1" fontAlgn="auto" latinLnBrk="0" hangingPunct="1">
+              <a:lnSpc>
+                <a:spcPct val="100000"/>
+              </a:lnSpc>
+              <a:spcBef>
+                <a:spcPts val="0"/>
+              </a:spcBef>
+              <a:spcAft>
+                <a:spcPts val="0"/>
+              </a:spcAft>
+              <a:buClrTx/>
+              <a:buSzTx/>
+              <a:buFontTx/>
+              <a:buNone/>
+              <a:tabLst/>
+              <a:defRPr/>
+            </a:pPr>
+            <a:r>
+              <a:rPr lang="en-US" altLang="en-US" sz="1200" dirty="0"/>
+              <a:t>+contains left parenthesis </a:t>
+            </a:r>
+            <a:r>
+              <a:rPr lang="en-US" altLang="en-US" sz="1200" dirty="0" err="1"/>
+              <a:t>ecolon</a:t>
+            </a:r>
+            <a:r>
+              <a:rPr lang="en-US" altLang="en-US" sz="1200" dirty="0"/>
+              <a:t> E right parenthesis colon Boolean. Returns true if the element is in the set.</a:t>
+            </a:r>
+          </a:p>
+          <a:p>
+            <a:pPr marL="0" marR="0" lvl="0" indent="0" algn="l" defTabSz="457200" rtl="0" eaLnBrk="1" fontAlgn="auto" latinLnBrk="0" hangingPunct="1">
+              <a:lnSpc>
+                <a:spcPct val="100000"/>
+              </a:lnSpc>
+              <a:spcBef>
+                <a:spcPts val="0"/>
+              </a:spcBef>
+              <a:spcAft>
+                <a:spcPts val="0"/>
+              </a:spcAft>
+              <a:buClrTx/>
+              <a:buSzTx/>
+              <a:buFontTx/>
+              <a:buNone/>
+              <a:tabLst/>
+              <a:defRPr/>
+            </a:pPr>
+            <a:r>
+              <a:rPr lang="en-US" altLang="en-US" sz="1200" dirty="0"/>
+              <a:t>+add left parenthesis </a:t>
+            </a:r>
+            <a:r>
+              <a:rPr lang="en-US" altLang="en-US" sz="1200" dirty="0" err="1"/>
+              <a:t>ecolon</a:t>
+            </a:r>
+            <a:r>
+              <a:rPr lang="en-US" altLang="en-US" sz="1200" dirty="0"/>
+              <a:t> E right parenthesis colon Boolean. Adds the element to the set and returns true if the element is added successfully.</a:t>
+            </a:r>
+          </a:p>
+          <a:p>
+            <a:pPr marL="0" marR="0" lvl="0" indent="0" algn="l" defTabSz="457200" rtl="0" eaLnBrk="1" fontAlgn="auto" latinLnBrk="0" hangingPunct="1">
+              <a:lnSpc>
+                <a:spcPct val="100000"/>
+              </a:lnSpc>
+              <a:spcBef>
+                <a:spcPts val="0"/>
+              </a:spcBef>
+              <a:spcAft>
+                <a:spcPts val="0"/>
+              </a:spcAft>
+              <a:buClrTx/>
+              <a:buSzTx/>
+              <a:buFontTx/>
+              <a:buNone/>
+              <a:tabLst/>
+              <a:defRPr/>
+            </a:pPr>
+            <a:r>
+              <a:rPr lang="en-US" altLang="en-US" sz="1200" dirty="0"/>
+              <a:t>+remove left parenthesis e colon E right parenthesis colon Boolean. Removes the element from the set and returns true if the set contained the element.</a:t>
+            </a:r>
+          </a:p>
+          <a:p>
+            <a:pPr marL="0" marR="0" lvl="0" indent="0" algn="l" defTabSz="457200" rtl="0" eaLnBrk="1" fontAlgn="auto" latinLnBrk="0" hangingPunct="1">
+              <a:lnSpc>
+                <a:spcPct val="100000"/>
+              </a:lnSpc>
+              <a:spcBef>
+                <a:spcPts val="0"/>
+              </a:spcBef>
+              <a:spcAft>
+                <a:spcPts val="0"/>
+              </a:spcAft>
+              <a:buClrTx/>
+              <a:buSzTx/>
+              <a:buFontTx/>
+              <a:buNone/>
+              <a:tabLst/>
+              <a:defRPr/>
+            </a:pPr>
+            <a:r>
+              <a:rPr lang="en-US" altLang="en-US" sz="1200" dirty="0"/>
+              <a:t>+</a:t>
+            </a:r>
+            <a:r>
+              <a:rPr lang="en-US" altLang="en-US" sz="1200" dirty="0" err="1"/>
+              <a:t>isEmpty</a:t>
+            </a:r>
+            <a:r>
+              <a:rPr lang="en-US" altLang="en-US" sz="1200" dirty="0"/>
+              <a:t> left parenthesis right parenthesis colon Boolean. Returns true if this set does not contain any elements.</a:t>
+            </a:r>
+          </a:p>
+          <a:p>
+            <a:pPr marL="0" marR="0" lvl="0" indent="0" algn="l" defTabSz="457200" rtl="0" eaLnBrk="1" fontAlgn="auto" latinLnBrk="0" hangingPunct="1">
+              <a:lnSpc>
+                <a:spcPct val="100000"/>
+              </a:lnSpc>
+              <a:spcBef>
+                <a:spcPts val="0"/>
+              </a:spcBef>
+              <a:spcAft>
+                <a:spcPts val="0"/>
+              </a:spcAft>
+              <a:buClrTx/>
+              <a:buSzTx/>
+              <a:buFontTx/>
+              <a:buNone/>
+              <a:tabLst/>
+              <a:defRPr/>
+            </a:pPr>
+            <a:r>
+              <a:rPr lang="en-US" altLang="en-US" sz="1200" dirty="0"/>
+              <a:t>+</a:t>
+            </a:r>
+            <a:r>
+              <a:rPr lang="en-US" altLang="en-US" sz="1200" dirty="0" err="1"/>
+              <a:t>sizeOcolon</a:t>
+            </a:r>
+            <a:r>
+              <a:rPr lang="en-US" altLang="en-US" sz="1200" dirty="0"/>
+              <a:t> int. Returns the number of elements in this set.</a:t>
+            </a:r>
+          </a:p>
+          <a:p>
+            <a:pPr marL="0" marR="0" lvl="0" indent="0" algn="l" defTabSz="457200" rtl="0" eaLnBrk="1" fontAlgn="auto" latinLnBrk="0" hangingPunct="1">
+              <a:lnSpc>
+                <a:spcPct val="100000"/>
+              </a:lnSpc>
+              <a:spcBef>
+                <a:spcPts val="0"/>
+              </a:spcBef>
+              <a:spcAft>
+                <a:spcPts val="0"/>
+              </a:spcAft>
+              <a:buClrTx/>
+              <a:buSzTx/>
+              <a:buFontTx/>
+              <a:buNone/>
+              <a:tabLst/>
+              <a:defRPr/>
+            </a:pPr>
+            <a:endParaRPr lang="en-US" altLang="en-US" sz="1200" dirty="0"/>
+          </a:p>
+          <a:p>
+            <a:pPr marL="0" marR="0" lvl="0" indent="0" algn="l" defTabSz="457200" rtl="0" eaLnBrk="1" fontAlgn="auto" latinLnBrk="0" hangingPunct="1">
+              <a:lnSpc>
+                <a:spcPct val="100000"/>
+              </a:lnSpc>
+              <a:spcBef>
+                <a:spcPts val="0"/>
+              </a:spcBef>
+              <a:spcAft>
+                <a:spcPts val="0"/>
+              </a:spcAft>
+              <a:buClrTx/>
+              <a:buSzTx/>
+              <a:buFontTx/>
+              <a:buNone/>
+              <a:tabLst/>
+              <a:defRPr/>
+            </a:pPr>
+            <a:r>
+              <a:rPr lang="en-US" altLang="en-US" sz="1200" dirty="0"/>
+              <a:t>MyHashSet less than symbol E greater than symbol.</a:t>
+            </a:r>
+          </a:p>
+          <a:p>
+            <a:pPr marL="0" marR="0" lvl="0" indent="0" algn="l" defTabSz="457200" rtl="0" eaLnBrk="1" fontAlgn="auto" latinLnBrk="0" hangingPunct="1">
+              <a:lnSpc>
+                <a:spcPct val="100000"/>
+              </a:lnSpc>
+              <a:spcBef>
+                <a:spcPts val="0"/>
+              </a:spcBef>
+              <a:spcAft>
+                <a:spcPts val="0"/>
+              </a:spcAft>
+              <a:buClrTx/>
+              <a:buSzTx/>
+              <a:buFontTx/>
+              <a:buNone/>
+              <a:tabLst/>
+              <a:defRPr/>
+            </a:pPr>
+            <a:r>
+              <a:rPr lang="en-US" altLang="en-US" sz="1200" dirty="0"/>
+              <a:t>+MyHashSet left parenthesis right parenthesis. Creates an empty set with default capacity 4 and default load factor threshold 0.75f.</a:t>
+            </a:r>
+          </a:p>
+          <a:p>
+            <a:pPr marL="0" marR="0" lvl="0" indent="0" algn="l" defTabSz="457200" rtl="0" eaLnBrk="1" fontAlgn="auto" latinLnBrk="0" hangingPunct="1">
+              <a:lnSpc>
+                <a:spcPct val="100000"/>
+              </a:lnSpc>
+              <a:spcBef>
+                <a:spcPts val="0"/>
+              </a:spcBef>
+              <a:spcAft>
+                <a:spcPts val="0"/>
+              </a:spcAft>
+              <a:buClrTx/>
+              <a:buSzTx/>
+              <a:buFontTx/>
+              <a:buNone/>
+              <a:tabLst/>
+              <a:defRPr/>
+            </a:pPr>
+            <a:r>
+              <a:rPr lang="en-US" altLang="en-US" sz="1200" dirty="0"/>
+              <a:t>+MyHashMap left parenthesis capacity colon int right parenthesis. Creates a set with a specified capacity and default load factor threshold 0.75f.</a:t>
+            </a:r>
+          </a:p>
+          <a:p>
+            <a:pPr marL="0" marR="0" lvl="0" indent="0" algn="l" defTabSz="457200" rtl="0" eaLnBrk="1" fontAlgn="auto" latinLnBrk="0" hangingPunct="1">
+              <a:lnSpc>
+                <a:spcPct val="100000"/>
+              </a:lnSpc>
+              <a:spcBef>
+                <a:spcPts val="0"/>
+              </a:spcBef>
+              <a:spcAft>
+                <a:spcPts val="0"/>
+              </a:spcAft>
+              <a:buClrTx/>
+              <a:buSzTx/>
+              <a:buFontTx/>
+              <a:buNone/>
+              <a:tabLst/>
+              <a:defRPr/>
+            </a:pPr>
+            <a:r>
+              <a:rPr lang="en-US" altLang="en-US" sz="1200" dirty="0"/>
+              <a:t>+MyHashMap left parenthesis </a:t>
+            </a:r>
+            <a:r>
+              <a:rPr lang="en-US" altLang="en-US" sz="1200" dirty="0" err="1"/>
+              <a:t>capacitycolon</a:t>
+            </a:r>
+            <a:r>
+              <a:rPr lang="en-US" altLang="en-US" sz="1200" dirty="0"/>
+              <a:t> int, </a:t>
+            </a:r>
+            <a:r>
+              <a:rPr lang="en-US" altLang="en-US" sz="1200" dirty="0" err="1"/>
+              <a:t>loadFactorThreshold</a:t>
+            </a:r>
+            <a:r>
+              <a:rPr lang="en-US" altLang="en-US" sz="1200" dirty="0"/>
+              <a:t> colon float right parenthesis. Creates a set with a specified capacity and load factor threshold.</a:t>
+            </a:r>
+          </a:p>
+          <a:p>
+            <a:pPr marL="0" marR="0" lvl="0" indent="0" algn="l" defTabSz="457200" rtl="0" eaLnBrk="1" fontAlgn="auto" latinLnBrk="0" hangingPunct="1">
+              <a:lnSpc>
+                <a:spcPct val="100000"/>
+              </a:lnSpc>
+              <a:spcBef>
+                <a:spcPts val="0"/>
+              </a:spcBef>
+              <a:spcAft>
+                <a:spcPts val="0"/>
+              </a:spcAft>
+              <a:buClrTx/>
+              <a:buSzTx/>
+              <a:buFontTx/>
+              <a:buNone/>
+              <a:tabLst/>
+              <a:defRPr/>
+            </a:pPr>
+            <a:endParaRPr lang="en-US" altLang="en-US" sz="1200" dirty="0"/>
+          </a:p>
+          <a:p>
+            <a:pPr marL="0" marR="0" lvl="0" indent="0" algn="l" defTabSz="457200" rtl="0" eaLnBrk="1" fontAlgn="auto" latinLnBrk="0" hangingPunct="1">
+              <a:lnSpc>
+                <a:spcPct val="100000"/>
+              </a:lnSpc>
+              <a:spcBef>
+                <a:spcPts val="0"/>
+              </a:spcBef>
+              <a:spcAft>
+                <a:spcPts val="0"/>
+              </a:spcAft>
+              <a:buClrTx/>
+              <a:buSzTx/>
+              <a:buFontTx/>
+              <a:buNone/>
+              <a:tabLst/>
+              <a:defRPr/>
+            </a:pPr>
+            <a:r>
+              <a:rPr lang="en-US" altLang="en-US" sz="1200" dirty="0"/>
+              <a:t>MySet</a:t>
+            </a:r>
+            <a:r>
+              <a:rPr lang="en-IN" altLang="en-US" sz="1200" dirty="0"/>
+              <a:t>: </a:t>
+            </a:r>
+            <a:r>
+              <a:rPr lang="en-IN" dirty="0">
+                <a:hlinkClick r:id="rId3"/>
               </a:rPr>
-              <a:t>That is no two elements e1 and e2 can be in the set such that e1.equals(e2) is true.</a:t>
-            </a:r>
-          </a:p>
-          <a:p>
-            <a:endParaRPr lang="en-US" dirty="0"/>
+              <a:t>https://liveexample.pearsoncmg.com/html/MySet.html</a:t>
+            </a:r>
+            <a:endParaRPr lang="en-IN" dirty="0"/>
+          </a:p>
+          <a:p>
+            <a:pPr marL="0" marR="0" lvl="0" indent="0" algn="l" defTabSz="457200" rtl="0" eaLnBrk="1" fontAlgn="auto" latinLnBrk="0" hangingPunct="1">
+              <a:lnSpc>
+                <a:spcPct val="100000"/>
+              </a:lnSpc>
+              <a:spcBef>
+                <a:spcPts val="0"/>
+              </a:spcBef>
+              <a:spcAft>
+                <a:spcPts val="0"/>
+              </a:spcAft>
+              <a:buClrTx/>
+              <a:buSzTx/>
+              <a:buFontTx/>
+              <a:buNone/>
+              <a:tabLst/>
+              <a:defRPr/>
+            </a:pPr>
+            <a:r>
+              <a:rPr lang="en-US" altLang="en-US" sz="1200" dirty="0"/>
+              <a:t>MyHashSet: </a:t>
+            </a:r>
+            <a:r>
+              <a:rPr lang="en-IN" dirty="0">
+                <a:hlinkClick r:id="rId4"/>
+              </a:rPr>
+              <a:t>https://liveexample.pearsoncmg.com/html/MyHashSet.html</a:t>
+            </a:r>
+            <a:endParaRPr lang="en-IN" dirty="0"/>
+          </a:p>
+          <a:p>
+            <a:pPr marL="0" marR="0" lvl="0" indent="0" algn="l" defTabSz="457200" rtl="0" eaLnBrk="1" fontAlgn="auto" latinLnBrk="0" hangingPunct="1">
+              <a:lnSpc>
+                <a:spcPct val="100000"/>
+              </a:lnSpc>
+              <a:spcBef>
+                <a:spcPts val="0"/>
+              </a:spcBef>
+              <a:spcAft>
+                <a:spcPts val="0"/>
+              </a:spcAft>
+              <a:buClrTx/>
+              <a:buSzTx/>
+              <a:buFontTx/>
+              <a:buNone/>
+              <a:tabLst/>
+              <a:defRPr/>
+            </a:pPr>
+            <a:r>
+              <a:rPr lang="en-US" altLang="en-US" sz="1200" dirty="0"/>
+              <a:t>TestMyHashSet: </a:t>
+            </a:r>
+            <a:r>
+              <a:rPr lang="en-IN" dirty="0">
+                <a:hlinkClick r:id="rId5"/>
+              </a:rPr>
+              <a:t>https://liveexample.pearsoncmg.com/html/TestMyHashSet.html</a:t>
+            </a:r>
+            <a:endParaRPr lang="en-US" altLang="en-US" sz="1200" dirty="0"/>
+          </a:p>
+          <a:p>
+            <a:pPr marL="0" marR="0" lvl="0" indent="0" algn="l" defTabSz="457200" rtl="0" eaLnBrk="1" fontAlgn="auto" latinLnBrk="0" hangingPunct="1">
+              <a:lnSpc>
+                <a:spcPct val="100000"/>
+              </a:lnSpc>
+              <a:spcBef>
+                <a:spcPts val="0"/>
+              </a:spcBef>
+              <a:spcAft>
+                <a:spcPts val="0"/>
+              </a:spcAft>
+              <a:buClrTx/>
+              <a:buSzTx/>
+              <a:buFontTx/>
+              <a:buNone/>
+              <a:tabLst/>
+              <a:defRPr/>
+            </a:pPr>
+            <a:endParaRPr lang="en-US" altLang="en-US" sz="1200" dirty="0"/>
           </a:p>
         </p:txBody>
       </p:sp>
@@ -4414,7 +5892,7 @@
             <a:spLocks noGrp="1"/>
           </p:cNvSpPr>
           <p:nvPr>
-            <p:ph type="sldNum" sz="quarter" idx="5"/>
+            <p:ph type="sldNum" idx="12"/>
           </p:nvPr>
         </p:nvSpPr>
         <p:spPr/>
@@ -4422,24 +5900,41 @@
           <a:bodyPr/>
           <a:lstStyle/>
           <a:p>
-            <a:pPr>
-              <a:defRPr/>
+            <a:pPr marL="0" marR="0" lvl="0" indent="0" algn="r" rtl="0">
+              <a:spcBef>
+                <a:spcPts val="0"/>
+              </a:spcBef>
+              <a:buSzPct val="25000"/>
+              <a:buNone/>
             </a:pPr>
-            <a:fld id="{B8378557-9440-479E-8829-B26054EBEED3}" type="slidenum">
-              <a:rPr lang="en-US" altLang="en-US" smtClean="0"/>
-              <a:pPr>
-                <a:defRPr/>
-              </a:pPr>
+            <a:fld id="{00000000-1234-1234-1234-123412341234}" type="slidenum">
+              <a:rPr lang="en-US" sz="1200" b="0" i="0" u="none" strike="noStrike" cap="none" smtClean="0">
+                <a:solidFill>
+                  <a:schemeClr val="dk1"/>
+                </a:solidFill>
+                <a:latin typeface="Arial"/>
+                <a:ea typeface="Arial"/>
+                <a:cs typeface="Arial"/>
+                <a:sym typeface="Arial"/>
+              </a:rPr>
               <a:t>8</a:t>
             </a:fld>
-            <a:endParaRPr lang="en-US" altLang="en-US"/>
+            <a:endParaRPr lang="en-US" sz="1200" b="0" i="0" u="none" strike="noStrike" cap="none" dirty="0">
+              <a:solidFill>
+                <a:schemeClr val="dk1"/>
+              </a:solidFill>
+              <a:latin typeface="Arial"/>
+              <a:ea typeface="Arial"/>
+              <a:cs typeface="Arial"/>
+              <a:sym typeface="Arial"/>
+            </a:endParaRPr>
           </a:p>
         </p:txBody>
       </p:sp>
     </p:spTree>
     <p:extLst>
       <p:ext uri="{BB962C8B-B14F-4D97-AF65-F5344CB8AC3E}">
-        <p14:creationId xmlns:p14="http://schemas.microsoft.com/office/powerpoint/2010/main" val="431551294"/>
+        <p14:creationId xmlns:p14="http://schemas.microsoft.com/office/powerpoint/2010/main" val="3680684315"/>
       </p:ext>
     </p:extLst>
   </p:cSld>
@@ -4476,7 +5971,12 @@
             <p:ph type="sldImg"/>
           </p:nvPr>
         </p:nvSpPr>
-        <p:spPr/>
+        <p:spPr>
+          <a:xfrm>
+            <a:off x="1266825" y="727075"/>
+            <a:ext cx="4781550" cy="3586163"/>
+          </a:xfrm>
+        </p:spPr>
       </p:sp>
       <p:sp>
         <p:nvSpPr>
@@ -4493,7 +5993,51 @@
           <a:bodyPr/>
           <a:lstStyle/>
           <a:p>
-            <a:endParaRPr lang="en-US"/>
+            <a:pPr defTabSz="948257">
+              <a:defRPr/>
+            </a:pPr>
+            <a:r>
+              <a:rPr lang="en-US" altLang="en-US" dirty="0">
+                <a:cs typeface="Times New Roman" panose="02020603050405020304" pitchFamily="18" charset="0"/>
+              </a:rPr>
+              <a:t>The Set interface extends the Collection interface. </a:t>
+            </a:r>
+          </a:p>
+          <a:p>
+            <a:pPr defTabSz="948257">
+              <a:defRPr/>
+            </a:pPr>
+            <a:r>
+              <a:rPr lang="en-US" altLang="en-US" dirty="0">
+                <a:cs typeface="Times New Roman" panose="02020603050405020304" pitchFamily="18" charset="0"/>
+              </a:rPr>
+              <a:t>It does not introduce new methods or constants, but it stipulates that an instance of Set contains no duplicate elements. </a:t>
+            </a:r>
+          </a:p>
+          <a:p>
+            <a:pPr defTabSz="948257">
+              <a:defRPr/>
+            </a:pPr>
+            <a:r>
+              <a:rPr lang="en-US" altLang="en-US" dirty="0">
+                <a:cs typeface="Times New Roman" panose="02020603050405020304" pitchFamily="18" charset="0"/>
+              </a:rPr>
+              <a:t>The concrete classes that implement Set must ensure that no duplicate elements can be added to the set. </a:t>
+            </a:r>
+          </a:p>
+          <a:p>
+            <a:pPr defTabSz="948257">
+              <a:defRPr/>
+            </a:pPr>
+            <a:r>
+              <a:rPr lang="en-US" altLang="en-US" dirty="0">
+                <a:cs typeface="Times New Roman" panose="02020603050405020304" pitchFamily="18" charset="0"/>
+              </a:rPr>
+              <a:t>That is no two elements e1 and e2 can be in the set such that e1.equals(e2) is true.</a:t>
+            </a:r>
+          </a:p>
+          <a:p>
+            <a:endParaRPr lang="en-US" dirty="0"/>
           </a:p>
         </p:txBody>
       </p:sp>
@@ -4529,7 +6073,7 @@
     </p:spTree>
     <p:extLst>
       <p:ext uri="{BB962C8B-B14F-4D97-AF65-F5344CB8AC3E}">
-        <p14:creationId xmlns:p14="http://schemas.microsoft.com/office/powerpoint/2010/main" val="287066619"/>
+        <p14:creationId xmlns:p14="http://schemas.microsoft.com/office/powerpoint/2010/main" val="431551294"/>
       </p:ext>
     </p:extLst>
   </p:cSld>
@@ -12526,6 +14070,2042 @@
   <p:clrMapOvr>
     <a:masterClrMapping/>
   </p:clrMapOvr>
+</p:sldLayout>
+</file>
+
+<file path=ppt/slideLayouts/slideLayout15.xml><?xml version="1.0" encoding="utf-8"?>
+<p:sldLayout xmlns:a="http://schemas.openxmlformats.org/drawingml/2006/main" xmlns:r="http://schemas.openxmlformats.org/officeDocument/2006/relationships" xmlns:p="http://schemas.openxmlformats.org/presentationml/2006/main" userDrawn="1">
+  <p:cSld name="2_Title and Ten Content">
+    <p:spTree>
+      <p:nvGrpSpPr>
+        <p:cNvPr id="1" name="Shape 30"/>
+        <p:cNvGrpSpPr/>
+        <p:nvPr/>
+      </p:nvGrpSpPr>
+      <p:grpSpPr>
+        <a:xfrm>
+          <a:off x="0" y="0"/>
+          <a:ext cx="0" cy="0"/>
+          <a:chOff x="0" y="0"/>
+          <a:chExt cx="0" cy="0"/>
+        </a:xfrm>
+      </p:grpSpPr>
+      <p:sp>
+        <p:nvSpPr>
+          <p:cNvPr id="31" name="Title Placeholder"/>
+          <p:cNvSpPr txBox="1">
+            <a:spLocks noGrp="1"/>
+          </p:cNvSpPr>
+          <p:nvPr>
+            <p:ph type="title"/>
+          </p:nvPr>
+        </p:nvSpPr>
+        <p:spPr>
+          <a:xfrm>
+            <a:off x="457200" y="215371"/>
+            <a:ext cx="8229600" cy="1097279"/>
+          </a:xfrm>
+          <a:prstGeom prst="rect">
+            <a:avLst/>
+          </a:prstGeom>
+          <a:noFill/>
+          <a:ln>
+            <a:noFill/>
+          </a:ln>
+        </p:spPr>
+        <p:txBody>
+          <a:bodyPr lIns="91425" tIns="91425" rIns="91425" bIns="91425" anchor="b" anchorCtr="0"/>
+          <a:lstStyle>
+            <a:lvl1pPr marL="0" marR="0" lvl="0" indent="0" algn="l" rtl="0">
+              <a:lnSpc>
+                <a:spcPct val="100000"/>
+              </a:lnSpc>
+              <a:spcBef>
+                <a:spcPts val="0"/>
+              </a:spcBef>
+              <a:buClr>
+                <a:srgbClr val="007FA3"/>
+              </a:buClr>
+              <a:buFont typeface="Times New Roman"/>
+              <a:buNone/>
+              <a:defRPr sz="3600" b="1" i="0" u="none" strike="noStrike" cap="none">
+                <a:solidFill>
+                  <a:srgbClr val="007FA3"/>
+                </a:solidFill>
+                <a:latin typeface="+mj-lt"/>
+                <a:ea typeface="Times New Roman"/>
+                <a:cs typeface="Times New Roman"/>
+                <a:sym typeface="Times New Roman"/>
+              </a:defRPr>
+            </a:lvl1pPr>
+            <a:lvl2pPr lvl="1" indent="0">
+              <a:spcBef>
+                <a:spcPts val="0"/>
+              </a:spcBef>
+              <a:buNone/>
+              <a:defRPr sz="1800"/>
+            </a:lvl2pPr>
+            <a:lvl3pPr lvl="2" indent="0">
+              <a:spcBef>
+                <a:spcPts val="0"/>
+              </a:spcBef>
+              <a:buNone/>
+              <a:defRPr sz="1800"/>
+            </a:lvl3pPr>
+            <a:lvl4pPr lvl="3" indent="0">
+              <a:spcBef>
+                <a:spcPts val="0"/>
+              </a:spcBef>
+              <a:buNone/>
+              <a:defRPr sz="1800"/>
+            </a:lvl4pPr>
+            <a:lvl5pPr lvl="4" indent="0">
+              <a:spcBef>
+                <a:spcPts val="0"/>
+              </a:spcBef>
+              <a:buNone/>
+              <a:defRPr sz="1800"/>
+            </a:lvl5pPr>
+            <a:lvl6pPr lvl="5" indent="0">
+              <a:spcBef>
+                <a:spcPts val="0"/>
+              </a:spcBef>
+              <a:buNone/>
+              <a:defRPr sz="1800"/>
+            </a:lvl6pPr>
+            <a:lvl7pPr lvl="6" indent="0">
+              <a:spcBef>
+                <a:spcPts val="0"/>
+              </a:spcBef>
+              <a:buNone/>
+              <a:defRPr sz="1800"/>
+            </a:lvl7pPr>
+            <a:lvl8pPr lvl="7" indent="0">
+              <a:spcBef>
+                <a:spcPts val="0"/>
+              </a:spcBef>
+              <a:buNone/>
+              <a:defRPr sz="1800"/>
+            </a:lvl8pPr>
+            <a:lvl9pPr lvl="8" indent="0">
+              <a:spcBef>
+                <a:spcPts val="0"/>
+              </a:spcBef>
+              <a:buNone/>
+              <a:defRPr sz="1800"/>
+            </a:lvl9pPr>
+          </a:lstStyle>
+          <a:p>
+            <a:endParaRPr dirty="0"/>
+          </a:p>
+        </p:txBody>
+      </p:sp>
+      <p:sp>
+        <p:nvSpPr>
+          <p:cNvPr id="8" name="Content Placeholder 7">
+            <a:extLst>
+              <a:ext uri="{FF2B5EF4-FFF2-40B4-BE49-F238E27FC236}">
+                <a16:creationId xmlns:a16="http://schemas.microsoft.com/office/drawing/2014/main" id="{82CB7AFE-9851-46A0-B2FB-0A5EE6AEFCA6}"/>
+              </a:ext>
+            </a:extLst>
+          </p:cNvPr>
+          <p:cNvSpPr>
+            <a:spLocks noGrp="1"/>
+          </p:cNvSpPr>
+          <p:nvPr>
+            <p:ph sz="quarter" idx="13"/>
+          </p:nvPr>
+        </p:nvSpPr>
+        <p:spPr>
+          <a:xfrm>
+            <a:off x="457200" y="1552575"/>
+            <a:ext cx="8229600" cy="198039"/>
+          </a:xfrm>
+        </p:spPr>
+        <p:txBody>
+          <a:bodyPr/>
+          <a:lstStyle>
+            <a:lvl1pPr marR="0" indent="-255600" algn="l" rtl="0">
+              <a:lnSpc>
+                <a:spcPct val="100000"/>
+              </a:lnSpc>
+              <a:spcAft>
+                <a:spcPts val="0"/>
+              </a:spcAft>
+              <a:buClr>
+                <a:srgbClr val="007FA3"/>
+              </a:buClr>
+              <a:buSzPct val="100000"/>
+              <a:defRPr lang="en-US" sz="2400" b="0" i="0" u="none" strike="noStrike" cap="none" dirty="0" smtClean="0">
+                <a:solidFill>
+                  <a:schemeClr val="dk1"/>
+                </a:solidFill>
+                <a:latin typeface="+mn-lt"/>
+                <a:ea typeface="Arial"/>
+                <a:cs typeface="Arial"/>
+                <a:sym typeface="Arial"/>
+              </a:defRPr>
+            </a:lvl1pPr>
+            <a:lvl2pPr marR="0" indent="-230400" algn="l" rtl="0">
+              <a:lnSpc>
+                <a:spcPct val="100000"/>
+              </a:lnSpc>
+              <a:spcAft>
+                <a:spcPts val="0"/>
+              </a:spcAft>
+              <a:buClr>
+                <a:srgbClr val="007FA3"/>
+              </a:buClr>
+              <a:buSzPct val="100000"/>
+              <a:defRPr lang="en-US" sz="2400" b="0" i="0" u="none" strike="noStrike" cap="none" dirty="0" smtClean="0">
+                <a:solidFill>
+                  <a:schemeClr val="dk1"/>
+                </a:solidFill>
+                <a:latin typeface="+mn-lt"/>
+                <a:ea typeface="Arial"/>
+                <a:cs typeface="Arial"/>
+                <a:sym typeface="Arial"/>
+              </a:defRPr>
+            </a:lvl2pPr>
+            <a:lvl3pPr marR="0" indent="-230400" algn="l" rtl="0">
+              <a:lnSpc>
+                <a:spcPct val="100000"/>
+              </a:lnSpc>
+              <a:spcAft>
+                <a:spcPts val="0"/>
+              </a:spcAft>
+              <a:buClr>
+                <a:srgbClr val="007FA3"/>
+              </a:buClr>
+              <a:buSzPct val="100000"/>
+              <a:defRPr lang="en-US" sz="2400" b="0" i="0" u="none" strike="noStrike" cap="none" dirty="0" smtClean="0">
+                <a:solidFill>
+                  <a:schemeClr val="dk1"/>
+                </a:solidFill>
+                <a:latin typeface="+mn-lt"/>
+                <a:ea typeface="Arial"/>
+                <a:cs typeface="Arial"/>
+                <a:sym typeface="Arial"/>
+              </a:defRPr>
+            </a:lvl3pPr>
+            <a:lvl4pPr marR="0" indent="-230400" algn="l" rtl="0">
+              <a:lnSpc>
+                <a:spcPct val="100000"/>
+              </a:lnSpc>
+              <a:spcAft>
+                <a:spcPts val="0"/>
+              </a:spcAft>
+              <a:buClr>
+                <a:srgbClr val="007FA3"/>
+              </a:buClr>
+              <a:buSzPct val="100000"/>
+              <a:defRPr lang="en-US" sz="2400" b="0" i="0" u="none" strike="noStrike" cap="none" dirty="0" smtClean="0">
+                <a:solidFill>
+                  <a:schemeClr val="dk1"/>
+                </a:solidFill>
+                <a:latin typeface="+mn-lt"/>
+                <a:ea typeface="Arial"/>
+                <a:cs typeface="Arial"/>
+                <a:sym typeface="Arial"/>
+              </a:defRPr>
+            </a:lvl4pPr>
+            <a:lvl5pPr marR="0" algn="l" rtl="0">
+              <a:lnSpc>
+                <a:spcPct val="100000"/>
+              </a:lnSpc>
+              <a:spcAft>
+                <a:spcPts val="0"/>
+              </a:spcAft>
+              <a:buClr>
+                <a:srgbClr val="007FA3"/>
+              </a:buClr>
+              <a:buSzPct val="100000"/>
+              <a:defRPr lang="en-US" sz="2400" b="0" i="0" u="none" strike="noStrike" cap="none" dirty="0">
+                <a:solidFill>
+                  <a:schemeClr val="dk1"/>
+                </a:solidFill>
+                <a:latin typeface="+mn-lt"/>
+                <a:ea typeface="Arial"/>
+                <a:cs typeface="Arial"/>
+                <a:sym typeface="Arial"/>
+              </a:defRPr>
+            </a:lvl5pPr>
+          </a:lstStyle>
+          <a:p>
+            <a:pPr lvl="0"/>
+            <a:r>
+              <a:rPr lang="en-US" dirty="0"/>
+              <a:t>Edit Master text styles</a:t>
+            </a:r>
+          </a:p>
+          <a:p>
+            <a:pPr lvl="1"/>
+            <a:r>
+              <a:rPr lang="en-US" dirty="0"/>
+              <a:t>Second level</a:t>
+            </a:r>
+          </a:p>
+          <a:p>
+            <a:pPr lvl="2"/>
+            <a:r>
+              <a:rPr lang="en-US" dirty="0"/>
+              <a:t>Third level</a:t>
+            </a:r>
+          </a:p>
+          <a:p>
+            <a:pPr lvl="3"/>
+            <a:r>
+              <a:rPr lang="en-US" dirty="0"/>
+              <a:t>Fourth level</a:t>
+            </a:r>
+          </a:p>
+          <a:p>
+            <a:pPr lvl="4"/>
+            <a:r>
+              <a:rPr lang="en-US" dirty="0"/>
+              <a:t>Fifth level</a:t>
+            </a:r>
+          </a:p>
+        </p:txBody>
+      </p:sp>
+      <p:sp>
+        <p:nvSpPr>
+          <p:cNvPr id="16" name="Content Placeholder 7">
+            <a:extLst>
+              <a:ext uri="{FF2B5EF4-FFF2-40B4-BE49-F238E27FC236}">
+                <a16:creationId xmlns:a16="http://schemas.microsoft.com/office/drawing/2014/main" id="{75D3A394-A5AF-478E-AC3D-2714CFF806D2}"/>
+              </a:ext>
+            </a:extLst>
+          </p:cNvPr>
+          <p:cNvSpPr>
+            <a:spLocks noGrp="1"/>
+          </p:cNvSpPr>
+          <p:nvPr>
+            <p:ph sz="quarter" idx="14"/>
+          </p:nvPr>
+        </p:nvSpPr>
+        <p:spPr>
+          <a:xfrm>
+            <a:off x="457200" y="1841636"/>
+            <a:ext cx="8229600" cy="232963"/>
+          </a:xfrm>
+        </p:spPr>
+        <p:txBody>
+          <a:bodyPr/>
+          <a:lstStyle>
+            <a:lvl1pPr marR="0" indent="-255600" algn="l" rtl="0">
+              <a:lnSpc>
+                <a:spcPct val="100000"/>
+              </a:lnSpc>
+              <a:spcAft>
+                <a:spcPts val="0"/>
+              </a:spcAft>
+              <a:buClr>
+                <a:srgbClr val="007FA3"/>
+              </a:buClr>
+              <a:buSzPct val="100000"/>
+              <a:defRPr lang="en-US" sz="2400" b="0" i="0" u="none" strike="noStrike" cap="none" dirty="0" smtClean="0">
+                <a:solidFill>
+                  <a:schemeClr val="dk1"/>
+                </a:solidFill>
+                <a:latin typeface="+mn-lt"/>
+                <a:ea typeface="Arial"/>
+                <a:cs typeface="Arial"/>
+                <a:sym typeface="Arial"/>
+              </a:defRPr>
+            </a:lvl1pPr>
+            <a:lvl2pPr marR="0" indent="-230400" algn="l" rtl="0">
+              <a:lnSpc>
+                <a:spcPct val="100000"/>
+              </a:lnSpc>
+              <a:spcAft>
+                <a:spcPts val="0"/>
+              </a:spcAft>
+              <a:buClr>
+                <a:srgbClr val="007FA3"/>
+              </a:buClr>
+              <a:buSzPct val="100000"/>
+              <a:defRPr lang="en-US" sz="2400" b="0" i="0" u="none" strike="noStrike" cap="none" dirty="0" smtClean="0">
+                <a:solidFill>
+                  <a:schemeClr val="dk1"/>
+                </a:solidFill>
+                <a:latin typeface="+mn-lt"/>
+                <a:ea typeface="Arial"/>
+                <a:cs typeface="Arial"/>
+                <a:sym typeface="Arial"/>
+              </a:defRPr>
+            </a:lvl2pPr>
+            <a:lvl3pPr marR="0" indent="-230400" algn="l" rtl="0">
+              <a:lnSpc>
+                <a:spcPct val="100000"/>
+              </a:lnSpc>
+              <a:spcAft>
+                <a:spcPts val="0"/>
+              </a:spcAft>
+              <a:buClr>
+                <a:srgbClr val="007FA3"/>
+              </a:buClr>
+              <a:buSzPct val="100000"/>
+              <a:defRPr lang="en-US" sz="2400" b="0" i="0" u="none" strike="noStrike" cap="none" dirty="0" smtClean="0">
+                <a:solidFill>
+                  <a:schemeClr val="dk1"/>
+                </a:solidFill>
+                <a:latin typeface="+mn-lt"/>
+                <a:ea typeface="Arial"/>
+                <a:cs typeface="Arial"/>
+                <a:sym typeface="Arial"/>
+              </a:defRPr>
+            </a:lvl3pPr>
+            <a:lvl4pPr marR="0" indent="-230400" algn="l" rtl="0">
+              <a:lnSpc>
+                <a:spcPct val="100000"/>
+              </a:lnSpc>
+              <a:spcAft>
+                <a:spcPts val="0"/>
+              </a:spcAft>
+              <a:buClr>
+                <a:srgbClr val="007FA3"/>
+              </a:buClr>
+              <a:buSzPct val="100000"/>
+              <a:defRPr lang="en-US" sz="2400" b="0" i="0" u="none" strike="noStrike" cap="none" dirty="0" smtClean="0">
+                <a:solidFill>
+                  <a:schemeClr val="dk1"/>
+                </a:solidFill>
+                <a:latin typeface="+mn-lt"/>
+                <a:ea typeface="Arial"/>
+                <a:cs typeface="Arial"/>
+                <a:sym typeface="Arial"/>
+              </a:defRPr>
+            </a:lvl4pPr>
+            <a:lvl5pPr marR="0" algn="l" rtl="0">
+              <a:lnSpc>
+                <a:spcPct val="100000"/>
+              </a:lnSpc>
+              <a:spcAft>
+                <a:spcPts val="0"/>
+              </a:spcAft>
+              <a:buClr>
+                <a:srgbClr val="007FA3"/>
+              </a:buClr>
+              <a:buSzPct val="100000"/>
+              <a:defRPr lang="en-US" sz="2400" b="0" i="0" u="none" strike="noStrike" cap="none" dirty="0">
+                <a:solidFill>
+                  <a:schemeClr val="dk1"/>
+                </a:solidFill>
+                <a:latin typeface="+mn-lt"/>
+                <a:ea typeface="Arial"/>
+                <a:cs typeface="Arial"/>
+                <a:sym typeface="Arial"/>
+              </a:defRPr>
+            </a:lvl5pPr>
+          </a:lstStyle>
+          <a:p>
+            <a:pPr lvl="0"/>
+            <a:r>
+              <a:rPr lang="en-US" dirty="0"/>
+              <a:t>Edit Master text styles</a:t>
+            </a:r>
+          </a:p>
+          <a:p>
+            <a:pPr lvl="1"/>
+            <a:r>
+              <a:rPr lang="en-US" dirty="0"/>
+              <a:t>Second level</a:t>
+            </a:r>
+          </a:p>
+          <a:p>
+            <a:pPr lvl="2"/>
+            <a:r>
+              <a:rPr lang="en-US" dirty="0"/>
+              <a:t>Third level</a:t>
+            </a:r>
+          </a:p>
+          <a:p>
+            <a:pPr lvl="3"/>
+            <a:r>
+              <a:rPr lang="en-US" dirty="0"/>
+              <a:t>Fourth level</a:t>
+            </a:r>
+          </a:p>
+          <a:p>
+            <a:pPr lvl="4"/>
+            <a:r>
+              <a:rPr lang="en-US" dirty="0"/>
+              <a:t>Fifth level</a:t>
+            </a:r>
+          </a:p>
+        </p:txBody>
+      </p:sp>
+      <p:sp>
+        <p:nvSpPr>
+          <p:cNvPr id="17" name="Content Placeholder 7">
+            <a:extLst>
+              <a:ext uri="{FF2B5EF4-FFF2-40B4-BE49-F238E27FC236}">
+                <a16:creationId xmlns:a16="http://schemas.microsoft.com/office/drawing/2014/main" id="{5D721EFE-2C28-4C54-8BB9-3FCF3DECD16D}"/>
+              </a:ext>
+            </a:extLst>
+          </p:cNvPr>
+          <p:cNvSpPr>
+            <a:spLocks noGrp="1"/>
+          </p:cNvSpPr>
+          <p:nvPr>
+            <p:ph sz="quarter" idx="15"/>
+          </p:nvPr>
+        </p:nvSpPr>
+        <p:spPr>
+          <a:xfrm>
+            <a:off x="457200" y="2191482"/>
+            <a:ext cx="8229600" cy="221648"/>
+          </a:xfrm>
+        </p:spPr>
+        <p:txBody>
+          <a:bodyPr/>
+          <a:lstStyle>
+            <a:lvl1pPr marR="0" indent="-255600" algn="l" rtl="0">
+              <a:lnSpc>
+                <a:spcPct val="100000"/>
+              </a:lnSpc>
+              <a:spcAft>
+                <a:spcPts val="0"/>
+              </a:spcAft>
+              <a:buClr>
+                <a:srgbClr val="007FA3"/>
+              </a:buClr>
+              <a:buSzPct val="100000"/>
+              <a:defRPr lang="en-US" sz="2400" b="0" i="0" u="none" strike="noStrike" cap="none" dirty="0" smtClean="0">
+                <a:solidFill>
+                  <a:schemeClr val="dk1"/>
+                </a:solidFill>
+                <a:latin typeface="+mn-lt"/>
+                <a:ea typeface="Arial"/>
+                <a:cs typeface="Arial"/>
+                <a:sym typeface="Arial"/>
+              </a:defRPr>
+            </a:lvl1pPr>
+            <a:lvl2pPr marR="0" indent="-230400" algn="l" rtl="0">
+              <a:lnSpc>
+                <a:spcPct val="100000"/>
+              </a:lnSpc>
+              <a:spcAft>
+                <a:spcPts val="0"/>
+              </a:spcAft>
+              <a:buClr>
+                <a:srgbClr val="007FA3"/>
+              </a:buClr>
+              <a:buSzPct val="100000"/>
+              <a:defRPr lang="en-US" sz="2400" b="0" i="0" u="none" strike="noStrike" cap="none" dirty="0" smtClean="0">
+                <a:solidFill>
+                  <a:schemeClr val="dk1"/>
+                </a:solidFill>
+                <a:latin typeface="+mn-lt"/>
+                <a:ea typeface="Arial"/>
+                <a:cs typeface="Arial"/>
+                <a:sym typeface="Arial"/>
+              </a:defRPr>
+            </a:lvl2pPr>
+            <a:lvl3pPr marR="0" indent="-230400" algn="l" rtl="0">
+              <a:lnSpc>
+                <a:spcPct val="100000"/>
+              </a:lnSpc>
+              <a:spcAft>
+                <a:spcPts val="0"/>
+              </a:spcAft>
+              <a:buClr>
+                <a:srgbClr val="007FA3"/>
+              </a:buClr>
+              <a:buSzPct val="100000"/>
+              <a:defRPr lang="en-US" sz="2400" b="0" i="0" u="none" strike="noStrike" cap="none" dirty="0" smtClean="0">
+                <a:solidFill>
+                  <a:schemeClr val="dk1"/>
+                </a:solidFill>
+                <a:latin typeface="+mn-lt"/>
+                <a:ea typeface="Arial"/>
+                <a:cs typeface="Arial"/>
+                <a:sym typeface="Arial"/>
+              </a:defRPr>
+            </a:lvl3pPr>
+            <a:lvl4pPr marR="0" indent="-230400" algn="l" rtl="0">
+              <a:lnSpc>
+                <a:spcPct val="100000"/>
+              </a:lnSpc>
+              <a:spcAft>
+                <a:spcPts val="0"/>
+              </a:spcAft>
+              <a:buClr>
+                <a:srgbClr val="007FA3"/>
+              </a:buClr>
+              <a:buSzPct val="100000"/>
+              <a:defRPr lang="en-US" sz="2400" b="0" i="0" u="none" strike="noStrike" cap="none" dirty="0" smtClean="0">
+                <a:solidFill>
+                  <a:schemeClr val="dk1"/>
+                </a:solidFill>
+                <a:latin typeface="+mn-lt"/>
+                <a:ea typeface="Arial"/>
+                <a:cs typeface="Arial"/>
+                <a:sym typeface="Arial"/>
+              </a:defRPr>
+            </a:lvl4pPr>
+            <a:lvl5pPr marR="0" algn="l" rtl="0">
+              <a:lnSpc>
+                <a:spcPct val="100000"/>
+              </a:lnSpc>
+              <a:spcAft>
+                <a:spcPts val="0"/>
+              </a:spcAft>
+              <a:buClr>
+                <a:srgbClr val="007FA3"/>
+              </a:buClr>
+              <a:buSzPct val="100000"/>
+              <a:defRPr lang="en-US" sz="2400" b="0" i="0" u="none" strike="noStrike" cap="none" dirty="0">
+                <a:solidFill>
+                  <a:schemeClr val="dk1"/>
+                </a:solidFill>
+                <a:latin typeface="+mn-lt"/>
+                <a:ea typeface="Arial"/>
+                <a:cs typeface="Arial"/>
+                <a:sym typeface="Arial"/>
+              </a:defRPr>
+            </a:lvl5pPr>
+          </a:lstStyle>
+          <a:p>
+            <a:pPr lvl="0"/>
+            <a:r>
+              <a:rPr lang="en-US" dirty="0"/>
+              <a:t>Edit Master text styles</a:t>
+            </a:r>
+          </a:p>
+          <a:p>
+            <a:pPr lvl="1"/>
+            <a:r>
+              <a:rPr lang="en-US" dirty="0"/>
+              <a:t>Second level</a:t>
+            </a:r>
+          </a:p>
+          <a:p>
+            <a:pPr lvl="2"/>
+            <a:r>
+              <a:rPr lang="en-US" dirty="0"/>
+              <a:t>Third level</a:t>
+            </a:r>
+          </a:p>
+          <a:p>
+            <a:pPr lvl="3"/>
+            <a:r>
+              <a:rPr lang="en-US" dirty="0"/>
+              <a:t>Fourth level</a:t>
+            </a:r>
+          </a:p>
+          <a:p>
+            <a:pPr lvl="4"/>
+            <a:r>
+              <a:rPr lang="en-US" dirty="0"/>
+              <a:t>Fifth level</a:t>
+            </a:r>
+          </a:p>
+        </p:txBody>
+      </p:sp>
+      <p:sp>
+        <p:nvSpPr>
+          <p:cNvPr id="18" name="Content Placeholder 7">
+            <a:extLst>
+              <a:ext uri="{FF2B5EF4-FFF2-40B4-BE49-F238E27FC236}">
+                <a16:creationId xmlns:a16="http://schemas.microsoft.com/office/drawing/2014/main" id="{99D20A0E-9225-48FB-91AF-C7D8DE4D66F4}"/>
+              </a:ext>
+            </a:extLst>
+          </p:cNvPr>
+          <p:cNvSpPr>
+            <a:spLocks noGrp="1"/>
+          </p:cNvSpPr>
+          <p:nvPr>
+            <p:ph sz="quarter" idx="16"/>
+          </p:nvPr>
+        </p:nvSpPr>
+        <p:spPr>
+          <a:xfrm>
+            <a:off x="457200" y="2515536"/>
+            <a:ext cx="8229600" cy="221648"/>
+          </a:xfrm>
+        </p:spPr>
+        <p:txBody>
+          <a:bodyPr/>
+          <a:lstStyle>
+            <a:lvl1pPr marR="0" indent="-255600" algn="l" rtl="0">
+              <a:lnSpc>
+                <a:spcPct val="100000"/>
+              </a:lnSpc>
+              <a:spcAft>
+                <a:spcPts val="0"/>
+              </a:spcAft>
+              <a:buClr>
+                <a:srgbClr val="007FA3"/>
+              </a:buClr>
+              <a:buSzPct val="100000"/>
+              <a:defRPr lang="en-US" sz="2400" b="0" i="0" u="none" strike="noStrike" cap="none" dirty="0" smtClean="0">
+                <a:solidFill>
+                  <a:schemeClr val="dk1"/>
+                </a:solidFill>
+                <a:latin typeface="+mn-lt"/>
+                <a:ea typeface="Arial"/>
+                <a:cs typeface="Arial"/>
+                <a:sym typeface="Arial"/>
+              </a:defRPr>
+            </a:lvl1pPr>
+            <a:lvl2pPr marR="0" indent="-230400" algn="l" rtl="0">
+              <a:lnSpc>
+                <a:spcPct val="100000"/>
+              </a:lnSpc>
+              <a:spcAft>
+                <a:spcPts val="0"/>
+              </a:spcAft>
+              <a:buClr>
+                <a:srgbClr val="007FA3"/>
+              </a:buClr>
+              <a:buSzPct val="100000"/>
+              <a:defRPr lang="en-US" sz="2400" b="0" i="0" u="none" strike="noStrike" cap="none" dirty="0" smtClean="0">
+                <a:solidFill>
+                  <a:schemeClr val="dk1"/>
+                </a:solidFill>
+                <a:latin typeface="+mn-lt"/>
+                <a:ea typeface="Arial"/>
+                <a:cs typeface="Arial"/>
+                <a:sym typeface="Arial"/>
+              </a:defRPr>
+            </a:lvl2pPr>
+            <a:lvl3pPr marR="0" indent="-230400" algn="l" rtl="0">
+              <a:lnSpc>
+                <a:spcPct val="100000"/>
+              </a:lnSpc>
+              <a:spcAft>
+                <a:spcPts val="0"/>
+              </a:spcAft>
+              <a:buClr>
+                <a:srgbClr val="007FA3"/>
+              </a:buClr>
+              <a:buSzPct val="100000"/>
+              <a:defRPr lang="en-US" sz="2400" b="0" i="0" u="none" strike="noStrike" cap="none" dirty="0" smtClean="0">
+                <a:solidFill>
+                  <a:schemeClr val="dk1"/>
+                </a:solidFill>
+                <a:latin typeface="+mn-lt"/>
+                <a:ea typeface="Arial"/>
+                <a:cs typeface="Arial"/>
+                <a:sym typeface="Arial"/>
+              </a:defRPr>
+            </a:lvl3pPr>
+            <a:lvl4pPr marR="0" indent="-230400" algn="l" rtl="0">
+              <a:lnSpc>
+                <a:spcPct val="100000"/>
+              </a:lnSpc>
+              <a:spcAft>
+                <a:spcPts val="0"/>
+              </a:spcAft>
+              <a:buClr>
+                <a:srgbClr val="007FA3"/>
+              </a:buClr>
+              <a:buSzPct val="100000"/>
+              <a:defRPr lang="en-US" sz="2400" b="0" i="0" u="none" strike="noStrike" cap="none" dirty="0" smtClean="0">
+                <a:solidFill>
+                  <a:schemeClr val="dk1"/>
+                </a:solidFill>
+                <a:latin typeface="+mn-lt"/>
+                <a:ea typeface="Arial"/>
+                <a:cs typeface="Arial"/>
+                <a:sym typeface="Arial"/>
+              </a:defRPr>
+            </a:lvl4pPr>
+            <a:lvl5pPr marR="0" algn="l" rtl="0">
+              <a:lnSpc>
+                <a:spcPct val="100000"/>
+              </a:lnSpc>
+              <a:spcAft>
+                <a:spcPts val="0"/>
+              </a:spcAft>
+              <a:buClr>
+                <a:srgbClr val="007FA3"/>
+              </a:buClr>
+              <a:buSzPct val="100000"/>
+              <a:defRPr lang="en-US" sz="2400" b="0" i="0" u="none" strike="noStrike" cap="none" dirty="0">
+                <a:solidFill>
+                  <a:schemeClr val="dk1"/>
+                </a:solidFill>
+                <a:latin typeface="+mn-lt"/>
+                <a:ea typeface="Arial"/>
+                <a:cs typeface="Arial"/>
+                <a:sym typeface="Arial"/>
+              </a:defRPr>
+            </a:lvl5pPr>
+          </a:lstStyle>
+          <a:p>
+            <a:pPr lvl="0"/>
+            <a:r>
+              <a:rPr lang="en-US" dirty="0"/>
+              <a:t>Edit Master text styles</a:t>
+            </a:r>
+          </a:p>
+          <a:p>
+            <a:pPr lvl="1"/>
+            <a:r>
+              <a:rPr lang="en-US" dirty="0"/>
+              <a:t>Second level</a:t>
+            </a:r>
+          </a:p>
+          <a:p>
+            <a:pPr lvl="2"/>
+            <a:r>
+              <a:rPr lang="en-US" dirty="0"/>
+              <a:t>Third level</a:t>
+            </a:r>
+          </a:p>
+          <a:p>
+            <a:pPr lvl="3"/>
+            <a:r>
+              <a:rPr lang="en-US" dirty="0"/>
+              <a:t>Fourth level</a:t>
+            </a:r>
+          </a:p>
+          <a:p>
+            <a:pPr lvl="4"/>
+            <a:r>
+              <a:rPr lang="en-US" dirty="0"/>
+              <a:t>Fifth level</a:t>
+            </a:r>
+          </a:p>
+        </p:txBody>
+      </p:sp>
+      <p:sp>
+        <p:nvSpPr>
+          <p:cNvPr id="35" name="Shape 35"/>
+          <p:cNvSpPr txBox="1">
+            <a:spLocks noGrp="1"/>
+          </p:cNvSpPr>
+          <p:nvPr>
+            <p:ph type="dt" idx="10"/>
+          </p:nvPr>
+        </p:nvSpPr>
+        <p:spPr>
+          <a:xfrm>
+            <a:off x="6335712" y="113071"/>
+            <a:ext cx="2133599" cy="182879"/>
+          </a:xfrm>
+          <a:prstGeom prst="rect">
+            <a:avLst/>
+          </a:prstGeom>
+          <a:noFill/>
+          <a:ln>
+            <a:noFill/>
+          </a:ln>
+        </p:spPr>
+        <p:txBody>
+          <a:bodyPr lIns="91425" tIns="91425" rIns="91425" bIns="91425" anchor="ctr" anchorCtr="0"/>
+          <a:lstStyle>
+            <a:lvl1pPr marL="0" marR="0" lvl="0" indent="0" algn="r" rtl="0">
+              <a:spcBef>
+                <a:spcPts val="0"/>
+              </a:spcBef>
+              <a:buNone/>
+              <a:defRPr sz="900" b="0" i="0" u="none" strike="noStrike" cap="none">
+                <a:solidFill>
+                  <a:schemeClr val="lt1"/>
+                </a:solidFill>
+                <a:latin typeface="Arial"/>
+                <a:ea typeface="Arial"/>
+                <a:cs typeface="Arial"/>
+                <a:sym typeface="Arial"/>
+              </a:defRPr>
+            </a:lvl1pPr>
+            <a:lvl2pPr marL="457200" marR="0" lvl="1" indent="0" algn="l" rtl="0">
+              <a:spcBef>
+                <a:spcPts val="0"/>
+              </a:spcBef>
+              <a:buNone/>
+              <a:defRPr sz="1800" b="0" i="0" u="none" strike="noStrike" cap="none">
+                <a:solidFill>
+                  <a:schemeClr val="dk1"/>
+                </a:solidFill>
+                <a:latin typeface="Arial"/>
+                <a:ea typeface="Arial"/>
+                <a:cs typeface="Arial"/>
+                <a:sym typeface="Arial"/>
+              </a:defRPr>
+            </a:lvl2pPr>
+            <a:lvl3pPr marL="914400" marR="0" lvl="2" indent="0" algn="l" rtl="0">
+              <a:spcBef>
+                <a:spcPts val="0"/>
+              </a:spcBef>
+              <a:buNone/>
+              <a:defRPr sz="1800" b="0" i="0" u="none" strike="noStrike" cap="none">
+                <a:solidFill>
+                  <a:schemeClr val="dk1"/>
+                </a:solidFill>
+                <a:latin typeface="Arial"/>
+                <a:ea typeface="Arial"/>
+                <a:cs typeface="Arial"/>
+                <a:sym typeface="Arial"/>
+              </a:defRPr>
+            </a:lvl3pPr>
+            <a:lvl4pPr marL="1371600" marR="0" lvl="3" indent="0" algn="l" rtl="0">
+              <a:spcBef>
+                <a:spcPts val="0"/>
+              </a:spcBef>
+              <a:buNone/>
+              <a:defRPr sz="1800" b="0" i="0" u="none" strike="noStrike" cap="none">
+                <a:solidFill>
+                  <a:schemeClr val="dk1"/>
+                </a:solidFill>
+                <a:latin typeface="Arial"/>
+                <a:ea typeface="Arial"/>
+                <a:cs typeface="Arial"/>
+                <a:sym typeface="Arial"/>
+              </a:defRPr>
+            </a:lvl4pPr>
+            <a:lvl5pPr marL="1828800" marR="0" lvl="4" indent="0" algn="l" rtl="0">
+              <a:spcBef>
+                <a:spcPts val="0"/>
+              </a:spcBef>
+              <a:buNone/>
+              <a:defRPr sz="1800" b="0" i="0" u="none" strike="noStrike" cap="none">
+                <a:solidFill>
+                  <a:schemeClr val="dk1"/>
+                </a:solidFill>
+                <a:latin typeface="Arial"/>
+                <a:ea typeface="Arial"/>
+                <a:cs typeface="Arial"/>
+                <a:sym typeface="Arial"/>
+              </a:defRPr>
+            </a:lvl5pPr>
+            <a:lvl6pPr marL="2286000" marR="0" lvl="5" indent="0" algn="l" rtl="0">
+              <a:spcBef>
+                <a:spcPts val="0"/>
+              </a:spcBef>
+              <a:buNone/>
+              <a:defRPr sz="1800" b="0" i="0" u="none" strike="noStrike" cap="none">
+                <a:solidFill>
+                  <a:schemeClr val="dk1"/>
+                </a:solidFill>
+                <a:latin typeface="Arial"/>
+                <a:ea typeface="Arial"/>
+                <a:cs typeface="Arial"/>
+                <a:sym typeface="Arial"/>
+              </a:defRPr>
+            </a:lvl6pPr>
+            <a:lvl7pPr marL="2743200" marR="0" lvl="6" indent="0" algn="l" rtl="0">
+              <a:spcBef>
+                <a:spcPts val="0"/>
+              </a:spcBef>
+              <a:buNone/>
+              <a:defRPr sz="1800" b="0" i="0" u="none" strike="noStrike" cap="none">
+                <a:solidFill>
+                  <a:schemeClr val="dk1"/>
+                </a:solidFill>
+                <a:latin typeface="Arial"/>
+                <a:ea typeface="Arial"/>
+                <a:cs typeface="Arial"/>
+                <a:sym typeface="Arial"/>
+              </a:defRPr>
+            </a:lvl7pPr>
+            <a:lvl8pPr marL="3200400" marR="0" lvl="7" indent="0" algn="l" rtl="0">
+              <a:spcBef>
+                <a:spcPts val="0"/>
+              </a:spcBef>
+              <a:buNone/>
+              <a:defRPr sz="1800" b="0" i="0" u="none" strike="noStrike" cap="none">
+                <a:solidFill>
+                  <a:schemeClr val="dk1"/>
+                </a:solidFill>
+                <a:latin typeface="Arial"/>
+                <a:ea typeface="Arial"/>
+                <a:cs typeface="Arial"/>
+                <a:sym typeface="Arial"/>
+              </a:defRPr>
+            </a:lvl8pPr>
+            <a:lvl9pPr marL="3657600" marR="0" lvl="8" indent="0" algn="l" rtl="0">
+              <a:spcBef>
+                <a:spcPts val="0"/>
+              </a:spcBef>
+              <a:buNone/>
+              <a:defRPr sz="1800" b="0" i="0" u="none" strike="noStrike" cap="none">
+                <a:solidFill>
+                  <a:schemeClr val="dk1"/>
+                </a:solidFill>
+                <a:latin typeface="Arial"/>
+                <a:ea typeface="Arial"/>
+                <a:cs typeface="Arial"/>
+                <a:sym typeface="Arial"/>
+              </a:defRPr>
+            </a:lvl9pPr>
+          </a:lstStyle>
+          <a:p>
+            <a:endParaRPr dirty="0"/>
+          </a:p>
+        </p:txBody>
+      </p:sp>
+      <p:sp>
+        <p:nvSpPr>
+          <p:cNvPr id="36" name="Shape 36"/>
+          <p:cNvSpPr txBox="1">
+            <a:spLocks noGrp="1"/>
+          </p:cNvSpPr>
+          <p:nvPr>
+            <p:ph type="sldNum" idx="12"/>
+          </p:nvPr>
+        </p:nvSpPr>
+        <p:spPr>
+          <a:xfrm>
+            <a:off x="8469311" y="113071"/>
+            <a:ext cx="551783" cy="182879"/>
+          </a:xfrm>
+          <a:prstGeom prst="rect">
+            <a:avLst/>
+          </a:prstGeom>
+          <a:noFill/>
+          <a:ln>
+            <a:noFill/>
+          </a:ln>
+        </p:spPr>
+        <p:txBody>
+          <a:bodyPr lIns="91425" tIns="45700" rIns="91425" bIns="45700" anchor="ctr" anchorCtr="0">
+            <a:noAutofit/>
+          </a:bodyPr>
+          <a:lstStyle/>
+          <a:p>
+            <a:pPr marL="0" marR="0" lvl="0" indent="0" algn="r" rtl="0">
+              <a:spcBef>
+                <a:spcPts val="0"/>
+              </a:spcBef>
+              <a:buSzPct val="25000"/>
+              <a:buNone/>
+            </a:pPr>
+            <a:fld id="{00000000-1234-1234-1234-123412341234}" type="slidenum">
+              <a:rPr lang="en-US" sz="900" b="0" i="0" u="none" strike="noStrike" cap="none">
+                <a:solidFill>
+                  <a:schemeClr val="lt1"/>
+                </a:solidFill>
+                <a:latin typeface="Arial"/>
+                <a:ea typeface="Arial"/>
+                <a:cs typeface="Arial"/>
+                <a:sym typeface="Arial"/>
+              </a:rPr>
+              <a:t>‹#›</a:t>
+            </a:fld>
+            <a:endParaRPr lang="en-US" sz="900" b="0" i="0" u="none" strike="noStrike" cap="none" dirty="0">
+              <a:solidFill>
+                <a:schemeClr val="lt1"/>
+              </a:solidFill>
+              <a:latin typeface="Arial"/>
+              <a:ea typeface="Arial"/>
+              <a:cs typeface="Arial"/>
+              <a:sym typeface="Arial"/>
+            </a:endParaRPr>
+          </a:p>
+        </p:txBody>
+      </p:sp>
+      <p:sp>
+        <p:nvSpPr>
+          <p:cNvPr id="3" name="Content Placeholder 2"/>
+          <p:cNvSpPr>
+            <a:spLocks noGrp="1"/>
+          </p:cNvSpPr>
+          <p:nvPr>
+            <p:ph sz="quarter" idx="17"/>
+          </p:nvPr>
+        </p:nvSpPr>
+        <p:spPr>
+          <a:xfrm>
+            <a:off x="457200" y="2840656"/>
+            <a:ext cx="8229600" cy="200926"/>
+          </a:xfrm>
+        </p:spPr>
+        <p:txBody>
+          <a:bodyPr/>
+          <a:lstStyle>
+            <a:lvl1pPr marR="0" indent="-255600" algn="l" rtl="0">
+              <a:lnSpc>
+                <a:spcPct val="100000"/>
+              </a:lnSpc>
+              <a:spcAft>
+                <a:spcPts val="0"/>
+              </a:spcAft>
+              <a:buClr>
+                <a:srgbClr val="007FA3"/>
+              </a:buClr>
+              <a:buSzPct val="100000"/>
+              <a:defRPr lang="en-US" sz="2400" b="0" i="0" u="none" strike="noStrike" cap="none" dirty="0" smtClean="0">
+                <a:solidFill>
+                  <a:schemeClr val="dk1"/>
+                </a:solidFill>
+                <a:latin typeface="+mn-lt"/>
+                <a:ea typeface="Arial"/>
+                <a:cs typeface="Arial"/>
+                <a:sym typeface="Arial"/>
+              </a:defRPr>
+            </a:lvl1pPr>
+            <a:lvl2pPr marR="0" indent="-284400" algn="l" rtl="0">
+              <a:lnSpc>
+                <a:spcPct val="100000"/>
+              </a:lnSpc>
+              <a:spcAft>
+                <a:spcPts val="0"/>
+              </a:spcAft>
+              <a:buClr>
+                <a:srgbClr val="007FA3"/>
+              </a:buClr>
+              <a:buSzPct val="100000"/>
+              <a:defRPr lang="en-US" sz="2400" b="0" i="0" u="none" strike="noStrike" cap="none" dirty="0" smtClean="0">
+                <a:solidFill>
+                  <a:schemeClr val="dk1"/>
+                </a:solidFill>
+                <a:latin typeface="+mn-lt"/>
+                <a:ea typeface="Arial"/>
+                <a:cs typeface="Arial"/>
+                <a:sym typeface="Arial"/>
+              </a:defRPr>
+            </a:lvl2pPr>
+            <a:lvl3pPr marR="0" indent="-230400" algn="l" rtl="0">
+              <a:lnSpc>
+                <a:spcPct val="100000"/>
+              </a:lnSpc>
+              <a:spcAft>
+                <a:spcPts val="0"/>
+              </a:spcAft>
+              <a:buClr>
+                <a:srgbClr val="007FA3"/>
+              </a:buClr>
+              <a:buSzPct val="100000"/>
+              <a:defRPr lang="en-US" sz="2400" b="0" i="0" u="none" strike="noStrike" cap="none" dirty="0" smtClean="0">
+                <a:solidFill>
+                  <a:schemeClr val="dk1"/>
+                </a:solidFill>
+                <a:latin typeface="+mn-lt"/>
+                <a:ea typeface="Arial"/>
+                <a:cs typeface="Arial"/>
+                <a:sym typeface="Arial"/>
+              </a:defRPr>
+            </a:lvl3pPr>
+            <a:lvl4pPr marR="0" indent="-230400" algn="l" rtl="0">
+              <a:lnSpc>
+                <a:spcPct val="100000"/>
+              </a:lnSpc>
+              <a:spcAft>
+                <a:spcPts val="0"/>
+              </a:spcAft>
+              <a:buClr>
+                <a:srgbClr val="007FA3"/>
+              </a:buClr>
+              <a:buSzPct val="100000"/>
+              <a:defRPr lang="en-US" sz="2400" b="0" i="0" u="none" strike="noStrike" cap="none" dirty="0" smtClean="0">
+                <a:solidFill>
+                  <a:schemeClr val="dk1"/>
+                </a:solidFill>
+                <a:latin typeface="+mn-lt"/>
+                <a:ea typeface="Arial"/>
+                <a:cs typeface="Arial"/>
+                <a:sym typeface="Arial"/>
+              </a:defRPr>
+            </a:lvl4pPr>
+            <a:lvl5pPr marR="0" indent="-230400" algn="l" rtl="0">
+              <a:lnSpc>
+                <a:spcPct val="100000"/>
+              </a:lnSpc>
+              <a:spcAft>
+                <a:spcPts val="0"/>
+              </a:spcAft>
+              <a:buClr>
+                <a:srgbClr val="007FA3"/>
+              </a:buClr>
+              <a:buSzPct val="100000"/>
+              <a:defRPr lang="en-US" sz="2400" b="0" i="0" u="none" strike="noStrike" cap="none" dirty="0">
+                <a:solidFill>
+                  <a:schemeClr val="dk1"/>
+                </a:solidFill>
+                <a:latin typeface="+mn-lt"/>
+                <a:ea typeface="Arial"/>
+                <a:cs typeface="Arial"/>
+                <a:sym typeface="Arial"/>
+              </a:defRPr>
+            </a:lvl5pPr>
+          </a:lstStyle>
+          <a:p>
+            <a:pPr lvl="0"/>
+            <a:r>
+              <a:rPr lang="en-US" dirty="0"/>
+              <a:t>Edit Master text styles</a:t>
+            </a:r>
+          </a:p>
+          <a:p>
+            <a:pPr lvl="1"/>
+            <a:r>
+              <a:rPr lang="en-US" dirty="0"/>
+              <a:t>Second level</a:t>
+            </a:r>
+          </a:p>
+          <a:p>
+            <a:pPr lvl="2"/>
+            <a:r>
+              <a:rPr lang="en-US" dirty="0"/>
+              <a:t>Third level</a:t>
+            </a:r>
+          </a:p>
+          <a:p>
+            <a:pPr lvl="3"/>
+            <a:r>
+              <a:rPr lang="en-US" dirty="0"/>
+              <a:t>Fourth level</a:t>
+            </a:r>
+          </a:p>
+          <a:p>
+            <a:pPr lvl="4"/>
+            <a:r>
+              <a:rPr lang="en-US" dirty="0"/>
+              <a:t>Fifth level</a:t>
+            </a:r>
+          </a:p>
+        </p:txBody>
+      </p:sp>
+      <p:sp>
+        <p:nvSpPr>
+          <p:cNvPr id="5" name="Content Placeholder 4"/>
+          <p:cNvSpPr>
+            <a:spLocks noGrp="1"/>
+          </p:cNvSpPr>
+          <p:nvPr>
+            <p:ph sz="quarter" idx="18"/>
+          </p:nvPr>
+        </p:nvSpPr>
+        <p:spPr>
+          <a:xfrm>
+            <a:off x="457200" y="3169638"/>
+            <a:ext cx="8229600" cy="217000"/>
+          </a:xfrm>
+        </p:spPr>
+        <p:txBody>
+          <a:bodyPr/>
+          <a:lstStyle>
+            <a:lvl1pPr marR="0" indent="-255600" algn="l" rtl="0">
+              <a:lnSpc>
+                <a:spcPct val="100000"/>
+              </a:lnSpc>
+              <a:spcAft>
+                <a:spcPts val="0"/>
+              </a:spcAft>
+              <a:buClr>
+                <a:srgbClr val="007FA3"/>
+              </a:buClr>
+              <a:buSzPct val="100000"/>
+              <a:defRPr lang="en-US" sz="2400" b="0" i="0" u="none" strike="noStrike" cap="none" dirty="0" smtClean="0">
+                <a:solidFill>
+                  <a:schemeClr val="dk1"/>
+                </a:solidFill>
+                <a:latin typeface="+mn-lt"/>
+                <a:ea typeface="Arial"/>
+                <a:cs typeface="Arial"/>
+                <a:sym typeface="Arial"/>
+              </a:defRPr>
+            </a:lvl1pPr>
+            <a:lvl2pPr marR="0" indent="-284400" algn="l" rtl="0">
+              <a:lnSpc>
+                <a:spcPct val="100000"/>
+              </a:lnSpc>
+              <a:spcAft>
+                <a:spcPts val="0"/>
+              </a:spcAft>
+              <a:buClr>
+                <a:srgbClr val="007FA3"/>
+              </a:buClr>
+              <a:buSzPct val="100000"/>
+              <a:defRPr lang="en-US" sz="2400" b="0" i="0" u="none" strike="noStrike" cap="none" dirty="0" smtClean="0">
+                <a:solidFill>
+                  <a:schemeClr val="dk1"/>
+                </a:solidFill>
+                <a:latin typeface="+mn-lt"/>
+                <a:ea typeface="Arial"/>
+                <a:cs typeface="Arial"/>
+                <a:sym typeface="Arial"/>
+              </a:defRPr>
+            </a:lvl2pPr>
+            <a:lvl3pPr marR="0" indent="-230400" algn="l" rtl="0">
+              <a:lnSpc>
+                <a:spcPct val="100000"/>
+              </a:lnSpc>
+              <a:spcAft>
+                <a:spcPts val="0"/>
+              </a:spcAft>
+              <a:buClr>
+                <a:srgbClr val="007FA3"/>
+              </a:buClr>
+              <a:buSzPct val="100000"/>
+              <a:defRPr lang="en-US" sz="2400" b="0" i="0" u="none" strike="noStrike" cap="none" dirty="0" smtClean="0">
+                <a:solidFill>
+                  <a:schemeClr val="dk1"/>
+                </a:solidFill>
+                <a:latin typeface="+mn-lt"/>
+                <a:ea typeface="Arial"/>
+                <a:cs typeface="Arial"/>
+                <a:sym typeface="Arial"/>
+              </a:defRPr>
+            </a:lvl3pPr>
+            <a:lvl4pPr marR="0" indent="-230400" algn="l" rtl="0">
+              <a:lnSpc>
+                <a:spcPct val="100000"/>
+              </a:lnSpc>
+              <a:spcAft>
+                <a:spcPts val="0"/>
+              </a:spcAft>
+              <a:buClr>
+                <a:srgbClr val="007FA3"/>
+              </a:buClr>
+              <a:buSzPct val="100000"/>
+              <a:defRPr lang="en-US" sz="2400" b="0" i="0" u="none" strike="noStrike" cap="none" dirty="0" smtClean="0">
+                <a:solidFill>
+                  <a:schemeClr val="dk1"/>
+                </a:solidFill>
+                <a:latin typeface="+mn-lt"/>
+                <a:ea typeface="Arial"/>
+                <a:cs typeface="Arial"/>
+                <a:sym typeface="Arial"/>
+              </a:defRPr>
+            </a:lvl4pPr>
+            <a:lvl5pPr marR="0" indent="-230400" algn="l" rtl="0">
+              <a:lnSpc>
+                <a:spcPct val="100000"/>
+              </a:lnSpc>
+              <a:spcAft>
+                <a:spcPts val="0"/>
+              </a:spcAft>
+              <a:buClr>
+                <a:srgbClr val="007FA3"/>
+              </a:buClr>
+              <a:buSzPct val="100000"/>
+              <a:defRPr lang="en-IN" sz="2400" b="0" i="0" u="none" strike="noStrike" cap="none" dirty="0" smtClean="0">
+                <a:solidFill>
+                  <a:schemeClr val="dk1"/>
+                </a:solidFill>
+                <a:latin typeface="+mn-lt"/>
+                <a:ea typeface="Arial"/>
+                <a:cs typeface="Arial"/>
+                <a:sym typeface="Arial"/>
+              </a:defRPr>
+            </a:lvl5pPr>
+          </a:lstStyle>
+          <a:p>
+            <a:pPr lvl="0"/>
+            <a:r>
+              <a:rPr lang="en-US" dirty="0"/>
+              <a:t>Edit Master text styles</a:t>
+            </a:r>
+          </a:p>
+          <a:p>
+            <a:pPr lvl="1"/>
+            <a:r>
+              <a:rPr lang="en-US" dirty="0"/>
+              <a:t>Second level</a:t>
+            </a:r>
+          </a:p>
+          <a:p>
+            <a:pPr lvl="2"/>
+            <a:r>
+              <a:rPr lang="en-US" dirty="0"/>
+              <a:t>Third level</a:t>
+            </a:r>
+          </a:p>
+          <a:p>
+            <a:pPr lvl="3"/>
+            <a:r>
+              <a:rPr lang="en-US" dirty="0"/>
+              <a:t>Fourth level</a:t>
+            </a:r>
+          </a:p>
+          <a:p>
+            <a:pPr lvl="4"/>
+            <a:r>
+              <a:rPr lang="en-US" dirty="0"/>
+              <a:t>Fifth level</a:t>
+            </a:r>
+            <a:endParaRPr lang="en-IN" dirty="0"/>
+          </a:p>
+        </p:txBody>
+      </p:sp>
+      <p:sp>
+        <p:nvSpPr>
+          <p:cNvPr id="7" name="Content Placeholder 6"/>
+          <p:cNvSpPr>
+            <a:spLocks noGrp="1"/>
+          </p:cNvSpPr>
+          <p:nvPr>
+            <p:ph sz="quarter" idx="19"/>
+          </p:nvPr>
+        </p:nvSpPr>
+        <p:spPr>
+          <a:xfrm>
+            <a:off x="457200" y="3488845"/>
+            <a:ext cx="8229600" cy="239102"/>
+          </a:xfrm>
+        </p:spPr>
+        <p:txBody>
+          <a:bodyPr/>
+          <a:lstStyle>
+            <a:lvl1pPr marR="0" indent="-255600" algn="l" rtl="0">
+              <a:lnSpc>
+                <a:spcPct val="100000"/>
+              </a:lnSpc>
+              <a:spcAft>
+                <a:spcPts val="0"/>
+              </a:spcAft>
+              <a:buClr>
+                <a:srgbClr val="007FA3"/>
+              </a:buClr>
+              <a:buSzPct val="100000"/>
+              <a:defRPr lang="en-US" sz="2400" b="0" i="0" u="none" strike="noStrike" cap="none" dirty="0" smtClean="0">
+                <a:solidFill>
+                  <a:schemeClr val="dk1"/>
+                </a:solidFill>
+                <a:latin typeface="+mn-lt"/>
+                <a:ea typeface="Arial"/>
+                <a:cs typeface="Arial"/>
+                <a:sym typeface="Arial"/>
+              </a:defRPr>
+            </a:lvl1pPr>
+            <a:lvl2pPr marR="0" indent="-284400" algn="l" rtl="0">
+              <a:lnSpc>
+                <a:spcPct val="100000"/>
+              </a:lnSpc>
+              <a:spcAft>
+                <a:spcPts val="0"/>
+              </a:spcAft>
+              <a:buClr>
+                <a:srgbClr val="007FA3"/>
+              </a:buClr>
+              <a:buSzPct val="100000"/>
+              <a:defRPr lang="en-US" sz="2400" b="0" i="0" u="none" strike="noStrike" cap="none" dirty="0" smtClean="0">
+                <a:solidFill>
+                  <a:schemeClr val="dk1"/>
+                </a:solidFill>
+                <a:latin typeface="+mn-lt"/>
+                <a:ea typeface="Arial"/>
+                <a:cs typeface="Arial"/>
+                <a:sym typeface="Arial"/>
+              </a:defRPr>
+            </a:lvl2pPr>
+            <a:lvl3pPr marR="0" indent="-230400" algn="l" rtl="0">
+              <a:lnSpc>
+                <a:spcPct val="100000"/>
+              </a:lnSpc>
+              <a:spcAft>
+                <a:spcPts val="0"/>
+              </a:spcAft>
+              <a:buClr>
+                <a:srgbClr val="007FA3"/>
+              </a:buClr>
+              <a:buSzPct val="100000"/>
+              <a:defRPr lang="en-US" sz="2400" b="0" i="0" u="none" strike="noStrike" cap="none" dirty="0" smtClean="0">
+                <a:solidFill>
+                  <a:schemeClr val="dk1"/>
+                </a:solidFill>
+                <a:latin typeface="+mn-lt"/>
+                <a:ea typeface="Arial"/>
+                <a:cs typeface="Arial"/>
+                <a:sym typeface="Arial"/>
+              </a:defRPr>
+            </a:lvl3pPr>
+            <a:lvl4pPr marR="0" indent="-230400" algn="l" rtl="0">
+              <a:lnSpc>
+                <a:spcPct val="100000"/>
+              </a:lnSpc>
+              <a:spcAft>
+                <a:spcPts val="0"/>
+              </a:spcAft>
+              <a:buClr>
+                <a:srgbClr val="007FA3"/>
+              </a:buClr>
+              <a:buSzPct val="100000"/>
+              <a:defRPr lang="en-US" sz="2400" b="0" i="0" u="none" strike="noStrike" cap="none" dirty="0" smtClean="0">
+                <a:solidFill>
+                  <a:schemeClr val="dk1"/>
+                </a:solidFill>
+                <a:latin typeface="+mn-lt"/>
+                <a:ea typeface="Arial"/>
+                <a:cs typeface="Arial"/>
+                <a:sym typeface="Arial"/>
+              </a:defRPr>
+            </a:lvl4pPr>
+            <a:lvl5pPr marR="0" indent="-230400" algn="l" rtl="0">
+              <a:lnSpc>
+                <a:spcPct val="100000"/>
+              </a:lnSpc>
+              <a:spcAft>
+                <a:spcPts val="0"/>
+              </a:spcAft>
+              <a:buClr>
+                <a:srgbClr val="007FA3"/>
+              </a:buClr>
+              <a:buSzPct val="100000"/>
+              <a:defRPr lang="en-IN" sz="2400" b="0" i="0" u="none" strike="noStrike" cap="none" dirty="0" smtClean="0">
+                <a:solidFill>
+                  <a:schemeClr val="dk1"/>
+                </a:solidFill>
+                <a:latin typeface="+mn-lt"/>
+                <a:ea typeface="Arial"/>
+                <a:cs typeface="Arial"/>
+                <a:sym typeface="Arial"/>
+              </a:defRPr>
+            </a:lvl5pPr>
+          </a:lstStyle>
+          <a:p>
+            <a:pPr lvl="0"/>
+            <a:r>
+              <a:rPr lang="en-US" dirty="0"/>
+              <a:t>Edit Master text styles</a:t>
+            </a:r>
+          </a:p>
+          <a:p>
+            <a:pPr lvl="1"/>
+            <a:r>
+              <a:rPr lang="en-US" dirty="0"/>
+              <a:t>Second level</a:t>
+            </a:r>
+          </a:p>
+          <a:p>
+            <a:pPr lvl="2"/>
+            <a:r>
+              <a:rPr lang="en-US" dirty="0"/>
+              <a:t>Third level</a:t>
+            </a:r>
+          </a:p>
+          <a:p>
+            <a:pPr lvl="3"/>
+            <a:r>
+              <a:rPr lang="en-US" dirty="0"/>
+              <a:t>Fourth level</a:t>
+            </a:r>
+          </a:p>
+          <a:p>
+            <a:pPr lvl="4"/>
+            <a:r>
+              <a:rPr lang="en-US" dirty="0"/>
+              <a:t>Fifth level</a:t>
+            </a:r>
+            <a:endParaRPr lang="en-IN" dirty="0"/>
+          </a:p>
+        </p:txBody>
+      </p:sp>
+      <p:sp>
+        <p:nvSpPr>
+          <p:cNvPr id="4" name="Text Placeholder 3"/>
+          <p:cNvSpPr>
+            <a:spLocks noGrp="1"/>
+          </p:cNvSpPr>
+          <p:nvPr>
+            <p:ph type="body" sz="quarter" idx="20"/>
+          </p:nvPr>
+        </p:nvSpPr>
+        <p:spPr>
+          <a:xfrm>
+            <a:off x="457200" y="3727450"/>
+            <a:ext cx="8229600" cy="328613"/>
+          </a:xfrm>
+        </p:spPr>
+        <p:txBody>
+          <a:bodyPr/>
+          <a:lstStyle>
+            <a:lvl1pPr indent="-255600">
+              <a:defRPr sz="2400">
+                <a:latin typeface="+mn-lt"/>
+              </a:defRPr>
+            </a:lvl1pPr>
+            <a:lvl2pPr>
+              <a:defRPr sz="2400">
+                <a:latin typeface="+mn-lt"/>
+              </a:defRPr>
+            </a:lvl2pPr>
+            <a:lvl3pPr>
+              <a:defRPr sz="2400">
+                <a:latin typeface="+mn-lt"/>
+              </a:defRPr>
+            </a:lvl3pPr>
+            <a:lvl4pPr>
+              <a:defRPr sz="2400">
+                <a:latin typeface="+mn-lt"/>
+              </a:defRPr>
+            </a:lvl4pPr>
+            <a:lvl5pPr>
+              <a:defRPr sz="2400">
+                <a:latin typeface="+mn-lt"/>
+              </a:defRPr>
+            </a:lvl5pPr>
+          </a:lstStyle>
+          <a:p>
+            <a:pPr lvl="0"/>
+            <a:r>
+              <a:rPr lang="en-US" dirty="0"/>
+              <a:t>Edit Master text styles</a:t>
+            </a:r>
+          </a:p>
+          <a:p>
+            <a:pPr lvl="1"/>
+            <a:r>
+              <a:rPr lang="en-US" dirty="0"/>
+              <a:t>Second level</a:t>
+            </a:r>
+          </a:p>
+          <a:p>
+            <a:pPr lvl="2"/>
+            <a:r>
+              <a:rPr lang="en-US" dirty="0"/>
+              <a:t>Third level</a:t>
+            </a:r>
+          </a:p>
+          <a:p>
+            <a:pPr lvl="3"/>
+            <a:r>
+              <a:rPr lang="en-US" dirty="0"/>
+              <a:t>Fourth level</a:t>
+            </a:r>
+          </a:p>
+          <a:p>
+            <a:pPr lvl="4"/>
+            <a:r>
+              <a:rPr lang="en-US" dirty="0"/>
+              <a:t>Fifth level</a:t>
+            </a:r>
+            <a:endParaRPr lang="en-IN" dirty="0"/>
+          </a:p>
+        </p:txBody>
+      </p:sp>
+      <p:sp>
+        <p:nvSpPr>
+          <p:cNvPr id="9" name="Text Placeholder 8"/>
+          <p:cNvSpPr>
+            <a:spLocks noGrp="1"/>
+          </p:cNvSpPr>
+          <p:nvPr>
+            <p:ph type="body" sz="quarter" idx="21"/>
+          </p:nvPr>
+        </p:nvSpPr>
+        <p:spPr>
+          <a:xfrm>
+            <a:off x="457200" y="4056063"/>
+            <a:ext cx="8229600" cy="293687"/>
+          </a:xfrm>
+        </p:spPr>
+        <p:txBody>
+          <a:bodyPr/>
+          <a:lstStyle>
+            <a:lvl1pPr indent="-255600">
+              <a:defRPr sz="2400">
+                <a:latin typeface="+mn-lt"/>
+              </a:defRPr>
+            </a:lvl1pPr>
+            <a:lvl2pPr>
+              <a:defRPr sz="2400">
+                <a:latin typeface="+mn-lt"/>
+              </a:defRPr>
+            </a:lvl2pPr>
+            <a:lvl3pPr>
+              <a:defRPr sz="2400">
+                <a:latin typeface="+mn-lt"/>
+              </a:defRPr>
+            </a:lvl3pPr>
+            <a:lvl4pPr>
+              <a:defRPr sz="2400">
+                <a:latin typeface="+mn-lt"/>
+              </a:defRPr>
+            </a:lvl4pPr>
+            <a:lvl5pPr>
+              <a:defRPr sz="2400">
+                <a:latin typeface="+mn-lt"/>
+              </a:defRPr>
+            </a:lvl5pPr>
+          </a:lstStyle>
+          <a:p>
+            <a:pPr lvl="0"/>
+            <a:r>
+              <a:rPr lang="en-US" dirty="0"/>
+              <a:t>Edit Master text styles</a:t>
+            </a:r>
+          </a:p>
+          <a:p>
+            <a:pPr lvl="1"/>
+            <a:r>
+              <a:rPr lang="en-US" dirty="0"/>
+              <a:t>Second level</a:t>
+            </a:r>
+          </a:p>
+          <a:p>
+            <a:pPr lvl="2"/>
+            <a:r>
+              <a:rPr lang="en-US" dirty="0"/>
+              <a:t>Third level</a:t>
+            </a:r>
+          </a:p>
+          <a:p>
+            <a:pPr lvl="3"/>
+            <a:r>
+              <a:rPr lang="en-US" dirty="0"/>
+              <a:t>Fourth level</a:t>
+            </a:r>
+          </a:p>
+          <a:p>
+            <a:pPr lvl="4"/>
+            <a:r>
+              <a:rPr lang="en-US" dirty="0"/>
+              <a:t>Fifth level</a:t>
+            </a:r>
+            <a:endParaRPr lang="en-IN" dirty="0"/>
+          </a:p>
+        </p:txBody>
+      </p:sp>
+      <p:sp>
+        <p:nvSpPr>
+          <p:cNvPr id="13" name="Text Placeholder 12"/>
+          <p:cNvSpPr>
+            <a:spLocks noGrp="1"/>
+          </p:cNvSpPr>
+          <p:nvPr>
+            <p:ph type="body" sz="quarter" idx="22"/>
+          </p:nvPr>
+        </p:nvSpPr>
+        <p:spPr>
+          <a:xfrm>
+            <a:off x="457200" y="4349750"/>
+            <a:ext cx="8229600" cy="280988"/>
+          </a:xfrm>
+        </p:spPr>
+        <p:txBody>
+          <a:bodyPr/>
+          <a:lstStyle>
+            <a:lvl1pPr indent="-255600">
+              <a:defRPr sz="2400">
+                <a:latin typeface="+mn-lt"/>
+              </a:defRPr>
+            </a:lvl1pPr>
+            <a:lvl2pPr>
+              <a:defRPr sz="2400">
+                <a:latin typeface="+mn-lt"/>
+              </a:defRPr>
+            </a:lvl2pPr>
+            <a:lvl3pPr>
+              <a:defRPr sz="2400">
+                <a:latin typeface="+mn-lt"/>
+              </a:defRPr>
+            </a:lvl3pPr>
+            <a:lvl4pPr>
+              <a:defRPr sz="2400">
+                <a:latin typeface="+mn-lt"/>
+              </a:defRPr>
+            </a:lvl4pPr>
+            <a:lvl5pPr>
+              <a:defRPr sz="2400">
+                <a:latin typeface="+mn-lt"/>
+              </a:defRPr>
+            </a:lvl5pPr>
+          </a:lstStyle>
+          <a:p>
+            <a:pPr lvl="0"/>
+            <a:r>
+              <a:rPr lang="en-US" dirty="0"/>
+              <a:t>Edit Master text styles</a:t>
+            </a:r>
+          </a:p>
+          <a:p>
+            <a:pPr lvl="1"/>
+            <a:r>
+              <a:rPr lang="en-US" dirty="0"/>
+              <a:t>Second level</a:t>
+            </a:r>
+          </a:p>
+          <a:p>
+            <a:pPr lvl="2"/>
+            <a:r>
+              <a:rPr lang="en-US" dirty="0"/>
+              <a:t>Third level</a:t>
+            </a:r>
+          </a:p>
+          <a:p>
+            <a:pPr lvl="3"/>
+            <a:r>
+              <a:rPr lang="en-US" dirty="0"/>
+              <a:t>Fourth level</a:t>
+            </a:r>
+          </a:p>
+          <a:p>
+            <a:pPr lvl="4"/>
+            <a:r>
+              <a:rPr lang="en-US" dirty="0"/>
+              <a:t>Fifth level</a:t>
+            </a:r>
+            <a:endParaRPr lang="en-IN" dirty="0"/>
+          </a:p>
+        </p:txBody>
+      </p:sp>
+      <p:sp>
+        <p:nvSpPr>
+          <p:cNvPr id="20" name="Text Placeholder 19"/>
+          <p:cNvSpPr>
+            <a:spLocks noGrp="1"/>
+          </p:cNvSpPr>
+          <p:nvPr>
+            <p:ph type="body" sz="quarter" idx="23"/>
+          </p:nvPr>
+        </p:nvSpPr>
+        <p:spPr>
+          <a:xfrm>
+            <a:off x="457200" y="4630738"/>
+            <a:ext cx="8229600" cy="339725"/>
+          </a:xfrm>
+        </p:spPr>
+        <p:txBody>
+          <a:bodyPr/>
+          <a:lstStyle>
+            <a:lvl1pPr indent="-255600">
+              <a:defRPr sz="2400">
+                <a:latin typeface="+mn-lt"/>
+              </a:defRPr>
+            </a:lvl1pPr>
+            <a:lvl2pPr>
+              <a:defRPr sz="2400">
+                <a:latin typeface="+mn-lt"/>
+              </a:defRPr>
+            </a:lvl2pPr>
+            <a:lvl3pPr>
+              <a:defRPr sz="2400">
+                <a:latin typeface="+mn-lt"/>
+              </a:defRPr>
+            </a:lvl3pPr>
+            <a:lvl4pPr>
+              <a:defRPr sz="2400">
+                <a:latin typeface="+mn-lt"/>
+              </a:defRPr>
+            </a:lvl4pPr>
+            <a:lvl5pPr>
+              <a:defRPr sz="2400">
+                <a:latin typeface="+mn-lt"/>
+              </a:defRPr>
+            </a:lvl5pPr>
+          </a:lstStyle>
+          <a:p>
+            <a:pPr lvl="0"/>
+            <a:r>
+              <a:rPr lang="en-US" dirty="0"/>
+              <a:t>Edit Master text styles</a:t>
+            </a:r>
+          </a:p>
+          <a:p>
+            <a:pPr lvl="1"/>
+            <a:r>
+              <a:rPr lang="en-US" dirty="0"/>
+              <a:t>Second level</a:t>
+            </a:r>
+          </a:p>
+          <a:p>
+            <a:pPr lvl="2"/>
+            <a:r>
+              <a:rPr lang="en-US" dirty="0"/>
+              <a:t>Third level</a:t>
+            </a:r>
+          </a:p>
+          <a:p>
+            <a:pPr lvl="3"/>
+            <a:r>
+              <a:rPr lang="en-US" dirty="0"/>
+              <a:t>Fourth level</a:t>
+            </a:r>
+          </a:p>
+          <a:p>
+            <a:pPr lvl="4"/>
+            <a:r>
+              <a:rPr lang="en-US" dirty="0"/>
+              <a:t>Fifth level</a:t>
+            </a:r>
+            <a:endParaRPr lang="en-IN" dirty="0"/>
+          </a:p>
+        </p:txBody>
+      </p:sp>
+      <p:sp>
+        <p:nvSpPr>
+          <p:cNvPr id="24" name="Text Placeholder 23"/>
+          <p:cNvSpPr>
+            <a:spLocks noGrp="1"/>
+          </p:cNvSpPr>
+          <p:nvPr>
+            <p:ph type="body" sz="quarter" idx="24"/>
+          </p:nvPr>
+        </p:nvSpPr>
+        <p:spPr>
+          <a:xfrm>
+            <a:off x="457200" y="4970463"/>
+            <a:ext cx="8229600" cy="293687"/>
+          </a:xfrm>
+        </p:spPr>
+        <p:txBody>
+          <a:bodyPr/>
+          <a:lstStyle>
+            <a:lvl1pPr indent="-255600">
+              <a:defRPr sz="2400">
+                <a:latin typeface="+mn-lt"/>
+              </a:defRPr>
+            </a:lvl1pPr>
+            <a:lvl2pPr>
+              <a:defRPr sz="2400">
+                <a:latin typeface="+mn-lt"/>
+              </a:defRPr>
+            </a:lvl2pPr>
+            <a:lvl3pPr>
+              <a:defRPr sz="2400">
+                <a:latin typeface="+mn-lt"/>
+              </a:defRPr>
+            </a:lvl3pPr>
+            <a:lvl4pPr>
+              <a:defRPr sz="2400">
+                <a:latin typeface="+mn-lt"/>
+              </a:defRPr>
+            </a:lvl4pPr>
+            <a:lvl5pPr>
+              <a:defRPr sz="2400">
+                <a:latin typeface="+mn-lt"/>
+              </a:defRPr>
+            </a:lvl5pPr>
+          </a:lstStyle>
+          <a:p>
+            <a:pPr lvl="0"/>
+            <a:r>
+              <a:rPr lang="en-US" dirty="0"/>
+              <a:t>Edit Master text styles</a:t>
+            </a:r>
+          </a:p>
+          <a:p>
+            <a:pPr lvl="1"/>
+            <a:r>
+              <a:rPr lang="en-US" dirty="0"/>
+              <a:t>Second level</a:t>
+            </a:r>
+          </a:p>
+          <a:p>
+            <a:pPr lvl="2"/>
+            <a:r>
+              <a:rPr lang="en-US" dirty="0"/>
+              <a:t>Third level</a:t>
+            </a:r>
+          </a:p>
+          <a:p>
+            <a:pPr lvl="3"/>
+            <a:r>
+              <a:rPr lang="en-US" dirty="0"/>
+              <a:t>Fourth level</a:t>
+            </a:r>
+          </a:p>
+          <a:p>
+            <a:pPr lvl="4"/>
+            <a:r>
+              <a:rPr lang="en-US" dirty="0"/>
+              <a:t>Fifth level</a:t>
+            </a:r>
+            <a:endParaRPr lang="en-IN" dirty="0"/>
+          </a:p>
+        </p:txBody>
+      </p:sp>
+      <p:sp>
+        <p:nvSpPr>
+          <p:cNvPr id="27" name="Text Placeholder 26"/>
+          <p:cNvSpPr>
+            <a:spLocks noGrp="1"/>
+          </p:cNvSpPr>
+          <p:nvPr>
+            <p:ph type="body" sz="quarter" idx="25"/>
+          </p:nvPr>
+        </p:nvSpPr>
+        <p:spPr>
+          <a:xfrm>
+            <a:off x="457200" y="5264150"/>
+            <a:ext cx="8229600" cy="339725"/>
+          </a:xfrm>
+        </p:spPr>
+        <p:txBody>
+          <a:bodyPr/>
+          <a:lstStyle>
+            <a:lvl1pPr indent="-255600">
+              <a:defRPr sz="2400">
+                <a:latin typeface="+mn-lt"/>
+              </a:defRPr>
+            </a:lvl1pPr>
+            <a:lvl2pPr>
+              <a:defRPr sz="2400">
+                <a:latin typeface="+mn-lt"/>
+              </a:defRPr>
+            </a:lvl2pPr>
+            <a:lvl3pPr>
+              <a:defRPr sz="2400">
+                <a:latin typeface="+mn-lt"/>
+              </a:defRPr>
+            </a:lvl3pPr>
+            <a:lvl4pPr>
+              <a:defRPr sz="2400">
+                <a:latin typeface="+mn-lt"/>
+              </a:defRPr>
+            </a:lvl4pPr>
+            <a:lvl5pPr>
+              <a:defRPr sz="2400">
+                <a:latin typeface="+mn-lt"/>
+              </a:defRPr>
+            </a:lvl5pPr>
+          </a:lstStyle>
+          <a:p>
+            <a:pPr lvl="0"/>
+            <a:r>
+              <a:rPr lang="en-US" dirty="0"/>
+              <a:t>Edit Master text styles</a:t>
+            </a:r>
+          </a:p>
+          <a:p>
+            <a:pPr lvl="1"/>
+            <a:r>
+              <a:rPr lang="en-US" dirty="0"/>
+              <a:t>Second level</a:t>
+            </a:r>
+          </a:p>
+          <a:p>
+            <a:pPr lvl="2"/>
+            <a:r>
+              <a:rPr lang="en-US" dirty="0"/>
+              <a:t>Third level</a:t>
+            </a:r>
+          </a:p>
+          <a:p>
+            <a:pPr lvl="3"/>
+            <a:r>
+              <a:rPr lang="en-US" dirty="0"/>
+              <a:t>Fourth level</a:t>
+            </a:r>
+          </a:p>
+          <a:p>
+            <a:pPr lvl="4"/>
+            <a:r>
+              <a:rPr lang="en-US" dirty="0"/>
+              <a:t>Fifth level</a:t>
+            </a:r>
+            <a:endParaRPr lang="en-IN" dirty="0"/>
+          </a:p>
+        </p:txBody>
+      </p:sp>
+    </p:spTree>
+    <p:extLst>
+      <p:ext uri="{BB962C8B-B14F-4D97-AF65-F5344CB8AC3E}">
+        <p14:creationId xmlns:p14="http://schemas.microsoft.com/office/powerpoint/2010/main" val="2146554060"/>
+      </p:ext>
+    </p:extLst>
+  </p:cSld>
+  <p:clrMapOvr>
+    <a:masterClrMapping/>
+  </p:clrMapOvr>
+  <p:extLst>
+    <p:ext uri="{DCECCB84-F9BA-43D5-87BE-67443E8EF086}">
+      <p15:sldGuideLst xmlns:p15="http://schemas.microsoft.com/office/powerpoint/2012/main">
+        <p15:guide id="1" orient="horz" pos="981">
+          <p15:clr>
+            <a:srgbClr val="FBAE40"/>
+          </p15:clr>
+        </p15:guide>
+      </p15:sldGuideLst>
+    </p:ext>
+  </p:extLst>
 </p:sldLayout>
 </file>
 
@@ -20756,6 +24336,7 @@
     <p:sldLayoutId id="2147483781" r:id="rId12"/>
     <p:sldLayoutId id="2147483782" r:id="rId13"/>
     <p:sldLayoutId id="2147483783" r:id="rId14"/>
+    <p:sldLayoutId id="2147483784" r:id="rId15"/>
   </p:sldLayoutIdLst>
   <p:hf hdr="0" ftr="0" dt="0"/>
   <p:txStyles>
@@ -21198,14 +24779,14 @@
           <a:ln/>
           <a:extLst>
             <a:ext uri="{909E8E84-426E-40dd-AFC4-6F175D3DCCD1}">
-              <a14:hiddenFill xmlns:a14="http://schemas.microsoft.com/office/drawing/2010/main" xmlns="">
+              <a14:hiddenFill xmlns="" xmlns:a14="http://schemas.microsoft.com/office/drawing/2010/main">
                 <a:solidFill>
                   <a:srgbClr val="FFFFFF"/>
                 </a:solidFill>
               </a14:hiddenFill>
             </a:ext>
             <a:ext uri="{91240B29-F687-4f45-9708-019B960494DF}">
-              <a14:hiddenLine xmlns:a14="http://schemas.microsoft.com/office/drawing/2010/main" xmlns="" w="9525">
+              <a14:hiddenLine xmlns="" xmlns:a14="http://schemas.microsoft.com/office/drawing/2010/main" w="9525">
                 <a:solidFill>
                   <a:srgbClr val="000000"/>
                 </a:solidFill>
@@ -21355,14 +24936,14 @@
           <a:ln/>
           <a:extLst>
             <a:ext uri="{909E8E84-426E-40dd-AFC4-6F175D3DCCD1}">
-              <a14:hiddenFill xmlns:a14="http://schemas.microsoft.com/office/drawing/2010/main" xmlns="">
+              <a14:hiddenFill xmlns="" xmlns:a14="http://schemas.microsoft.com/office/drawing/2010/main">
                 <a:solidFill>
                   <a:srgbClr val="FFFFFF"/>
                 </a:solidFill>
               </a14:hiddenFill>
             </a:ext>
             <a:ext uri="{91240B29-F687-4f45-9708-019B960494DF}">
-              <a14:hiddenLine xmlns:a14="http://schemas.microsoft.com/office/drawing/2010/main" xmlns="" w="9525">
+              <a14:hiddenLine xmlns="" xmlns:a14="http://schemas.microsoft.com/office/drawing/2010/main" w="9525">
                 <a:solidFill>
                   <a:srgbClr val="000000"/>
                 </a:solidFill>
@@ -21559,14 +25140,14 @@
           </a:ln>
           <a:extLst>
             <a:ext uri="{909E8E84-426E-40dd-AFC4-6F175D3DCCD1}">
-              <a14:hiddenFill xmlns:a14="http://schemas.microsoft.com/office/drawing/2010/main" xmlns="">
+              <a14:hiddenFill xmlns="" xmlns:a14="http://schemas.microsoft.com/office/drawing/2010/main">
                 <a:solidFill>
                   <a:srgbClr val="FFFFFF"/>
                 </a:solidFill>
               </a14:hiddenFill>
             </a:ext>
             <a:ext uri="{91240B29-F687-4f45-9708-019B960494DF}">
-              <a14:hiddenLine xmlns:a14="http://schemas.microsoft.com/office/drawing/2010/main" xmlns="" w="9525">
+              <a14:hiddenLine xmlns="" xmlns:a14="http://schemas.microsoft.com/office/drawing/2010/main" w="9525">
                 <a:solidFill>
                   <a:srgbClr val="000000"/>
                 </a:solidFill>
@@ -21587,6 +25168,167 @@
 </file>
 
 <file path=ppt/slides/slide10.xml><?xml version="1.0" encoding="utf-8"?>
+<p:sld xmlns:a="http://schemas.openxmlformats.org/drawingml/2006/main" xmlns:r="http://schemas.openxmlformats.org/officeDocument/2006/relationships" xmlns:p="http://schemas.openxmlformats.org/presentationml/2006/main">
+  <p:cSld>
+    <p:spTree>
+      <p:nvGrpSpPr>
+        <p:cNvPr id="1" name=""/>
+        <p:cNvGrpSpPr/>
+        <p:nvPr/>
+      </p:nvGrpSpPr>
+      <p:grpSpPr>
+        <a:xfrm>
+          <a:off x="0" y="0"/>
+          <a:ext cx="0" cy="0"/>
+          <a:chOff x="0" y="0"/>
+          <a:chExt cx="0" cy="0"/>
+        </a:xfrm>
+      </p:grpSpPr>
+      <p:sp>
+        <p:nvSpPr>
+          <p:cNvPr id="2" name="Title 1">
+            <a:extLst>
+              <a:ext uri="{FF2B5EF4-FFF2-40B4-BE49-F238E27FC236}">
+                <a16:creationId xmlns:a16="http://schemas.microsoft.com/office/drawing/2014/main" id="{1BAC4758-AD83-406B-B704-600F7B926BD7}"/>
+              </a:ext>
+            </a:extLst>
+          </p:cNvPr>
+          <p:cNvSpPr>
+            <a:spLocks noGrp="1"/>
+          </p:cNvSpPr>
+          <p:nvPr>
+            <p:ph type="title"/>
+          </p:nvPr>
+        </p:nvSpPr>
+        <p:spPr/>
+        <p:txBody>
+          <a:bodyPr/>
+          <a:lstStyle/>
+          <a:p>
+            <a:r>
+              <a:rPr lang="en-IN" dirty="0"/>
+              <a:t>The HashSet Class</a:t>
+            </a:r>
+          </a:p>
+        </p:txBody>
+      </p:sp>
+      <p:sp>
+        <p:nvSpPr>
+          <p:cNvPr id="3" name="Content Placeholder 2">
+            <a:extLst>
+              <a:ext uri="{FF2B5EF4-FFF2-40B4-BE49-F238E27FC236}">
+                <a16:creationId xmlns:a16="http://schemas.microsoft.com/office/drawing/2014/main" id="{6331A985-B6EC-4F55-BA65-53285CA1D6FE}"/>
+              </a:ext>
+            </a:extLst>
+          </p:cNvPr>
+          <p:cNvSpPr>
+            <a:spLocks noGrp="1"/>
+          </p:cNvSpPr>
+          <p:nvPr>
+            <p:ph sz="quarter" idx="13"/>
+          </p:nvPr>
+        </p:nvSpPr>
+        <p:spPr/>
+        <p:txBody>
+          <a:bodyPr/>
+          <a:lstStyle/>
+          <a:p>
+            <a:pPr marL="432" indent="0">
+              <a:buNone/>
+            </a:pPr>
+            <a:r>
+              <a:rPr lang="en-US" altLang="en-US" dirty="0">
+                <a:cs typeface="Times New Roman" panose="02020603050405020304" pitchFamily="18" charset="0"/>
+              </a:rPr>
+              <a:t>The HashSet class is a concrete class that implements Set. It can be used to store duplicate-free elements. For efficiency, objects added to a hash set need to implement the </a:t>
+            </a:r>
+            <a:r>
+              <a:rPr lang="en-US" altLang="en-US" dirty="0" err="1">
+                <a:cs typeface="Times New Roman" panose="02020603050405020304" pitchFamily="18" charset="0"/>
+              </a:rPr>
+              <a:t>hashCode</a:t>
+            </a:r>
+            <a:r>
+              <a:rPr lang="en-US" altLang="en-US" dirty="0">
+                <a:cs typeface="Times New Roman" panose="02020603050405020304" pitchFamily="18" charset="0"/>
+              </a:rPr>
+              <a:t> method in a manner that properly disperses the hash code.</a:t>
+            </a:r>
+          </a:p>
+        </p:txBody>
+      </p:sp>
+      <p:pic>
+        <p:nvPicPr>
+          <p:cNvPr id="5" name="Picture 9">
+            <a:extLst>
+              <a:ext uri="{FF2B5EF4-FFF2-40B4-BE49-F238E27FC236}">
+                <a16:creationId xmlns:a16="http://schemas.microsoft.com/office/drawing/2014/main" id="{A0BDD954-3D6E-4DEC-B6E0-6B567116068C}"/>
+              </a:ext>
+            </a:extLst>
+          </p:cNvPr>
+          <p:cNvPicPr>
+            <a:picLocks noChangeAspect="1" noChangeArrowheads="1"/>
+          </p:cNvPicPr>
+          <p:nvPr/>
+        </p:nvPicPr>
+        <p:blipFill rotWithShape="1">
+          <a:blip r:embed="rId3">
+            <a:extLst>
+              <a:ext uri="{28A0092B-C50C-407E-A947-70E740481C1C}">
+                <a14:useLocalDpi xmlns:a14="http://schemas.microsoft.com/office/drawing/2010/main" val="0"/>
+              </a:ext>
+            </a:extLst>
+          </a:blip>
+          <a:srcRect t="1991" b="57026"/>
+          <a:stretch/>
+        </p:blipFill>
+        <p:spPr bwMode="auto">
+          <a:xfrm>
+            <a:off x="339725" y="3733800"/>
+            <a:ext cx="8464550" cy="1569280"/>
+          </a:xfrm>
+          <a:prstGeom prst="rect">
+            <a:avLst/>
+          </a:prstGeom>
+          <a:noFill/>
+          <a:ln>
+            <a:noFill/>
+          </a:ln>
+          <a:extLst>
+            <a:ext uri="{909E8E84-426E-40DD-AFC4-6F175D3DCCD1}">
+              <a14:hiddenFill xmlns:a14="http://schemas.microsoft.com/office/drawing/2010/main">
+                <a:solidFill>
+                  <a:schemeClr val="accent1"/>
+                </a:solidFill>
+              </a14:hiddenFill>
+            </a:ext>
+            <a:ext uri="{91240B29-F687-4F45-9708-019B960494DF}">
+              <a14:hiddenLine xmlns:a14="http://schemas.microsoft.com/office/drawing/2010/main" w="12700">
+                <a:solidFill>
+                  <a:schemeClr val="tx1"/>
+                </a:solidFill>
+                <a:miter lim="800000"/>
+                <a:headEnd type="none" w="sm" len="sm"/>
+                <a:tailEnd type="none" w="sm" len="sm"/>
+              </a14:hiddenLine>
+            </a:ext>
+          </a:extLst>
+        </p:spPr>
+      </p:pic>
+    </p:spTree>
+    <p:extLst>
+      <p:ext uri="{BB962C8B-B14F-4D97-AF65-F5344CB8AC3E}">
+        <p14:creationId xmlns:p14="http://schemas.microsoft.com/office/powerpoint/2010/main" val="3745574572"/>
+      </p:ext>
+    </p:extLst>
+  </p:cSld>
+  <p:clrMapOvr>
+    <a:masterClrMapping/>
+  </p:clrMapOvr>
+</p:sld>
+</file>
+
+<file path=ppt/slides/slide11.xml><?xml version="1.0" encoding="utf-8"?>
 <p:sld xmlns:a="http://schemas.openxmlformats.org/drawingml/2006/main" xmlns:r="http://schemas.openxmlformats.org/officeDocument/2006/relationships" xmlns:p="http://schemas.openxmlformats.org/presentationml/2006/main">
   <p:cSld>
     <p:spTree>
@@ -21798,7 +25540,7 @@
                 <a:buFontTx/>
                 <a:buNone/>
               </a:pPr>
-              <a:t>10</a:t>
+              <a:t>11</a:t>
             </a:fld>
             <a:endParaRPr lang="en-US" altLang="en-US" sz="1400"/>
           </a:p>
@@ -22784,7 +26526,7 @@
 </p:sld>
 </file>
 
-<file path=ppt/slides/slide11.xml><?xml version="1.0" encoding="utf-8"?>
+<file path=ppt/slides/slide12.xml><?xml version="1.0" encoding="utf-8"?>
 <p:sld xmlns:a="http://schemas.openxmlformats.org/drawingml/2006/main" xmlns:r="http://schemas.openxmlformats.org/officeDocument/2006/relationships" xmlns:p="http://schemas.openxmlformats.org/presentationml/2006/main">
   <p:cSld>
     <p:spTree>
@@ -22996,7 +26738,7 @@
                 <a:buFontTx/>
                 <a:buNone/>
               </a:pPr>
-              <a:t>11</a:t>
+              <a:t>12</a:t>
             </a:fld>
             <a:endParaRPr lang="en-US" altLang="en-US" sz="1400"/>
           </a:p>
@@ -23988,7 +27730,7 @@
 </p:sld>
 </file>
 
-<file path=ppt/slides/slide12.xml><?xml version="1.0" encoding="utf-8"?>
+<file path=ppt/slides/slide13.xml><?xml version="1.0" encoding="utf-8"?>
 <p:sld xmlns:a="http://schemas.openxmlformats.org/drawingml/2006/main" xmlns:r="http://schemas.openxmlformats.org/officeDocument/2006/relationships" xmlns:p="http://schemas.openxmlformats.org/presentationml/2006/main">
   <p:cSld>
     <p:spTree>
@@ -24414,7 +28156,7 @@
 </p:sld>
 </file>
 
-<file path=ppt/slides/slide13.xml><?xml version="1.0" encoding="utf-8"?>
+<file path=ppt/slides/slide14.xml><?xml version="1.0" encoding="utf-8"?>
 <p:sld xmlns:a="http://schemas.openxmlformats.org/drawingml/2006/main" xmlns:r="http://schemas.openxmlformats.org/officeDocument/2006/relationships" xmlns:p="http://schemas.openxmlformats.org/presentationml/2006/main">
   <p:cSld>
     <p:spTree>
@@ -24626,7 +28368,7 @@
                 <a:buFontTx/>
                 <a:buNone/>
               </a:pPr>
-              <a:t>13</a:t>
+              <a:t>14</a:t>
             </a:fld>
             <a:endParaRPr lang="en-US" altLang="en-US" sz="1400"/>
           </a:p>
@@ -26290,7 +30032,7 @@
 </p:sld>
 </file>
 
-<file path=ppt/slides/slide14.xml><?xml version="1.0" encoding="utf-8"?>
+<file path=ppt/slides/slide15.xml><?xml version="1.0" encoding="utf-8"?>
 <p:sld xmlns:a="http://schemas.openxmlformats.org/drawingml/2006/main" xmlns:r="http://schemas.openxmlformats.org/officeDocument/2006/relationships" xmlns:p="http://schemas.openxmlformats.org/presentationml/2006/main">
   <p:cSld>
     <p:spTree>
@@ -26322,14 +30064,14 @@
           <a:ln/>
           <a:extLst>
             <a:ext uri="{909E8E84-426E-40dd-AFC4-6F175D3DCCD1}">
-              <a14:hiddenFill xmlns:a14="http://schemas.microsoft.com/office/drawing/2010/main" xmlns="">
+              <a14:hiddenFill xmlns="" xmlns:a14="http://schemas.microsoft.com/office/drawing/2010/main">
                 <a:solidFill>
                   <a:srgbClr val="FFFFFF"/>
                 </a:solidFill>
               </a14:hiddenFill>
             </a:ext>
             <a:ext uri="{91240B29-F687-4f45-9708-019B960494DF}">
-              <a14:hiddenLine xmlns:a14="http://schemas.microsoft.com/office/drawing/2010/main" xmlns="" w="9525">
+              <a14:hiddenLine xmlns="" xmlns:a14="http://schemas.microsoft.com/office/drawing/2010/main" w="9525">
                 <a:solidFill>
                   <a:srgbClr val="000000"/>
                 </a:solidFill>
@@ -26477,14 +30219,14 @@
           <a:ln/>
           <a:extLst>
             <a:ext uri="{909E8E84-426E-40dd-AFC4-6F175D3DCCD1}">
-              <a14:hiddenFill xmlns:a14="http://schemas.microsoft.com/office/drawing/2010/main" xmlns="">
+              <a14:hiddenFill xmlns="" xmlns:a14="http://schemas.microsoft.com/office/drawing/2010/main">
                 <a:solidFill>
                   <a:srgbClr val="FFFFFF"/>
                 </a:solidFill>
               </a14:hiddenFill>
             </a:ext>
             <a:ext uri="{91240B29-F687-4f45-9708-019B960494DF}">
-              <a14:hiddenLine xmlns:a14="http://schemas.microsoft.com/office/drawing/2010/main" xmlns="" w="9525">
+              <a14:hiddenLine xmlns="" xmlns:a14="http://schemas.microsoft.com/office/drawing/2010/main" w="9525">
                 <a:solidFill>
                   <a:srgbClr val="000000"/>
                 </a:solidFill>
@@ -26609,7 +30351,7 @@
             <a:fld id="{D13CBAF6-FA04-3146-878B-26C617EB2EB3}" type="slidenum">
               <a:rPr lang="en-US" sz="1400"/>
               <a:pPr eaLnBrk="1" hangingPunct="1"/>
-              <a:t>14</a:t>
+              <a:t>15</a:t>
             </a:fld>
             <a:endParaRPr lang="en-US" sz="1400"/>
           </a:p>
@@ -26680,14 +30422,14 @@
           </a:ln>
           <a:extLst>
             <a:ext uri="{909E8E84-426E-40dd-AFC4-6F175D3DCCD1}">
-              <a14:hiddenFill xmlns:a14="http://schemas.microsoft.com/office/drawing/2010/main" xmlns="">
+              <a14:hiddenFill xmlns="" xmlns:a14="http://schemas.microsoft.com/office/drawing/2010/main">
                 <a:solidFill>
                   <a:srgbClr val="FFFFFF"/>
                 </a:solidFill>
               </a14:hiddenFill>
             </a:ext>
             <a:ext uri="{91240B29-F687-4f45-9708-019B960494DF}">
-              <a14:hiddenLine xmlns:a14="http://schemas.microsoft.com/office/drawing/2010/main" xmlns="" w="9525">
+              <a14:hiddenLine xmlns="" xmlns:a14="http://schemas.microsoft.com/office/drawing/2010/main" w="9525">
                 <a:solidFill>
                   <a:srgbClr val="000000"/>
                 </a:solidFill>
@@ -26732,7 +30474,7 @@
 </p:sld>
 </file>
 
-<file path=ppt/slides/slide15.xml><?xml version="1.0" encoding="utf-8"?>
+<file path=ppt/slides/slide16.xml><?xml version="1.0" encoding="utf-8"?>
 <p:sld xmlns:a="http://schemas.openxmlformats.org/drawingml/2006/main" xmlns:r="http://schemas.openxmlformats.org/officeDocument/2006/relationships" xmlns:p="http://schemas.openxmlformats.org/presentationml/2006/main">
   <p:cSld>
     <p:spTree>
@@ -27280,7 +31022,7 @@
 </p:sld>
 </file>
 
-<file path=ppt/slides/slide16.xml><?xml version="1.0" encoding="utf-8"?>
+<file path=ppt/slides/slide17.xml><?xml version="1.0" encoding="utf-8"?>
 <p:sld xmlns:a="http://schemas.openxmlformats.org/drawingml/2006/main" xmlns:r="http://schemas.openxmlformats.org/officeDocument/2006/relationships" xmlns:p="http://schemas.openxmlformats.org/presentationml/2006/main">
   <p:cSld>
     <p:spTree>
@@ -27536,7 +31278,7 @@
 </p:sld>
 </file>
 
-<file path=ppt/slides/slide17.xml><?xml version="1.0" encoding="utf-8"?>
+<file path=ppt/slides/slide18.xml><?xml version="1.0" encoding="utf-8"?>
 <p:sld xmlns:a="http://schemas.openxmlformats.org/drawingml/2006/main" xmlns:r="http://schemas.openxmlformats.org/officeDocument/2006/relationships" xmlns:p="http://schemas.openxmlformats.org/presentationml/2006/main">
   <p:cSld>
     <p:spTree>
@@ -27568,14 +31310,14 @@
           <a:ln/>
           <a:extLst>
             <a:ext uri="{909E8E84-426E-40dd-AFC4-6F175D3DCCD1}">
-              <a14:hiddenFill xmlns:a14="http://schemas.microsoft.com/office/drawing/2010/main" xmlns="">
+              <a14:hiddenFill xmlns="" xmlns:a14="http://schemas.microsoft.com/office/drawing/2010/main">
                 <a:solidFill>
                   <a:srgbClr val="FFFFFF"/>
                 </a:solidFill>
               </a14:hiddenFill>
             </a:ext>
             <a:ext uri="{91240B29-F687-4f45-9708-019B960494DF}">
-              <a14:hiddenLine xmlns:a14="http://schemas.microsoft.com/office/drawing/2010/main" xmlns="" w="9525">
+              <a14:hiddenLine xmlns="" xmlns:a14="http://schemas.microsoft.com/office/drawing/2010/main" w="9525">
                 <a:solidFill>
                   <a:srgbClr val="000000"/>
                 </a:solidFill>
@@ -27732,14 +31474,14 @@
           <a:effectLst/>
           <a:extLst>
             <a:ext uri="{909E8E84-426E-40dd-AFC4-6F175D3DCCD1}">
-              <a14:hiddenFill xmlns:a14="http://schemas.microsoft.com/office/drawing/2010/main" xmlns="">
+              <a14:hiddenFill xmlns="" xmlns:a14="http://schemas.microsoft.com/office/drawing/2010/main">
                 <a:solidFill>
                   <a:srgbClr val="FFFFFF"/>
                 </a:solidFill>
               </a14:hiddenFill>
             </a:ext>
             <a:ext uri="{91240B29-F687-4f45-9708-019B960494DF}">
-              <a14:hiddenLine xmlns:a14="http://schemas.microsoft.com/office/drawing/2010/main" xmlns="" w="9525">
+              <a14:hiddenLine xmlns="" xmlns:a14="http://schemas.microsoft.com/office/drawing/2010/main" w="9525">
                 <a:solidFill>
                   <a:srgbClr val="000000"/>
                 </a:solidFill>
@@ -27886,7 +31628,7 @@
             <a:fld id="{402EE811-ED52-D141-BF28-F52D2E781B77}" type="slidenum">
               <a:rPr lang="en-US" smtClean="0"/>
               <a:pPr eaLnBrk="1" hangingPunct="1"/>
-              <a:t>17</a:t>
+              <a:t>18</a:t>
             </a:fld>
             <a:endParaRPr lang="en-US" sz="1400"/>
           </a:p>
@@ -28079,14 +31821,14 @@
           <a:ln/>
           <a:extLst>
             <a:ext uri="{909E8E84-426E-40dd-AFC4-6F175D3DCCD1}">
-              <a14:hiddenFill xmlns:a14="http://schemas.microsoft.com/office/drawing/2010/main" xmlns="">
+              <a14:hiddenFill xmlns="" xmlns:a14="http://schemas.microsoft.com/office/drawing/2010/main">
                 <a:solidFill>
                   <a:srgbClr val="FFFFFF"/>
                 </a:solidFill>
               </a14:hiddenFill>
             </a:ext>
             <a:ext uri="{91240B29-F687-4f45-9708-019B960494DF}">
-              <a14:hiddenLine xmlns:a14="http://schemas.microsoft.com/office/drawing/2010/main" xmlns="" w="9525">
+              <a14:hiddenLine xmlns="" xmlns:a14="http://schemas.microsoft.com/office/drawing/2010/main" w="9525">
                 <a:solidFill>
                   <a:srgbClr val="000000"/>
                 </a:solidFill>
@@ -28223,7 +31965,7 @@
 </p:sld>
 </file>
 
-<file path=ppt/slides/slide18.xml><?xml version="1.0" encoding="utf-8"?>
+<file path=ppt/slides/slide19.xml><?xml version="1.0" encoding="utf-8"?>
 <p:sld xmlns:a="http://schemas.openxmlformats.org/drawingml/2006/main" xmlns:r="http://schemas.openxmlformats.org/officeDocument/2006/relationships" xmlns:p="http://schemas.openxmlformats.org/presentationml/2006/main">
   <p:cSld>
     <p:spTree>
@@ -28435,7 +32177,7 @@
                 <a:buFontTx/>
                 <a:buNone/>
               </a:pPr>
-              <a:t>18</a:t>
+              <a:t>19</a:t>
             </a:fld>
             <a:endParaRPr lang="en-US" altLang="en-US" sz="1400"/>
           </a:p>
@@ -29910,1053 +33652,6 @@
           <a:xfrm>
             <a:off x="228600" y="2767013"/>
             <a:ext cx="8524875" cy="3714750"/>
-          </a:xfrm>
-          <a:prstGeom prst="rect">
-            <a:avLst/>
-          </a:prstGeom>
-          <a:noFill/>
-          <a:ln>
-            <a:noFill/>
-          </a:ln>
-          <a:extLst>
-            <a:ext uri="{909E8E84-426E-40DD-AFC4-6F175D3DCCD1}">
-              <a14:hiddenFill xmlns:a14="http://schemas.microsoft.com/office/drawing/2010/main">
-                <a:solidFill>
-                  <a:schemeClr val="accent1"/>
-                </a:solidFill>
-              </a14:hiddenFill>
-            </a:ext>
-            <a:ext uri="{91240B29-F687-4F45-9708-019B960494DF}">
-              <a14:hiddenLine xmlns:a14="http://schemas.microsoft.com/office/drawing/2010/main" w="12700">
-                <a:solidFill>
-                  <a:schemeClr val="tx1"/>
-                </a:solidFill>
-                <a:miter lim="800000"/>
-                <a:headEnd type="none" w="sm" len="sm"/>
-                <a:tailEnd type="none" w="sm" len="sm"/>
-              </a14:hiddenLine>
-            </a:ext>
-          </a:extLst>
-        </p:spPr>
-      </p:pic>
-    </p:spTree>
-  </p:cSld>
-  <p:clrMapOvr>
-    <a:masterClrMapping/>
-  </p:clrMapOvr>
-</p:sld>
-</file>
-
-<file path=ppt/slides/slide19.xml><?xml version="1.0" encoding="utf-8"?>
-<p:sld xmlns:a="http://schemas.openxmlformats.org/drawingml/2006/main" xmlns:r="http://schemas.openxmlformats.org/officeDocument/2006/relationships" xmlns:p="http://schemas.openxmlformats.org/presentationml/2006/main">
-  <p:cSld>
-    <p:spTree>
-      <p:nvGrpSpPr>
-        <p:cNvPr id="1" name=""/>
-        <p:cNvGrpSpPr/>
-        <p:nvPr/>
-      </p:nvGrpSpPr>
-      <p:grpSpPr>
-        <a:xfrm>
-          <a:off x="0" y="0"/>
-          <a:ext cx="0" cy="0"/>
-          <a:chOff x="0" y="0"/>
-          <a:chExt cx="0" cy="0"/>
-        </a:xfrm>
-      </p:grpSpPr>
-      <p:sp>
-        <p:nvSpPr>
-          <p:cNvPr id="23554" name="Slide Number Placeholder 4">
-            <a:extLst>
-              <a:ext uri="{FF2B5EF4-FFF2-40B4-BE49-F238E27FC236}">
-                <a16:creationId xmlns:a16="http://schemas.microsoft.com/office/drawing/2014/main" id="{6C1F7F2D-81BF-4514-A6B5-CE3288ED872E}"/>
-              </a:ext>
-            </a:extLst>
-          </p:cNvPr>
-          <p:cNvSpPr>
-            <a:spLocks noGrp="1"/>
-          </p:cNvSpPr>
-          <p:nvPr>
-            <p:ph type="sldNum" sz="quarter" idx="11"/>
-          </p:nvPr>
-        </p:nvSpPr>
-        <p:spPr>
-          <a:noFill/>
-        </p:spPr>
-        <p:txBody>
-          <a:bodyPr/>
-          <a:lstStyle>
-            <a:lvl1pPr>
-              <a:spcBef>
-                <a:spcPct val="20000"/>
-              </a:spcBef>
-              <a:buClr>
-                <a:schemeClr val="tx2"/>
-              </a:buClr>
-              <a:buSzPct val="75000"/>
-              <a:buFont typeface="Monotype Sorts" pitchFamily="2" charset="2"/>
-              <a:buChar char="F"/>
-              <a:defRPr sz="3200">
-                <a:solidFill>
-                  <a:schemeClr val="tx1"/>
-                </a:solidFill>
-                <a:latin typeface="Times New Roman" panose="02020603050405020304" pitchFamily="18" charset="0"/>
-              </a:defRPr>
-            </a:lvl1pPr>
-            <a:lvl2pPr marL="742950" indent="-285750">
-              <a:spcBef>
-                <a:spcPct val="20000"/>
-              </a:spcBef>
-              <a:buClr>
-                <a:schemeClr val="tx1"/>
-              </a:buClr>
-              <a:buChar char="–"/>
-              <a:defRPr sz="2800">
-                <a:solidFill>
-                  <a:schemeClr val="tx1"/>
-                </a:solidFill>
-                <a:latin typeface="Times New Roman" panose="02020603050405020304" pitchFamily="18" charset="0"/>
-              </a:defRPr>
-            </a:lvl2pPr>
-            <a:lvl3pPr marL="1143000" indent="-228600">
-              <a:spcBef>
-                <a:spcPct val="20000"/>
-              </a:spcBef>
-              <a:buClr>
-                <a:schemeClr val="accent2"/>
-              </a:buClr>
-              <a:buSzPct val="65000"/>
-              <a:buFont typeface="Monotype Sorts" pitchFamily="2" charset="2"/>
-              <a:buChar char="u"/>
-              <a:defRPr sz="2400">
-                <a:solidFill>
-                  <a:schemeClr val="tx1"/>
-                </a:solidFill>
-                <a:latin typeface="Times New Roman" panose="02020603050405020304" pitchFamily="18" charset="0"/>
-              </a:defRPr>
-            </a:lvl3pPr>
-            <a:lvl4pPr marL="1600200" indent="-228600">
-              <a:spcBef>
-                <a:spcPct val="20000"/>
-              </a:spcBef>
-              <a:buClr>
-                <a:schemeClr val="tx1"/>
-              </a:buClr>
-              <a:buChar char="–"/>
-              <a:defRPr sz="2000">
-                <a:solidFill>
-                  <a:schemeClr val="tx1"/>
-                </a:solidFill>
-                <a:latin typeface="Times New Roman" panose="02020603050405020304" pitchFamily="18" charset="0"/>
-              </a:defRPr>
-            </a:lvl4pPr>
-            <a:lvl5pPr marL="2057400" indent="-228600">
-              <a:spcBef>
-                <a:spcPct val="20000"/>
-              </a:spcBef>
-              <a:buClr>
-                <a:schemeClr val="tx2"/>
-              </a:buClr>
-              <a:buChar char="•"/>
-              <a:defRPr sz="2000">
-                <a:solidFill>
-                  <a:schemeClr val="tx1"/>
-                </a:solidFill>
-                <a:latin typeface="Times New Roman" panose="02020603050405020304" pitchFamily="18" charset="0"/>
-              </a:defRPr>
-            </a:lvl5pPr>
-            <a:lvl6pPr marL="2514600" indent="-228600" eaLnBrk="0" fontAlgn="base" hangingPunct="0">
-              <a:spcBef>
-                <a:spcPct val="20000"/>
-              </a:spcBef>
-              <a:spcAft>
-                <a:spcPct val="0"/>
-              </a:spcAft>
-              <a:buClr>
-                <a:schemeClr val="tx2"/>
-              </a:buClr>
-              <a:buChar char="•"/>
-              <a:defRPr sz="2000">
-                <a:solidFill>
-                  <a:schemeClr val="tx1"/>
-                </a:solidFill>
-                <a:latin typeface="Times New Roman" panose="02020603050405020304" pitchFamily="18" charset="0"/>
-              </a:defRPr>
-            </a:lvl6pPr>
-            <a:lvl7pPr marL="2971800" indent="-228600" eaLnBrk="0" fontAlgn="base" hangingPunct="0">
-              <a:spcBef>
-                <a:spcPct val="20000"/>
-              </a:spcBef>
-              <a:spcAft>
-                <a:spcPct val="0"/>
-              </a:spcAft>
-              <a:buClr>
-                <a:schemeClr val="tx2"/>
-              </a:buClr>
-              <a:buChar char="•"/>
-              <a:defRPr sz="2000">
-                <a:solidFill>
-                  <a:schemeClr val="tx1"/>
-                </a:solidFill>
-                <a:latin typeface="Times New Roman" panose="02020603050405020304" pitchFamily="18" charset="0"/>
-              </a:defRPr>
-            </a:lvl7pPr>
-            <a:lvl8pPr marL="3429000" indent="-228600" eaLnBrk="0" fontAlgn="base" hangingPunct="0">
-              <a:spcBef>
-                <a:spcPct val="20000"/>
-              </a:spcBef>
-              <a:spcAft>
-                <a:spcPct val="0"/>
-              </a:spcAft>
-              <a:buClr>
-                <a:schemeClr val="tx2"/>
-              </a:buClr>
-              <a:buChar char="•"/>
-              <a:defRPr sz="2000">
-                <a:solidFill>
-                  <a:schemeClr val="tx1"/>
-                </a:solidFill>
-                <a:latin typeface="Times New Roman" panose="02020603050405020304" pitchFamily="18" charset="0"/>
-              </a:defRPr>
-            </a:lvl8pPr>
-            <a:lvl9pPr marL="3886200" indent="-228600" eaLnBrk="0" fontAlgn="base" hangingPunct="0">
-              <a:spcBef>
-                <a:spcPct val="20000"/>
-              </a:spcBef>
-              <a:spcAft>
-                <a:spcPct val="0"/>
-              </a:spcAft>
-              <a:buClr>
-                <a:schemeClr val="tx2"/>
-              </a:buClr>
-              <a:buChar char="•"/>
-              <a:defRPr sz="2000">
-                <a:solidFill>
-                  <a:schemeClr val="tx1"/>
-                </a:solidFill>
-                <a:latin typeface="Times New Roman" panose="02020603050405020304" pitchFamily="18" charset="0"/>
-              </a:defRPr>
-            </a:lvl9pPr>
-          </a:lstStyle>
-          <a:p>
-            <a:pPr>
-              <a:spcBef>
-                <a:spcPct val="0"/>
-              </a:spcBef>
-              <a:buClrTx/>
-              <a:buSzTx/>
-              <a:buFontTx/>
-              <a:buNone/>
-            </a:pPr>
-            <a:fld id="{2B27D80D-4C74-4360-8897-E21683FA1BF6}" type="slidenum">
-              <a:rPr lang="en-US" altLang="en-US" sz="1400" smtClean="0"/>
-              <a:pPr>
-                <a:spcBef>
-                  <a:spcPct val="0"/>
-                </a:spcBef>
-                <a:buClrTx/>
-                <a:buSzTx/>
-                <a:buFontTx/>
-                <a:buNone/>
-              </a:pPr>
-              <a:t>19</a:t>
-            </a:fld>
-            <a:endParaRPr lang="en-US" altLang="en-US" sz="1400"/>
-          </a:p>
-        </p:txBody>
-      </p:sp>
-      <p:sp>
-        <p:nvSpPr>
-          <p:cNvPr id="23555" name="Rectangle 2">
-            <a:extLst>
-              <a:ext uri="{FF2B5EF4-FFF2-40B4-BE49-F238E27FC236}">
-                <a16:creationId xmlns:a16="http://schemas.microsoft.com/office/drawing/2014/main" id="{70194478-69A0-4493-909E-E5ABF3C4C8EE}"/>
-              </a:ext>
-            </a:extLst>
-          </p:cNvPr>
-          <p:cNvSpPr>
-            <a:spLocks noGrp="1" noChangeArrowheads="1"/>
-          </p:cNvSpPr>
-          <p:nvPr>
-            <p:ph type="title"/>
-          </p:nvPr>
-        </p:nvSpPr>
-        <p:spPr>
-          <a:xfrm>
-            <a:off x="685800" y="228600"/>
-            <a:ext cx="7924800" cy="1143000"/>
-          </a:xfrm>
-          <a:noFill/>
-        </p:spPr>
-        <p:txBody>
-          <a:bodyPr/>
-          <a:lstStyle/>
-          <a:p>
-            <a:r>
-              <a:rPr lang="en-US" altLang="en-US"/>
-              <a:t>Map Interface and Class Hierarchy</a:t>
-            </a:r>
-          </a:p>
-        </p:txBody>
-      </p:sp>
-      <p:sp>
-        <p:nvSpPr>
-          <p:cNvPr id="23556" name="Rectangle 3">
-            <a:extLst>
-              <a:ext uri="{FF2B5EF4-FFF2-40B4-BE49-F238E27FC236}">
-                <a16:creationId xmlns:a16="http://schemas.microsoft.com/office/drawing/2014/main" id="{3CD2CDC4-35B8-487F-B552-57F1605116A9}"/>
-              </a:ext>
-            </a:extLst>
-          </p:cNvPr>
-          <p:cNvSpPr>
-            <a:spLocks noChangeArrowheads="1"/>
-          </p:cNvSpPr>
-          <p:nvPr/>
-        </p:nvSpPr>
-        <p:spPr bwMode="auto">
-          <a:xfrm>
-            <a:off x="1741488" y="2084388"/>
-            <a:ext cx="9144000" cy="0"/>
-          </a:xfrm>
-          <a:prstGeom prst="rect">
-            <a:avLst/>
-          </a:prstGeom>
-          <a:noFill/>
-          <a:ln>
-            <a:noFill/>
-          </a:ln>
-          <a:effectLst/>
-          <a:extLst>
-            <a:ext uri="{909E8E84-426E-40DD-AFC4-6F175D3DCCD1}">
-              <a14:hiddenFill xmlns:a14="http://schemas.microsoft.com/office/drawing/2010/main">
-                <a:solidFill>
-                  <a:schemeClr val="accent1"/>
-                </a:solidFill>
-              </a14:hiddenFill>
-            </a:ext>
-            <a:ext uri="{91240B29-F687-4F45-9708-019B960494DF}">
-              <a14:hiddenLine xmlns:a14="http://schemas.microsoft.com/office/drawing/2010/main" w="12700">
-                <a:solidFill>
-                  <a:schemeClr val="tx1"/>
-                </a:solidFill>
-                <a:miter lim="800000"/>
-                <a:headEnd type="none" w="sm" len="sm"/>
-                <a:tailEnd type="none" w="sm" len="sm"/>
-              </a14:hiddenLine>
-            </a:ext>
-            <a:ext uri="{AF507438-7753-43E0-B8FC-AC1667EBCBE1}">
-              <a14:hiddenEffects xmlns:a14="http://schemas.microsoft.com/office/drawing/2010/main">
-                <a:effectLst>
-                  <a:outerShdw dist="35921" dir="2700000" algn="ctr" rotWithShape="0">
-                    <a:schemeClr val="bg2"/>
-                  </a:outerShdw>
-                </a:effectLst>
-              </a14:hiddenEffects>
-            </a:ext>
-          </a:extLst>
-        </p:spPr>
-        <p:txBody>
-          <a:bodyPr>
-            <a:spAutoFit/>
-          </a:bodyPr>
-          <a:lstStyle>
-            <a:lvl1pPr>
-              <a:spcBef>
-                <a:spcPct val="20000"/>
-              </a:spcBef>
-              <a:buClr>
-                <a:schemeClr val="tx2"/>
-              </a:buClr>
-              <a:buSzPct val="75000"/>
-              <a:buFont typeface="Monotype Sorts" pitchFamily="2" charset="2"/>
-              <a:buChar char="F"/>
-              <a:defRPr sz="3200">
-                <a:solidFill>
-                  <a:schemeClr val="tx1"/>
-                </a:solidFill>
-                <a:latin typeface="Times New Roman" panose="02020603050405020304" pitchFamily="18" charset="0"/>
-              </a:defRPr>
-            </a:lvl1pPr>
-            <a:lvl2pPr marL="742950" indent="-285750">
-              <a:spcBef>
-                <a:spcPct val="20000"/>
-              </a:spcBef>
-              <a:buClr>
-                <a:schemeClr val="tx1"/>
-              </a:buClr>
-              <a:buChar char="–"/>
-              <a:defRPr sz="2800">
-                <a:solidFill>
-                  <a:schemeClr val="tx1"/>
-                </a:solidFill>
-                <a:latin typeface="Times New Roman" panose="02020603050405020304" pitchFamily="18" charset="0"/>
-              </a:defRPr>
-            </a:lvl2pPr>
-            <a:lvl3pPr marL="1143000" indent="-228600">
-              <a:spcBef>
-                <a:spcPct val="20000"/>
-              </a:spcBef>
-              <a:buClr>
-                <a:schemeClr val="accent2"/>
-              </a:buClr>
-              <a:buSzPct val="65000"/>
-              <a:buFont typeface="Monotype Sorts" pitchFamily="2" charset="2"/>
-              <a:buChar char="u"/>
-              <a:defRPr sz="2400">
-                <a:solidFill>
-                  <a:schemeClr val="tx1"/>
-                </a:solidFill>
-                <a:latin typeface="Times New Roman" panose="02020603050405020304" pitchFamily="18" charset="0"/>
-              </a:defRPr>
-            </a:lvl3pPr>
-            <a:lvl4pPr marL="1600200" indent="-228600">
-              <a:spcBef>
-                <a:spcPct val="20000"/>
-              </a:spcBef>
-              <a:buClr>
-                <a:schemeClr val="tx1"/>
-              </a:buClr>
-              <a:buChar char="–"/>
-              <a:defRPr sz="2000">
-                <a:solidFill>
-                  <a:schemeClr val="tx1"/>
-                </a:solidFill>
-                <a:latin typeface="Times New Roman" panose="02020603050405020304" pitchFamily="18" charset="0"/>
-              </a:defRPr>
-            </a:lvl4pPr>
-            <a:lvl5pPr marL="2057400" indent="-228600">
-              <a:spcBef>
-                <a:spcPct val="20000"/>
-              </a:spcBef>
-              <a:buClr>
-                <a:schemeClr val="tx2"/>
-              </a:buClr>
-              <a:buChar char="•"/>
-              <a:defRPr sz="2000">
-                <a:solidFill>
-                  <a:schemeClr val="tx1"/>
-                </a:solidFill>
-                <a:latin typeface="Times New Roman" panose="02020603050405020304" pitchFamily="18" charset="0"/>
-              </a:defRPr>
-            </a:lvl5pPr>
-            <a:lvl6pPr marL="2514600" indent="-228600" eaLnBrk="0" fontAlgn="base" hangingPunct="0">
-              <a:spcBef>
-                <a:spcPct val="20000"/>
-              </a:spcBef>
-              <a:spcAft>
-                <a:spcPct val="0"/>
-              </a:spcAft>
-              <a:buClr>
-                <a:schemeClr val="tx2"/>
-              </a:buClr>
-              <a:buChar char="•"/>
-              <a:defRPr sz="2000">
-                <a:solidFill>
-                  <a:schemeClr val="tx1"/>
-                </a:solidFill>
-                <a:latin typeface="Times New Roman" panose="02020603050405020304" pitchFamily="18" charset="0"/>
-              </a:defRPr>
-            </a:lvl6pPr>
-            <a:lvl7pPr marL="2971800" indent="-228600" eaLnBrk="0" fontAlgn="base" hangingPunct="0">
-              <a:spcBef>
-                <a:spcPct val="20000"/>
-              </a:spcBef>
-              <a:spcAft>
-                <a:spcPct val="0"/>
-              </a:spcAft>
-              <a:buClr>
-                <a:schemeClr val="tx2"/>
-              </a:buClr>
-              <a:buChar char="•"/>
-              <a:defRPr sz="2000">
-                <a:solidFill>
-                  <a:schemeClr val="tx1"/>
-                </a:solidFill>
-                <a:latin typeface="Times New Roman" panose="02020603050405020304" pitchFamily="18" charset="0"/>
-              </a:defRPr>
-            </a:lvl7pPr>
-            <a:lvl8pPr marL="3429000" indent="-228600" eaLnBrk="0" fontAlgn="base" hangingPunct="0">
-              <a:spcBef>
-                <a:spcPct val="20000"/>
-              </a:spcBef>
-              <a:spcAft>
-                <a:spcPct val="0"/>
-              </a:spcAft>
-              <a:buClr>
-                <a:schemeClr val="tx2"/>
-              </a:buClr>
-              <a:buChar char="•"/>
-              <a:defRPr sz="2000">
-                <a:solidFill>
-                  <a:schemeClr val="tx1"/>
-                </a:solidFill>
-                <a:latin typeface="Times New Roman" panose="02020603050405020304" pitchFamily="18" charset="0"/>
-              </a:defRPr>
-            </a:lvl8pPr>
-            <a:lvl9pPr marL="3886200" indent="-228600" eaLnBrk="0" fontAlgn="base" hangingPunct="0">
-              <a:spcBef>
-                <a:spcPct val="20000"/>
-              </a:spcBef>
-              <a:spcAft>
-                <a:spcPct val="0"/>
-              </a:spcAft>
-              <a:buClr>
-                <a:schemeClr val="tx2"/>
-              </a:buClr>
-              <a:buChar char="•"/>
-              <a:defRPr sz="2000">
-                <a:solidFill>
-                  <a:schemeClr val="tx1"/>
-                </a:solidFill>
-                <a:latin typeface="Times New Roman" panose="02020603050405020304" pitchFamily="18" charset="0"/>
-              </a:defRPr>
-            </a:lvl9pPr>
-          </a:lstStyle>
-          <a:p>
-            <a:pPr>
-              <a:spcBef>
-                <a:spcPct val="0"/>
-              </a:spcBef>
-              <a:buClrTx/>
-              <a:buSzTx/>
-              <a:buFontTx/>
-              <a:buNone/>
-            </a:pPr>
-            <a:endParaRPr lang="en-US" altLang="en-US" sz="2400"/>
-          </a:p>
-        </p:txBody>
-      </p:sp>
-      <p:sp>
-        <p:nvSpPr>
-          <p:cNvPr id="23557" name="Rectangle 4">
-            <a:extLst>
-              <a:ext uri="{FF2B5EF4-FFF2-40B4-BE49-F238E27FC236}">
-                <a16:creationId xmlns:a16="http://schemas.microsoft.com/office/drawing/2014/main" id="{846C4515-6DAA-4CE5-BCEA-752CEF84CF72}"/>
-              </a:ext>
-            </a:extLst>
-          </p:cNvPr>
-          <p:cNvSpPr>
-            <a:spLocks noGrp="1" noChangeArrowheads="1"/>
-          </p:cNvSpPr>
-          <p:nvPr>
-            <p:ph type="body" idx="1"/>
-          </p:nvPr>
-        </p:nvSpPr>
-        <p:spPr>
-          <a:xfrm>
-            <a:off x="457200" y="1676400"/>
-            <a:ext cx="8534400" cy="1752600"/>
-          </a:xfrm>
-          <a:noFill/>
-        </p:spPr>
-        <p:txBody>
-          <a:bodyPr/>
-          <a:lstStyle/>
-          <a:p>
-            <a:pPr marL="0" indent="0">
-              <a:lnSpc>
-                <a:spcPct val="90000"/>
-              </a:lnSpc>
-              <a:buFont typeface="Monotype Sorts" pitchFamily="2" charset="2"/>
-              <a:buNone/>
-            </a:pPr>
-            <a:r>
-              <a:rPr lang="en-US" altLang="en-US" sz="2800">
-                <a:cs typeface="Times New Roman" panose="02020603050405020304" pitchFamily="18" charset="0"/>
-              </a:rPr>
-              <a:t>An instance of Map represents a group of objects, each of which is associated with a key. You can get the object from a map using a key, and you have to use a key to put the object into the map. </a:t>
-            </a:r>
-            <a:endParaRPr lang="en-US" altLang="en-US" sz="2800" noProof="1">
-              <a:cs typeface="Times New Roman" panose="02020603050405020304" pitchFamily="18" charset="0"/>
-            </a:endParaRPr>
-          </a:p>
-        </p:txBody>
-      </p:sp>
-      <p:sp>
-        <p:nvSpPr>
-          <p:cNvPr id="23558" name="Rectangle 5">
-            <a:extLst>
-              <a:ext uri="{FF2B5EF4-FFF2-40B4-BE49-F238E27FC236}">
-                <a16:creationId xmlns:a16="http://schemas.microsoft.com/office/drawing/2014/main" id="{C0C48422-6929-4B69-80EA-DD86D44E35E8}"/>
-              </a:ext>
-            </a:extLst>
-          </p:cNvPr>
-          <p:cNvSpPr>
-            <a:spLocks noChangeArrowheads="1"/>
-          </p:cNvSpPr>
-          <p:nvPr/>
-        </p:nvSpPr>
-        <p:spPr bwMode="auto">
-          <a:xfrm>
-            <a:off x="3227388" y="2713038"/>
-            <a:ext cx="9144000" cy="0"/>
-          </a:xfrm>
-          <a:prstGeom prst="rect">
-            <a:avLst/>
-          </a:prstGeom>
-          <a:noFill/>
-          <a:ln>
-            <a:noFill/>
-          </a:ln>
-          <a:effectLst/>
-          <a:extLst>
-            <a:ext uri="{909E8E84-426E-40DD-AFC4-6F175D3DCCD1}">
-              <a14:hiddenFill xmlns:a14="http://schemas.microsoft.com/office/drawing/2010/main">
-                <a:solidFill>
-                  <a:schemeClr val="accent1"/>
-                </a:solidFill>
-              </a14:hiddenFill>
-            </a:ext>
-            <a:ext uri="{91240B29-F687-4F45-9708-019B960494DF}">
-              <a14:hiddenLine xmlns:a14="http://schemas.microsoft.com/office/drawing/2010/main" w="12700">
-                <a:solidFill>
-                  <a:schemeClr val="tx1"/>
-                </a:solidFill>
-                <a:miter lim="800000"/>
-                <a:headEnd type="none" w="sm" len="sm"/>
-                <a:tailEnd type="none" w="sm" len="sm"/>
-              </a14:hiddenLine>
-            </a:ext>
-            <a:ext uri="{AF507438-7753-43E0-B8FC-AC1667EBCBE1}">
-              <a14:hiddenEffects xmlns:a14="http://schemas.microsoft.com/office/drawing/2010/main">
-                <a:effectLst>
-                  <a:outerShdw dist="35921" dir="2700000" algn="ctr" rotWithShape="0">
-                    <a:schemeClr val="bg2"/>
-                  </a:outerShdw>
-                </a:effectLst>
-              </a14:hiddenEffects>
-            </a:ext>
-          </a:extLst>
-        </p:spPr>
-        <p:txBody>
-          <a:bodyPr>
-            <a:spAutoFit/>
-          </a:bodyPr>
-          <a:lstStyle>
-            <a:lvl1pPr>
-              <a:spcBef>
-                <a:spcPct val="20000"/>
-              </a:spcBef>
-              <a:buClr>
-                <a:schemeClr val="tx2"/>
-              </a:buClr>
-              <a:buSzPct val="75000"/>
-              <a:buFont typeface="Monotype Sorts" pitchFamily="2" charset="2"/>
-              <a:buChar char="F"/>
-              <a:defRPr sz="3200">
-                <a:solidFill>
-                  <a:schemeClr val="tx1"/>
-                </a:solidFill>
-                <a:latin typeface="Times New Roman" panose="02020603050405020304" pitchFamily="18" charset="0"/>
-              </a:defRPr>
-            </a:lvl1pPr>
-            <a:lvl2pPr marL="742950" indent="-285750">
-              <a:spcBef>
-                <a:spcPct val="20000"/>
-              </a:spcBef>
-              <a:buClr>
-                <a:schemeClr val="tx1"/>
-              </a:buClr>
-              <a:buChar char="–"/>
-              <a:defRPr sz="2800">
-                <a:solidFill>
-                  <a:schemeClr val="tx1"/>
-                </a:solidFill>
-                <a:latin typeface="Times New Roman" panose="02020603050405020304" pitchFamily="18" charset="0"/>
-              </a:defRPr>
-            </a:lvl2pPr>
-            <a:lvl3pPr marL="1143000" indent="-228600">
-              <a:spcBef>
-                <a:spcPct val="20000"/>
-              </a:spcBef>
-              <a:buClr>
-                <a:schemeClr val="accent2"/>
-              </a:buClr>
-              <a:buSzPct val="65000"/>
-              <a:buFont typeface="Monotype Sorts" pitchFamily="2" charset="2"/>
-              <a:buChar char="u"/>
-              <a:defRPr sz="2400">
-                <a:solidFill>
-                  <a:schemeClr val="tx1"/>
-                </a:solidFill>
-                <a:latin typeface="Times New Roman" panose="02020603050405020304" pitchFamily="18" charset="0"/>
-              </a:defRPr>
-            </a:lvl3pPr>
-            <a:lvl4pPr marL="1600200" indent="-228600">
-              <a:spcBef>
-                <a:spcPct val="20000"/>
-              </a:spcBef>
-              <a:buClr>
-                <a:schemeClr val="tx1"/>
-              </a:buClr>
-              <a:buChar char="–"/>
-              <a:defRPr sz="2000">
-                <a:solidFill>
-                  <a:schemeClr val="tx1"/>
-                </a:solidFill>
-                <a:latin typeface="Times New Roman" panose="02020603050405020304" pitchFamily="18" charset="0"/>
-              </a:defRPr>
-            </a:lvl4pPr>
-            <a:lvl5pPr marL="2057400" indent="-228600">
-              <a:spcBef>
-                <a:spcPct val="20000"/>
-              </a:spcBef>
-              <a:buClr>
-                <a:schemeClr val="tx2"/>
-              </a:buClr>
-              <a:buChar char="•"/>
-              <a:defRPr sz="2000">
-                <a:solidFill>
-                  <a:schemeClr val="tx1"/>
-                </a:solidFill>
-                <a:latin typeface="Times New Roman" panose="02020603050405020304" pitchFamily="18" charset="0"/>
-              </a:defRPr>
-            </a:lvl5pPr>
-            <a:lvl6pPr marL="2514600" indent="-228600" eaLnBrk="0" fontAlgn="base" hangingPunct="0">
-              <a:spcBef>
-                <a:spcPct val="20000"/>
-              </a:spcBef>
-              <a:spcAft>
-                <a:spcPct val="0"/>
-              </a:spcAft>
-              <a:buClr>
-                <a:schemeClr val="tx2"/>
-              </a:buClr>
-              <a:buChar char="•"/>
-              <a:defRPr sz="2000">
-                <a:solidFill>
-                  <a:schemeClr val="tx1"/>
-                </a:solidFill>
-                <a:latin typeface="Times New Roman" panose="02020603050405020304" pitchFamily="18" charset="0"/>
-              </a:defRPr>
-            </a:lvl6pPr>
-            <a:lvl7pPr marL="2971800" indent="-228600" eaLnBrk="0" fontAlgn="base" hangingPunct="0">
-              <a:spcBef>
-                <a:spcPct val="20000"/>
-              </a:spcBef>
-              <a:spcAft>
-                <a:spcPct val="0"/>
-              </a:spcAft>
-              <a:buClr>
-                <a:schemeClr val="tx2"/>
-              </a:buClr>
-              <a:buChar char="•"/>
-              <a:defRPr sz="2000">
-                <a:solidFill>
-                  <a:schemeClr val="tx1"/>
-                </a:solidFill>
-                <a:latin typeface="Times New Roman" panose="02020603050405020304" pitchFamily="18" charset="0"/>
-              </a:defRPr>
-            </a:lvl7pPr>
-            <a:lvl8pPr marL="3429000" indent="-228600" eaLnBrk="0" fontAlgn="base" hangingPunct="0">
-              <a:spcBef>
-                <a:spcPct val="20000"/>
-              </a:spcBef>
-              <a:spcAft>
-                <a:spcPct val="0"/>
-              </a:spcAft>
-              <a:buClr>
-                <a:schemeClr val="tx2"/>
-              </a:buClr>
-              <a:buChar char="•"/>
-              <a:defRPr sz="2000">
-                <a:solidFill>
-                  <a:schemeClr val="tx1"/>
-                </a:solidFill>
-                <a:latin typeface="Times New Roman" panose="02020603050405020304" pitchFamily="18" charset="0"/>
-              </a:defRPr>
-            </a:lvl8pPr>
-            <a:lvl9pPr marL="3886200" indent="-228600" eaLnBrk="0" fontAlgn="base" hangingPunct="0">
-              <a:spcBef>
-                <a:spcPct val="20000"/>
-              </a:spcBef>
-              <a:spcAft>
-                <a:spcPct val="0"/>
-              </a:spcAft>
-              <a:buClr>
-                <a:schemeClr val="tx2"/>
-              </a:buClr>
-              <a:buChar char="•"/>
-              <a:defRPr sz="2000">
-                <a:solidFill>
-                  <a:schemeClr val="tx1"/>
-                </a:solidFill>
-                <a:latin typeface="Times New Roman" panose="02020603050405020304" pitchFamily="18" charset="0"/>
-              </a:defRPr>
-            </a:lvl9pPr>
-          </a:lstStyle>
-          <a:p>
-            <a:pPr>
-              <a:spcBef>
-                <a:spcPct val="0"/>
-              </a:spcBef>
-              <a:buClrTx/>
-              <a:buSzTx/>
-              <a:buFontTx/>
-              <a:buNone/>
-            </a:pPr>
-            <a:endParaRPr lang="en-US" altLang="en-US" sz="2400"/>
-          </a:p>
-        </p:txBody>
-      </p:sp>
-      <p:sp>
-        <p:nvSpPr>
-          <p:cNvPr id="23559" name="Rectangle 6">
-            <a:extLst>
-              <a:ext uri="{FF2B5EF4-FFF2-40B4-BE49-F238E27FC236}">
-                <a16:creationId xmlns:a16="http://schemas.microsoft.com/office/drawing/2014/main" id="{37EDA6CA-D76D-4066-A60B-8DD5E422BD56}"/>
-              </a:ext>
-            </a:extLst>
-          </p:cNvPr>
-          <p:cNvSpPr>
-            <a:spLocks noChangeArrowheads="1"/>
-          </p:cNvSpPr>
-          <p:nvPr/>
-        </p:nvSpPr>
-        <p:spPr bwMode="auto">
-          <a:xfrm>
-            <a:off x="2800350" y="2846388"/>
-            <a:ext cx="9144000" cy="0"/>
-          </a:xfrm>
-          <a:prstGeom prst="rect">
-            <a:avLst/>
-          </a:prstGeom>
-          <a:noFill/>
-          <a:ln>
-            <a:noFill/>
-          </a:ln>
-          <a:effectLst/>
-          <a:extLst>
-            <a:ext uri="{909E8E84-426E-40DD-AFC4-6F175D3DCCD1}">
-              <a14:hiddenFill xmlns:a14="http://schemas.microsoft.com/office/drawing/2010/main">
-                <a:solidFill>
-                  <a:schemeClr val="accent1"/>
-                </a:solidFill>
-              </a14:hiddenFill>
-            </a:ext>
-            <a:ext uri="{91240B29-F687-4F45-9708-019B960494DF}">
-              <a14:hiddenLine xmlns:a14="http://schemas.microsoft.com/office/drawing/2010/main" w="12700">
-                <a:solidFill>
-                  <a:schemeClr val="tx1"/>
-                </a:solidFill>
-                <a:miter lim="800000"/>
-                <a:headEnd type="none" w="sm" len="sm"/>
-                <a:tailEnd type="none" w="sm" len="sm"/>
-              </a14:hiddenLine>
-            </a:ext>
-            <a:ext uri="{AF507438-7753-43E0-B8FC-AC1667EBCBE1}">
-              <a14:hiddenEffects xmlns:a14="http://schemas.microsoft.com/office/drawing/2010/main">
-                <a:effectLst>
-                  <a:outerShdw dist="35921" dir="2700000" algn="ctr" rotWithShape="0">
-                    <a:schemeClr val="bg2"/>
-                  </a:outerShdw>
-                </a:effectLst>
-              </a14:hiddenEffects>
-            </a:ext>
-          </a:extLst>
-        </p:spPr>
-        <p:txBody>
-          <a:bodyPr>
-            <a:spAutoFit/>
-          </a:bodyPr>
-          <a:lstStyle>
-            <a:lvl1pPr>
-              <a:spcBef>
-                <a:spcPct val="20000"/>
-              </a:spcBef>
-              <a:buClr>
-                <a:schemeClr val="tx2"/>
-              </a:buClr>
-              <a:buSzPct val="75000"/>
-              <a:buFont typeface="Monotype Sorts" pitchFamily="2" charset="2"/>
-              <a:buChar char="F"/>
-              <a:defRPr sz="3200">
-                <a:solidFill>
-                  <a:schemeClr val="tx1"/>
-                </a:solidFill>
-                <a:latin typeface="Times New Roman" panose="02020603050405020304" pitchFamily="18" charset="0"/>
-              </a:defRPr>
-            </a:lvl1pPr>
-            <a:lvl2pPr marL="742950" indent="-285750">
-              <a:spcBef>
-                <a:spcPct val="20000"/>
-              </a:spcBef>
-              <a:buClr>
-                <a:schemeClr val="tx1"/>
-              </a:buClr>
-              <a:buChar char="–"/>
-              <a:defRPr sz="2800">
-                <a:solidFill>
-                  <a:schemeClr val="tx1"/>
-                </a:solidFill>
-                <a:latin typeface="Times New Roman" panose="02020603050405020304" pitchFamily="18" charset="0"/>
-              </a:defRPr>
-            </a:lvl2pPr>
-            <a:lvl3pPr marL="1143000" indent="-228600">
-              <a:spcBef>
-                <a:spcPct val="20000"/>
-              </a:spcBef>
-              <a:buClr>
-                <a:schemeClr val="accent2"/>
-              </a:buClr>
-              <a:buSzPct val="65000"/>
-              <a:buFont typeface="Monotype Sorts" pitchFamily="2" charset="2"/>
-              <a:buChar char="u"/>
-              <a:defRPr sz="2400">
-                <a:solidFill>
-                  <a:schemeClr val="tx1"/>
-                </a:solidFill>
-                <a:latin typeface="Times New Roman" panose="02020603050405020304" pitchFamily="18" charset="0"/>
-              </a:defRPr>
-            </a:lvl3pPr>
-            <a:lvl4pPr marL="1600200" indent="-228600">
-              <a:spcBef>
-                <a:spcPct val="20000"/>
-              </a:spcBef>
-              <a:buClr>
-                <a:schemeClr val="tx1"/>
-              </a:buClr>
-              <a:buChar char="–"/>
-              <a:defRPr sz="2000">
-                <a:solidFill>
-                  <a:schemeClr val="tx1"/>
-                </a:solidFill>
-                <a:latin typeface="Times New Roman" panose="02020603050405020304" pitchFamily="18" charset="0"/>
-              </a:defRPr>
-            </a:lvl4pPr>
-            <a:lvl5pPr marL="2057400" indent="-228600">
-              <a:spcBef>
-                <a:spcPct val="20000"/>
-              </a:spcBef>
-              <a:buClr>
-                <a:schemeClr val="tx2"/>
-              </a:buClr>
-              <a:buChar char="•"/>
-              <a:defRPr sz="2000">
-                <a:solidFill>
-                  <a:schemeClr val="tx1"/>
-                </a:solidFill>
-                <a:latin typeface="Times New Roman" panose="02020603050405020304" pitchFamily="18" charset="0"/>
-              </a:defRPr>
-            </a:lvl5pPr>
-            <a:lvl6pPr marL="2514600" indent="-228600" eaLnBrk="0" fontAlgn="base" hangingPunct="0">
-              <a:spcBef>
-                <a:spcPct val="20000"/>
-              </a:spcBef>
-              <a:spcAft>
-                <a:spcPct val="0"/>
-              </a:spcAft>
-              <a:buClr>
-                <a:schemeClr val="tx2"/>
-              </a:buClr>
-              <a:buChar char="•"/>
-              <a:defRPr sz="2000">
-                <a:solidFill>
-                  <a:schemeClr val="tx1"/>
-                </a:solidFill>
-                <a:latin typeface="Times New Roman" panose="02020603050405020304" pitchFamily="18" charset="0"/>
-              </a:defRPr>
-            </a:lvl6pPr>
-            <a:lvl7pPr marL="2971800" indent="-228600" eaLnBrk="0" fontAlgn="base" hangingPunct="0">
-              <a:spcBef>
-                <a:spcPct val="20000"/>
-              </a:spcBef>
-              <a:spcAft>
-                <a:spcPct val="0"/>
-              </a:spcAft>
-              <a:buClr>
-                <a:schemeClr val="tx2"/>
-              </a:buClr>
-              <a:buChar char="•"/>
-              <a:defRPr sz="2000">
-                <a:solidFill>
-                  <a:schemeClr val="tx1"/>
-                </a:solidFill>
-                <a:latin typeface="Times New Roman" panose="02020603050405020304" pitchFamily="18" charset="0"/>
-              </a:defRPr>
-            </a:lvl7pPr>
-            <a:lvl8pPr marL="3429000" indent="-228600" eaLnBrk="0" fontAlgn="base" hangingPunct="0">
-              <a:spcBef>
-                <a:spcPct val="20000"/>
-              </a:spcBef>
-              <a:spcAft>
-                <a:spcPct val="0"/>
-              </a:spcAft>
-              <a:buClr>
-                <a:schemeClr val="tx2"/>
-              </a:buClr>
-              <a:buChar char="•"/>
-              <a:defRPr sz="2000">
-                <a:solidFill>
-                  <a:schemeClr val="tx1"/>
-                </a:solidFill>
-                <a:latin typeface="Times New Roman" panose="02020603050405020304" pitchFamily="18" charset="0"/>
-              </a:defRPr>
-            </a:lvl8pPr>
-            <a:lvl9pPr marL="3886200" indent="-228600" eaLnBrk="0" fontAlgn="base" hangingPunct="0">
-              <a:spcBef>
-                <a:spcPct val="20000"/>
-              </a:spcBef>
-              <a:spcAft>
-                <a:spcPct val="0"/>
-              </a:spcAft>
-              <a:buClr>
-                <a:schemeClr val="tx2"/>
-              </a:buClr>
-              <a:buChar char="•"/>
-              <a:defRPr sz="2000">
-                <a:solidFill>
-                  <a:schemeClr val="tx1"/>
-                </a:solidFill>
-                <a:latin typeface="Times New Roman" panose="02020603050405020304" pitchFamily="18" charset="0"/>
-              </a:defRPr>
-            </a:lvl9pPr>
-          </a:lstStyle>
-          <a:p>
-            <a:pPr>
-              <a:spcBef>
-                <a:spcPct val="0"/>
-              </a:spcBef>
-              <a:buClrTx/>
-              <a:buSzTx/>
-              <a:buFontTx/>
-              <a:buNone/>
-            </a:pPr>
-            <a:endParaRPr lang="en-US" altLang="en-US" sz="2400"/>
-          </a:p>
-        </p:txBody>
-      </p:sp>
-      <p:pic>
-        <p:nvPicPr>
-          <p:cNvPr id="23560" name="Picture 10">
-            <a:extLst>
-              <a:ext uri="{FF2B5EF4-FFF2-40B4-BE49-F238E27FC236}">
-                <a16:creationId xmlns:a16="http://schemas.microsoft.com/office/drawing/2014/main" id="{14F35DFA-7CDA-4BF4-AC77-A26DD78CC5FC}"/>
-              </a:ext>
-            </a:extLst>
-          </p:cNvPr>
-          <p:cNvPicPr>
-            <a:picLocks noChangeAspect="1" noChangeArrowheads="1"/>
-          </p:cNvPicPr>
-          <p:nvPr/>
-        </p:nvPicPr>
-        <p:blipFill>
-          <a:blip r:embed="rId3">
-            <a:extLst>
-              <a:ext uri="{28A0092B-C50C-407E-A947-70E740481C1C}">
-                <a14:useLocalDpi xmlns:a14="http://schemas.microsoft.com/office/drawing/2010/main" val="0"/>
-              </a:ext>
-            </a:extLst>
-          </a:blip>
-          <a:srcRect/>
-          <a:stretch>
-            <a:fillRect/>
-          </a:stretch>
-        </p:blipFill>
-        <p:spPr bwMode="auto">
-          <a:xfrm>
-            <a:off x="533400" y="3657600"/>
-            <a:ext cx="7880350" cy="2101850"/>
           </a:xfrm>
           <a:prstGeom prst="rect">
             <a:avLst/>
@@ -31187,6 +33882,1305 @@
       </p:grpSpPr>
       <p:sp>
         <p:nvSpPr>
+          <p:cNvPr id="2" name="Title 1">
+            <a:extLst>
+              <a:ext uri="{FF2B5EF4-FFF2-40B4-BE49-F238E27FC236}">
+                <a16:creationId xmlns:a16="http://schemas.microsoft.com/office/drawing/2014/main" id="{F9FBA3DB-9573-4DF7-9989-7E04060B401E}"/>
+              </a:ext>
+            </a:extLst>
+          </p:cNvPr>
+          <p:cNvSpPr>
+            <a:spLocks noGrp="1"/>
+          </p:cNvSpPr>
+          <p:nvPr>
+            <p:ph type="title"/>
+          </p:nvPr>
+        </p:nvSpPr>
+        <p:spPr>
+          <a:xfrm>
+            <a:off x="457200" y="215371"/>
+            <a:ext cx="8229600" cy="1097279"/>
+          </a:xfrm>
+        </p:spPr>
+        <p:txBody>
+          <a:bodyPr/>
+          <a:lstStyle/>
+          <a:p>
+            <a:r>
+              <a:rPr lang="en-US"/>
+              <a:t>Implementing Map Using Hashing</a:t>
+            </a:r>
+          </a:p>
+        </p:txBody>
+      </p:sp>
+      <p:pic>
+        <p:nvPicPr>
+          <p:cNvPr id="6" name="Picture 5" descr="A diagram shows MyMap. For long description in Notes pane, press F6.">
+            <a:extLst>
+              <a:ext uri="{FF2B5EF4-FFF2-40B4-BE49-F238E27FC236}">
+                <a16:creationId xmlns:a16="http://schemas.microsoft.com/office/drawing/2014/main" id="{6055AA31-3063-4E9F-A839-186E6445CA70}"/>
+              </a:ext>
+            </a:extLst>
+          </p:cNvPr>
+          <p:cNvPicPr>
+            <a:picLocks noChangeAspect="1"/>
+          </p:cNvPicPr>
+          <p:nvPr/>
+        </p:nvPicPr>
+        <p:blipFill>
+          <a:blip r:embed="rId3"/>
+          <a:stretch>
+            <a:fillRect/>
+          </a:stretch>
+        </p:blipFill>
+        <p:spPr>
+          <a:xfrm>
+            <a:off x="1081952" y="1744455"/>
+            <a:ext cx="4494054" cy="4512103"/>
+          </a:xfrm>
+          <a:prstGeom prst="rect">
+            <a:avLst/>
+          </a:prstGeom>
+        </p:spPr>
+      </p:pic>
+      <p:sp>
+        <p:nvSpPr>
+          <p:cNvPr id="10" name="Text Placeholder 9">
+            <a:extLst>
+              <a:ext uri="{FF2B5EF4-FFF2-40B4-BE49-F238E27FC236}">
+                <a16:creationId xmlns:a16="http://schemas.microsoft.com/office/drawing/2014/main" id="{7CAAF094-6D47-4483-8FD3-AAA0CF359DAB}"/>
+              </a:ext>
+            </a:extLst>
+          </p:cNvPr>
+          <p:cNvSpPr>
+            <a:spLocks noGrp="1"/>
+          </p:cNvSpPr>
+          <p:nvPr>
+            <p:ph type="body" sz="quarter" idx="20"/>
+          </p:nvPr>
+        </p:nvSpPr>
+        <p:spPr>
+          <a:xfrm>
+            <a:off x="6666272" y="3300005"/>
+            <a:ext cx="1297858" cy="475840"/>
+          </a:xfrm>
+        </p:spPr>
+        <p:txBody>
+          <a:bodyPr/>
+          <a:lstStyle/>
+          <a:p>
+            <a:pPr marL="432" indent="0">
+              <a:buNone/>
+            </a:pPr>
+            <a:r>
+              <a:rPr lang="en-US" sz="2200" dirty="0">
+                <a:hlinkClick r:id="rId4" action="ppaction://hlinkfile" tooltip="https://liveexample.pearsoncmg.com/html/MyMap.html">
+                  <a:extLst>
+                    <a:ext uri="{A12FA001-AC4F-418D-AE19-62706E023703}">
+                      <ahyp:hlinkClr xmlns:ahyp="http://schemas.microsoft.com/office/drawing/2018/hyperlinkcolor" val="tx"/>
+                    </a:ext>
+                  </a:extLst>
+                </a:hlinkClick>
+              </a:rPr>
+              <a:t>MyMap</a:t>
+            </a:r>
+            <a:endParaRPr lang="en-US" sz="2200" dirty="0">
+              <a:hlinkClick r:id="rId5" tooltip="https://liveexample.pearsoncmg.com/html/MyMap.html">
+                <a:extLst>
+                  <a:ext uri="{A12FA001-AC4F-418D-AE19-62706E023703}">
+                    <ahyp:hlinkClr xmlns:ahyp="http://schemas.microsoft.com/office/drawing/2018/hyperlinkcolor" val="tx"/>
+                  </a:ext>
+                </a:extLst>
+              </a:hlinkClick>
+            </a:endParaRPr>
+          </a:p>
+        </p:txBody>
+      </p:sp>
+      <p:sp>
+        <p:nvSpPr>
+          <p:cNvPr id="11" name="Text Placeholder 10">
+            <a:extLst>
+              <a:ext uri="{FF2B5EF4-FFF2-40B4-BE49-F238E27FC236}">
+                <a16:creationId xmlns:a16="http://schemas.microsoft.com/office/drawing/2014/main" id="{0838F26E-BEAE-48A4-AE48-4E6E65A48BAF}"/>
+              </a:ext>
+            </a:extLst>
+          </p:cNvPr>
+          <p:cNvSpPr>
+            <a:spLocks noGrp="1"/>
+          </p:cNvSpPr>
+          <p:nvPr>
+            <p:ph type="body" sz="quarter" idx="21"/>
+          </p:nvPr>
+        </p:nvSpPr>
+        <p:spPr>
+          <a:xfrm>
+            <a:off x="6356555" y="4011819"/>
+            <a:ext cx="1991032" cy="501189"/>
+          </a:xfrm>
+        </p:spPr>
+        <p:txBody>
+          <a:bodyPr/>
+          <a:lstStyle/>
+          <a:p>
+            <a:pPr marL="432" indent="0">
+              <a:buNone/>
+            </a:pPr>
+            <a:r>
+              <a:rPr lang="en-US" altLang="en-US" sz="2200" dirty="0">
+                <a:hlinkClick r:id="rId6" action="ppaction://hlinkfile" tooltip="https://liveexample.pearsoncmg.com/html/MyHashMap.html">
+                  <a:extLst>
+                    <a:ext uri="{A12FA001-AC4F-418D-AE19-62706E023703}">
+                      <ahyp:hlinkClr xmlns:ahyp="http://schemas.microsoft.com/office/drawing/2018/hyperlinkcolor" val="tx"/>
+                    </a:ext>
+                  </a:extLst>
+                </a:hlinkClick>
+              </a:rPr>
+              <a:t>MyHashMap</a:t>
+            </a:r>
+            <a:endParaRPr lang="en-US" altLang="en-US" sz="2200" dirty="0">
+              <a:hlinkClick r:id="rId7" tooltip="https://liveexample.pearsoncmg.com/html/MyHashMap.html">
+                <a:extLst>
+                  <a:ext uri="{A12FA001-AC4F-418D-AE19-62706E023703}">
+                    <ahyp:hlinkClr xmlns:ahyp="http://schemas.microsoft.com/office/drawing/2018/hyperlinkcolor" val="tx"/>
+                  </a:ext>
+                </a:extLst>
+              </a:hlinkClick>
+            </a:endParaRPr>
+          </a:p>
+        </p:txBody>
+      </p:sp>
+      <p:sp>
+        <p:nvSpPr>
+          <p:cNvPr id="12" name="Text Placeholder 11">
+            <a:extLst>
+              <a:ext uri="{FF2B5EF4-FFF2-40B4-BE49-F238E27FC236}">
+                <a16:creationId xmlns:a16="http://schemas.microsoft.com/office/drawing/2014/main" id="{EDA60787-6D96-462F-A818-20BFB67C55F8}"/>
+              </a:ext>
+            </a:extLst>
+          </p:cNvPr>
+          <p:cNvSpPr>
+            <a:spLocks noGrp="1"/>
+          </p:cNvSpPr>
+          <p:nvPr>
+            <p:ph type="body" sz="quarter" idx="22"/>
+          </p:nvPr>
+        </p:nvSpPr>
+        <p:spPr>
+          <a:xfrm>
+            <a:off x="6061587" y="4747060"/>
+            <a:ext cx="2625213" cy="531966"/>
+          </a:xfrm>
+        </p:spPr>
+        <p:txBody>
+          <a:bodyPr/>
+          <a:lstStyle/>
+          <a:p>
+            <a:pPr marL="432" indent="0">
+              <a:buNone/>
+            </a:pPr>
+            <a:r>
+              <a:rPr lang="en-US" altLang="en-US" sz="2200" dirty="0">
+                <a:hlinkClick r:id="rId8" action="ppaction://hlinkfile" tooltip="https://liveexample.pearsoncmg.com/html/TestMyHashMap.html">
+                  <a:extLst>
+                    <a:ext uri="{A12FA001-AC4F-418D-AE19-62706E023703}">
+                      <ahyp:hlinkClr xmlns:ahyp="http://schemas.microsoft.com/office/drawing/2018/hyperlinkcolor" val="tx"/>
+                    </a:ext>
+                  </a:extLst>
+                </a:hlinkClick>
+              </a:rPr>
+              <a:t>TestMyHashMap</a:t>
+            </a:r>
+            <a:endParaRPr lang="en-US" altLang="en-US" sz="2200" dirty="0">
+              <a:hlinkClick r:id="rId9" tooltip="https://liveexample.pearsoncmg.com/html/TestMyHashMap.html">
+                <a:extLst>
+                  <a:ext uri="{A12FA001-AC4F-418D-AE19-62706E023703}">
+                    <ahyp:hlinkClr xmlns:ahyp="http://schemas.microsoft.com/office/drawing/2018/hyperlinkcolor" val="tx"/>
+                  </a:ext>
+                </a:extLst>
+              </a:hlinkClick>
+            </a:endParaRPr>
+          </a:p>
+        </p:txBody>
+      </p:sp>
+    </p:spTree>
+    <p:extLst>
+      <p:ext uri="{BB962C8B-B14F-4D97-AF65-F5344CB8AC3E}">
+        <p14:creationId xmlns:p14="http://schemas.microsoft.com/office/powerpoint/2010/main" val="3138843569"/>
+      </p:ext>
+    </p:extLst>
+  </p:cSld>
+  <p:clrMapOvr>
+    <a:masterClrMapping/>
+  </p:clrMapOvr>
+</p:sld>
+</file>
+
+<file path=ppt/slides/slide21.xml><?xml version="1.0" encoding="utf-8"?>
+<p:sld xmlns:a="http://schemas.openxmlformats.org/drawingml/2006/main" xmlns:r="http://schemas.openxmlformats.org/officeDocument/2006/relationships" xmlns:p="http://schemas.openxmlformats.org/presentationml/2006/main">
+  <p:cSld>
+    <p:spTree>
+      <p:nvGrpSpPr>
+        <p:cNvPr id="1" name=""/>
+        <p:cNvGrpSpPr/>
+        <p:nvPr/>
+      </p:nvGrpSpPr>
+      <p:grpSpPr>
+        <a:xfrm>
+          <a:off x="0" y="0"/>
+          <a:ext cx="0" cy="0"/>
+          <a:chOff x="0" y="0"/>
+          <a:chExt cx="0" cy="0"/>
+        </a:xfrm>
+      </p:grpSpPr>
+      <p:sp>
+        <p:nvSpPr>
+          <p:cNvPr id="23554" name="Slide Number Placeholder 4">
+            <a:extLst>
+              <a:ext uri="{FF2B5EF4-FFF2-40B4-BE49-F238E27FC236}">
+                <a16:creationId xmlns:a16="http://schemas.microsoft.com/office/drawing/2014/main" id="{6C1F7F2D-81BF-4514-A6B5-CE3288ED872E}"/>
+              </a:ext>
+            </a:extLst>
+          </p:cNvPr>
+          <p:cNvSpPr>
+            <a:spLocks noGrp="1"/>
+          </p:cNvSpPr>
+          <p:nvPr>
+            <p:ph type="sldNum" sz="quarter" idx="11"/>
+          </p:nvPr>
+        </p:nvSpPr>
+        <p:spPr>
+          <a:noFill/>
+        </p:spPr>
+        <p:txBody>
+          <a:bodyPr/>
+          <a:lstStyle>
+            <a:lvl1pPr>
+              <a:spcBef>
+                <a:spcPct val="20000"/>
+              </a:spcBef>
+              <a:buClr>
+                <a:schemeClr val="tx2"/>
+              </a:buClr>
+              <a:buSzPct val="75000"/>
+              <a:buFont typeface="Monotype Sorts" pitchFamily="2" charset="2"/>
+              <a:buChar char="F"/>
+              <a:defRPr sz="3200">
+                <a:solidFill>
+                  <a:schemeClr val="tx1"/>
+                </a:solidFill>
+                <a:latin typeface="Times New Roman" panose="02020603050405020304" pitchFamily="18" charset="0"/>
+              </a:defRPr>
+            </a:lvl1pPr>
+            <a:lvl2pPr marL="742950" indent="-285750">
+              <a:spcBef>
+                <a:spcPct val="20000"/>
+              </a:spcBef>
+              <a:buClr>
+                <a:schemeClr val="tx1"/>
+              </a:buClr>
+              <a:buChar char="–"/>
+              <a:defRPr sz="2800">
+                <a:solidFill>
+                  <a:schemeClr val="tx1"/>
+                </a:solidFill>
+                <a:latin typeface="Times New Roman" panose="02020603050405020304" pitchFamily="18" charset="0"/>
+              </a:defRPr>
+            </a:lvl2pPr>
+            <a:lvl3pPr marL="1143000" indent="-228600">
+              <a:spcBef>
+                <a:spcPct val="20000"/>
+              </a:spcBef>
+              <a:buClr>
+                <a:schemeClr val="accent2"/>
+              </a:buClr>
+              <a:buSzPct val="65000"/>
+              <a:buFont typeface="Monotype Sorts" pitchFamily="2" charset="2"/>
+              <a:buChar char="u"/>
+              <a:defRPr sz="2400">
+                <a:solidFill>
+                  <a:schemeClr val="tx1"/>
+                </a:solidFill>
+                <a:latin typeface="Times New Roman" panose="02020603050405020304" pitchFamily="18" charset="0"/>
+              </a:defRPr>
+            </a:lvl3pPr>
+            <a:lvl4pPr marL="1600200" indent="-228600">
+              <a:spcBef>
+                <a:spcPct val="20000"/>
+              </a:spcBef>
+              <a:buClr>
+                <a:schemeClr val="tx1"/>
+              </a:buClr>
+              <a:buChar char="–"/>
+              <a:defRPr sz="2000">
+                <a:solidFill>
+                  <a:schemeClr val="tx1"/>
+                </a:solidFill>
+                <a:latin typeface="Times New Roman" panose="02020603050405020304" pitchFamily="18" charset="0"/>
+              </a:defRPr>
+            </a:lvl4pPr>
+            <a:lvl5pPr marL="2057400" indent="-228600">
+              <a:spcBef>
+                <a:spcPct val="20000"/>
+              </a:spcBef>
+              <a:buClr>
+                <a:schemeClr val="tx2"/>
+              </a:buClr>
+              <a:buChar char="•"/>
+              <a:defRPr sz="2000">
+                <a:solidFill>
+                  <a:schemeClr val="tx1"/>
+                </a:solidFill>
+                <a:latin typeface="Times New Roman" panose="02020603050405020304" pitchFamily="18" charset="0"/>
+              </a:defRPr>
+            </a:lvl5pPr>
+            <a:lvl6pPr marL="2514600" indent="-228600" eaLnBrk="0" fontAlgn="base" hangingPunct="0">
+              <a:spcBef>
+                <a:spcPct val="20000"/>
+              </a:spcBef>
+              <a:spcAft>
+                <a:spcPct val="0"/>
+              </a:spcAft>
+              <a:buClr>
+                <a:schemeClr val="tx2"/>
+              </a:buClr>
+              <a:buChar char="•"/>
+              <a:defRPr sz="2000">
+                <a:solidFill>
+                  <a:schemeClr val="tx1"/>
+                </a:solidFill>
+                <a:latin typeface="Times New Roman" panose="02020603050405020304" pitchFamily="18" charset="0"/>
+              </a:defRPr>
+            </a:lvl6pPr>
+            <a:lvl7pPr marL="2971800" indent="-228600" eaLnBrk="0" fontAlgn="base" hangingPunct="0">
+              <a:spcBef>
+                <a:spcPct val="20000"/>
+              </a:spcBef>
+              <a:spcAft>
+                <a:spcPct val="0"/>
+              </a:spcAft>
+              <a:buClr>
+                <a:schemeClr val="tx2"/>
+              </a:buClr>
+              <a:buChar char="•"/>
+              <a:defRPr sz="2000">
+                <a:solidFill>
+                  <a:schemeClr val="tx1"/>
+                </a:solidFill>
+                <a:latin typeface="Times New Roman" panose="02020603050405020304" pitchFamily="18" charset="0"/>
+              </a:defRPr>
+            </a:lvl7pPr>
+            <a:lvl8pPr marL="3429000" indent="-228600" eaLnBrk="0" fontAlgn="base" hangingPunct="0">
+              <a:spcBef>
+                <a:spcPct val="20000"/>
+              </a:spcBef>
+              <a:spcAft>
+                <a:spcPct val="0"/>
+              </a:spcAft>
+              <a:buClr>
+                <a:schemeClr val="tx2"/>
+              </a:buClr>
+              <a:buChar char="•"/>
+              <a:defRPr sz="2000">
+                <a:solidFill>
+                  <a:schemeClr val="tx1"/>
+                </a:solidFill>
+                <a:latin typeface="Times New Roman" panose="02020603050405020304" pitchFamily="18" charset="0"/>
+              </a:defRPr>
+            </a:lvl8pPr>
+            <a:lvl9pPr marL="3886200" indent="-228600" eaLnBrk="0" fontAlgn="base" hangingPunct="0">
+              <a:spcBef>
+                <a:spcPct val="20000"/>
+              </a:spcBef>
+              <a:spcAft>
+                <a:spcPct val="0"/>
+              </a:spcAft>
+              <a:buClr>
+                <a:schemeClr val="tx2"/>
+              </a:buClr>
+              <a:buChar char="•"/>
+              <a:defRPr sz="2000">
+                <a:solidFill>
+                  <a:schemeClr val="tx1"/>
+                </a:solidFill>
+                <a:latin typeface="Times New Roman" panose="02020603050405020304" pitchFamily="18" charset="0"/>
+              </a:defRPr>
+            </a:lvl9pPr>
+          </a:lstStyle>
+          <a:p>
+            <a:pPr>
+              <a:spcBef>
+                <a:spcPct val="0"/>
+              </a:spcBef>
+              <a:buClrTx/>
+              <a:buSzTx/>
+              <a:buFontTx/>
+              <a:buNone/>
+            </a:pPr>
+            <a:fld id="{2B27D80D-4C74-4360-8897-E21683FA1BF6}" type="slidenum">
+              <a:rPr lang="en-US" altLang="en-US" sz="1400" smtClean="0"/>
+              <a:pPr>
+                <a:spcBef>
+                  <a:spcPct val="0"/>
+                </a:spcBef>
+                <a:buClrTx/>
+                <a:buSzTx/>
+                <a:buFontTx/>
+                <a:buNone/>
+              </a:pPr>
+              <a:t>21</a:t>
+            </a:fld>
+            <a:endParaRPr lang="en-US" altLang="en-US" sz="1400"/>
+          </a:p>
+        </p:txBody>
+      </p:sp>
+      <p:sp>
+        <p:nvSpPr>
+          <p:cNvPr id="23555" name="Rectangle 2">
+            <a:extLst>
+              <a:ext uri="{FF2B5EF4-FFF2-40B4-BE49-F238E27FC236}">
+                <a16:creationId xmlns:a16="http://schemas.microsoft.com/office/drawing/2014/main" id="{70194478-69A0-4493-909E-E5ABF3C4C8EE}"/>
+              </a:ext>
+            </a:extLst>
+          </p:cNvPr>
+          <p:cNvSpPr>
+            <a:spLocks noGrp="1" noChangeArrowheads="1"/>
+          </p:cNvSpPr>
+          <p:nvPr>
+            <p:ph type="title"/>
+          </p:nvPr>
+        </p:nvSpPr>
+        <p:spPr>
+          <a:xfrm>
+            <a:off x="685800" y="228600"/>
+            <a:ext cx="7924800" cy="1143000"/>
+          </a:xfrm>
+          <a:noFill/>
+        </p:spPr>
+        <p:txBody>
+          <a:bodyPr/>
+          <a:lstStyle/>
+          <a:p>
+            <a:r>
+              <a:rPr lang="en-US" altLang="en-US"/>
+              <a:t>Map Interface and Class Hierarchy</a:t>
+            </a:r>
+          </a:p>
+        </p:txBody>
+      </p:sp>
+      <p:sp>
+        <p:nvSpPr>
+          <p:cNvPr id="23556" name="Rectangle 3">
+            <a:extLst>
+              <a:ext uri="{FF2B5EF4-FFF2-40B4-BE49-F238E27FC236}">
+                <a16:creationId xmlns:a16="http://schemas.microsoft.com/office/drawing/2014/main" id="{3CD2CDC4-35B8-487F-B552-57F1605116A9}"/>
+              </a:ext>
+            </a:extLst>
+          </p:cNvPr>
+          <p:cNvSpPr>
+            <a:spLocks noChangeArrowheads="1"/>
+          </p:cNvSpPr>
+          <p:nvPr/>
+        </p:nvSpPr>
+        <p:spPr bwMode="auto">
+          <a:xfrm>
+            <a:off x="1741488" y="2084388"/>
+            <a:ext cx="9144000" cy="0"/>
+          </a:xfrm>
+          <a:prstGeom prst="rect">
+            <a:avLst/>
+          </a:prstGeom>
+          <a:noFill/>
+          <a:ln>
+            <a:noFill/>
+          </a:ln>
+          <a:effectLst/>
+          <a:extLst>
+            <a:ext uri="{909E8E84-426E-40DD-AFC4-6F175D3DCCD1}">
+              <a14:hiddenFill xmlns:a14="http://schemas.microsoft.com/office/drawing/2010/main">
+                <a:solidFill>
+                  <a:schemeClr val="accent1"/>
+                </a:solidFill>
+              </a14:hiddenFill>
+            </a:ext>
+            <a:ext uri="{91240B29-F687-4F45-9708-019B960494DF}">
+              <a14:hiddenLine xmlns:a14="http://schemas.microsoft.com/office/drawing/2010/main" w="12700">
+                <a:solidFill>
+                  <a:schemeClr val="tx1"/>
+                </a:solidFill>
+                <a:miter lim="800000"/>
+                <a:headEnd type="none" w="sm" len="sm"/>
+                <a:tailEnd type="none" w="sm" len="sm"/>
+              </a14:hiddenLine>
+            </a:ext>
+            <a:ext uri="{AF507438-7753-43E0-B8FC-AC1667EBCBE1}">
+              <a14:hiddenEffects xmlns:a14="http://schemas.microsoft.com/office/drawing/2010/main">
+                <a:effectLst>
+                  <a:outerShdw dist="35921" dir="2700000" algn="ctr" rotWithShape="0">
+                    <a:schemeClr val="bg2"/>
+                  </a:outerShdw>
+                </a:effectLst>
+              </a14:hiddenEffects>
+            </a:ext>
+          </a:extLst>
+        </p:spPr>
+        <p:txBody>
+          <a:bodyPr>
+            <a:spAutoFit/>
+          </a:bodyPr>
+          <a:lstStyle>
+            <a:lvl1pPr>
+              <a:spcBef>
+                <a:spcPct val="20000"/>
+              </a:spcBef>
+              <a:buClr>
+                <a:schemeClr val="tx2"/>
+              </a:buClr>
+              <a:buSzPct val="75000"/>
+              <a:buFont typeface="Monotype Sorts" pitchFamily="2" charset="2"/>
+              <a:buChar char="F"/>
+              <a:defRPr sz="3200">
+                <a:solidFill>
+                  <a:schemeClr val="tx1"/>
+                </a:solidFill>
+                <a:latin typeface="Times New Roman" panose="02020603050405020304" pitchFamily="18" charset="0"/>
+              </a:defRPr>
+            </a:lvl1pPr>
+            <a:lvl2pPr marL="742950" indent="-285750">
+              <a:spcBef>
+                <a:spcPct val="20000"/>
+              </a:spcBef>
+              <a:buClr>
+                <a:schemeClr val="tx1"/>
+              </a:buClr>
+              <a:buChar char="–"/>
+              <a:defRPr sz="2800">
+                <a:solidFill>
+                  <a:schemeClr val="tx1"/>
+                </a:solidFill>
+                <a:latin typeface="Times New Roman" panose="02020603050405020304" pitchFamily="18" charset="0"/>
+              </a:defRPr>
+            </a:lvl2pPr>
+            <a:lvl3pPr marL="1143000" indent="-228600">
+              <a:spcBef>
+                <a:spcPct val="20000"/>
+              </a:spcBef>
+              <a:buClr>
+                <a:schemeClr val="accent2"/>
+              </a:buClr>
+              <a:buSzPct val="65000"/>
+              <a:buFont typeface="Monotype Sorts" pitchFamily="2" charset="2"/>
+              <a:buChar char="u"/>
+              <a:defRPr sz="2400">
+                <a:solidFill>
+                  <a:schemeClr val="tx1"/>
+                </a:solidFill>
+                <a:latin typeface="Times New Roman" panose="02020603050405020304" pitchFamily="18" charset="0"/>
+              </a:defRPr>
+            </a:lvl3pPr>
+            <a:lvl4pPr marL="1600200" indent="-228600">
+              <a:spcBef>
+                <a:spcPct val="20000"/>
+              </a:spcBef>
+              <a:buClr>
+                <a:schemeClr val="tx1"/>
+              </a:buClr>
+              <a:buChar char="–"/>
+              <a:defRPr sz="2000">
+                <a:solidFill>
+                  <a:schemeClr val="tx1"/>
+                </a:solidFill>
+                <a:latin typeface="Times New Roman" panose="02020603050405020304" pitchFamily="18" charset="0"/>
+              </a:defRPr>
+            </a:lvl4pPr>
+            <a:lvl5pPr marL="2057400" indent="-228600">
+              <a:spcBef>
+                <a:spcPct val="20000"/>
+              </a:spcBef>
+              <a:buClr>
+                <a:schemeClr val="tx2"/>
+              </a:buClr>
+              <a:buChar char="•"/>
+              <a:defRPr sz="2000">
+                <a:solidFill>
+                  <a:schemeClr val="tx1"/>
+                </a:solidFill>
+                <a:latin typeface="Times New Roman" panose="02020603050405020304" pitchFamily="18" charset="0"/>
+              </a:defRPr>
+            </a:lvl5pPr>
+            <a:lvl6pPr marL="2514600" indent="-228600" eaLnBrk="0" fontAlgn="base" hangingPunct="0">
+              <a:spcBef>
+                <a:spcPct val="20000"/>
+              </a:spcBef>
+              <a:spcAft>
+                <a:spcPct val="0"/>
+              </a:spcAft>
+              <a:buClr>
+                <a:schemeClr val="tx2"/>
+              </a:buClr>
+              <a:buChar char="•"/>
+              <a:defRPr sz="2000">
+                <a:solidFill>
+                  <a:schemeClr val="tx1"/>
+                </a:solidFill>
+                <a:latin typeface="Times New Roman" panose="02020603050405020304" pitchFamily="18" charset="0"/>
+              </a:defRPr>
+            </a:lvl6pPr>
+            <a:lvl7pPr marL="2971800" indent="-228600" eaLnBrk="0" fontAlgn="base" hangingPunct="0">
+              <a:spcBef>
+                <a:spcPct val="20000"/>
+              </a:spcBef>
+              <a:spcAft>
+                <a:spcPct val="0"/>
+              </a:spcAft>
+              <a:buClr>
+                <a:schemeClr val="tx2"/>
+              </a:buClr>
+              <a:buChar char="•"/>
+              <a:defRPr sz="2000">
+                <a:solidFill>
+                  <a:schemeClr val="tx1"/>
+                </a:solidFill>
+                <a:latin typeface="Times New Roman" panose="02020603050405020304" pitchFamily="18" charset="0"/>
+              </a:defRPr>
+            </a:lvl7pPr>
+            <a:lvl8pPr marL="3429000" indent="-228600" eaLnBrk="0" fontAlgn="base" hangingPunct="0">
+              <a:spcBef>
+                <a:spcPct val="20000"/>
+              </a:spcBef>
+              <a:spcAft>
+                <a:spcPct val="0"/>
+              </a:spcAft>
+              <a:buClr>
+                <a:schemeClr val="tx2"/>
+              </a:buClr>
+              <a:buChar char="•"/>
+              <a:defRPr sz="2000">
+                <a:solidFill>
+                  <a:schemeClr val="tx1"/>
+                </a:solidFill>
+                <a:latin typeface="Times New Roman" panose="02020603050405020304" pitchFamily="18" charset="0"/>
+              </a:defRPr>
+            </a:lvl8pPr>
+            <a:lvl9pPr marL="3886200" indent="-228600" eaLnBrk="0" fontAlgn="base" hangingPunct="0">
+              <a:spcBef>
+                <a:spcPct val="20000"/>
+              </a:spcBef>
+              <a:spcAft>
+                <a:spcPct val="0"/>
+              </a:spcAft>
+              <a:buClr>
+                <a:schemeClr val="tx2"/>
+              </a:buClr>
+              <a:buChar char="•"/>
+              <a:defRPr sz="2000">
+                <a:solidFill>
+                  <a:schemeClr val="tx1"/>
+                </a:solidFill>
+                <a:latin typeface="Times New Roman" panose="02020603050405020304" pitchFamily="18" charset="0"/>
+              </a:defRPr>
+            </a:lvl9pPr>
+          </a:lstStyle>
+          <a:p>
+            <a:pPr>
+              <a:spcBef>
+                <a:spcPct val="0"/>
+              </a:spcBef>
+              <a:buClrTx/>
+              <a:buSzTx/>
+              <a:buFontTx/>
+              <a:buNone/>
+            </a:pPr>
+            <a:endParaRPr lang="en-US" altLang="en-US" sz="2400"/>
+          </a:p>
+        </p:txBody>
+      </p:sp>
+      <p:sp>
+        <p:nvSpPr>
+          <p:cNvPr id="23557" name="Rectangle 4">
+            <a:extLst>
+              <a:ext uri="{FF2B5EF4-FFF2-40B4-BE49-F238E27FC236}">
+                <a16:creationId xmlns:a16="http://schemas.microsoft.com/office/drawing/2014/main" id="{846C4515-6DAA-4CE5-BCEA-752CEF84CF72}"/>
+              </a:ext>
+            </a:extLst>
+          </p:cNvPr>
+          <p:cNvSpPr>
+            <a:spLocks noGrp="1" noChangeArrowheads="1"/>
+          </p:cNvSpPr>
+          <p:nvPr>
+            <p:ph type="body" idx="1"/>
+          </p:nvPr>
+        </p:nvSpPr>
+        <p:spPr>
+          <a:xfrm>
+            <a:off x="457200" y="1676400"/>
+            <a:ext cx="8534400" cy="1752600"/>
+          </a:xfrm>
+          <a:noFill/>
+        </p:spPr>
+        <p:txBody>
+          <a:bodyPr/>
+          <a:lstStyle/>
+          <a:p>
+            <a:pPr marL="0" indent="0">
+              <a:lnSpc>
+                <a:spcPct val="90000"/>
+              </a:lnSpc>
+              <a:buFont typeface="Monotype Sorts" pitchFamily="2" charset="2"/>
+              <a:buNone/>
+            </a:pPr>
+            <a:r>
+              <a:rPr lang="en-US" altLang="en-US" sz="2800">
+                <a:cs typeface="Times New Roman" panose="02020603050405020304" pitchFamily="18" charset="0"/>
+              </a:rPr>
+              <a:t>An instance of Map represents a group of objects, each of which is associated with a key. You can get the object from a map using a key, and you have to use a key to put the object into the map. </a:t>
+            </a:r>
+            <a:endParaRPr lang="en-US" altLang="en-US" sz="2800" noProof="1">
+              <a:cs typeface="Times New Roman" panose="02020603050405020304" pitchFamily="18" charset="0"/>
+            </a:endParaRPr>
+          </a:p>
+        </p:txBody>
+      </p:sp>
+      <p:sp>
+        <p:nvSpPr>
+          <p:cNvPr id="23558" name="Rectangle 5">
+            <a:extLst>
+              <a:ext uri="{FF2B5EF4-FFF2-40B4-BE49-F238E27FC236}">
+                <a16:creationId xmlns:a16="http://schemas.microsoft.com/office/drawing/2014/main" id="{C0C48422-6929-4B69-80EA-DD86D44E35E8}"/>
+              </a:ext>
+            </a:extLst>
+          </p:cNvPr>
+          <p:cNvSpPr>
+            <a:spLocks noChangeArrowheads="1"/>
+          </p:cNvSpPr>
+          <p:nvPr/>
+        </p:nvSpPr>
+        <p:spPr bwMode="auto">
+          <a:xfrm>
+            <a:off x="3227388" y="2713038"/>
+            <a:ext cx="9144000" cy="0"/>
+          </a:xfrm>
+          <a:prstGeom prst="rect">
+            <a:avLst/>
+          </a:prstGeom>
+          <a:noFill/>
+          <a:ln>
+            <a:noFill/>
+          </a:ln>
+          <a:effectLst/>
+          <a:extLst>
+            <a:ext uri="{909E8E84-426E-40DD-AFC4-6F175D3DCCD1}">
+              <a14:hiddenFill xmlns:a14="http://schemas.microsoft.com/office/drawing/2010/main">
+                <a:solidFill>
+                  <a:schemeClr val="accent1"/>
+                </a:solidFill>
+              </a14:hiddenFill>
+            </a:ext>
+            <a:ext uri="{91240B29-F687-4F45-9708-019B960494DF}">
+              <a14:hiddenLine xmlns:a14="http://schemas.microsoft.com/office/drawing/2010/main" w="12700">
+                <a:solidFill>
+                  <a:schemeClr val="tx1"/>
+                </a:solidFill>
+                <a:miter lim="800000"/>
+                <a:headEnd type="none" w="sm" len="sm"/>
+                <a:tailEnd type="none" w="sm" len="sm"/>
+              </a14:hiddenLine>
+            </a:ext>
+            <a:ext uri="{AF507438-7753-43E0-B8FC-AC1667EBCBE1}">
+              <a14:hiddenEffects xmlns:a14="http://schemas.microsoft.com/office/drawing/2010/main">
+                <a:effectLst>
+                  <a:outerShdw dist="35921" dir="2700000" algn="ctr" rotWithShape="0">
+                    <a:schemeClr val="bg2"/>
+                  </a:outerShdw>
+                </a:effectLst>
+              </a14:hiddenEffects>
+            </a:ext>
+          </a:extLst>
+        </p:spPr>
+        <p:txBody>
+          <a:bodyPr>
+            <a:spAutoFit/>
+          </a:bodyPr>
+          <a:lstStyle>
+            <a:lvl1pPr>
+              <a:spcBef>
+                <a:spcPct val="20000"/>
+              </a:spcBef>
+              <a:buClr>
+                <a:schemeClr val="tx2"/>
+              </a:buClr>
+              <a:buSzPct val="75000"/>
+              <a:buFont typeface="Monotype Sorts" pitchFamily="2" charset="2"/>
+              <a:buChar char="F"/>
+              <a:defRPr sz="3200">
+                <a:solidFill>
+                  <a:schemeClr val="tx1"/>
+                </a:solidFill>
+                <a:latin typeface="Times New Roman" panose="02020603050405020304" pitchFamily="18" charset="0"/>
+              </a:defRPr>
+            </a:lvl1pPr>
+            <a:lvl2pPr marL="742950" indent="-285750">
+              <a:spcBef>
+                <a:spcPct val="20000"/>
+              </a:spcBef>
+              <a:buClr>
+                <a:schemeClr val="tx1"/>
+              </a:buClr>
+              <a:buChar char="–"/>
+              <a:defRPr sz="2800">
+                <a:solidFill>
+                  <a:schemeClr val="tx1"/>
+                </a:solidFill>
+                <a:latin typeface="Times New Roman" panose="02020603050405020304" pitchFamily="18" charset="0"/>
+              </a:defRPr>
+            </a:lvl2pPr>
+            <a:lvl3pPr marL="1143000" indent="-228600">
+              <a:spcBef>
+                <a:spcPct val="20000"/>
+              </a:spcBef>
+              <a:buClr>
+                <a:schemeClr val="accent2"/>
+              </a:buClr>
+              <a:buSzPct val="65000"/>
+              <a:buFont typeface="Monotype Sorts" pitchFamily="2" charset="2"/>
+              <a:buChar char="u"/>
+              <a:defRPr sz="2400">
+                <a:solidFill>
+                  <a:schemeClr val="tx1"/>
+                </a:solidFill>
+                <a:latin typeface="Times New Roman" panose="02020603050405020304" pitchFamily="18" charset="0"/>
+              </a:defRPr>
+            </a:lvl3pPr>
+            <a:lvl4pPr marL="1600200" indent="-228600">
+              <a:spcBef>
+                <a:spcPct val="20000"/>
+              </a:spcBef>
+              <a:buClr>
+                <a:schemeClr val="tx1"/>
+              </a:buClr>
+              <a:buChar char="–"/>
+              <a:defRPr sz="2000">
+                <a:solidFill>
+                  <a:schemeClr val="tx1"/>
+                </a:solidFill>
+                <a:latin typeface="Times New Roman" panose="02020603050405020304" pitchFamily="18" charset="0"/>
+              </a:defRPr>
+            </a:lvl4pPr>
+            <a:lvl5pPr marL="2057400" indent="-228600">
+              <a:spcBef>
+                <a:spcPct val="20000"/>
+              </a:spcBef>
+              <a:buClr>
+                <a:schemeClr val="tx2"/>
+              </a:buClr>
+              <a:buChar char="•"/>
+              <a:defRPr sz="2000">
+                <a:solidFill>
+                  <a:schemeClr val="tx1"/>
+                </a:solidFill>
+                <a:latin typeface="Times New Roman" panose="02020603050405020304" pitchFamily="18" charset="0"/>
+              </a:defRPr>
+            </a:lvl5pPr>
+            <a:lvl6pPr marL="2514600" indent="-228600" eaLnBrk="0" fontAlgn="base" hangingPunct="0">
+              <a:spcBef>
+                <a:spcPct val="20000"/>
+              </a:spcBef>
+              <a:spcAft>
+                <a:spcPct val="0"/>
+              </a:spcAft>
+              <a:buClr>
+                <a:schemeClr val="tx2"/>
+              </a:buClr>
+              <a:buChar char="•"/>
+              <a:defRPr sz="2000">
+                <a:solidFill>
+                  <a:schemeClr val="tx1"/>
+                </a:solidFill>
+                <a:latin typeface="Times New Roman" panose="02020603050405020304" pitchFamily="18" charset="0"/>
+              </a:defRPr>
+            </a:lvl6pPr>
+            <a:lvl7pPr marL="2971800" indent="-228600" eaLnBrk="0" fontAlgn="base" hangingPunct="0">
+              <a:spcBef>
+                <a:spcPct val="20000"/>
+              </a:spcBef>
+              <a:spcAft>
+                <a:spcPct val="0"/>
+              </a:spcAft>
+              <a:buClr>
+                <a:schemeClr val="tx2"/>
+              </a:buClr>
+              <a:buChar char="•"/>
+              <a:defRPr sz="2000">
+                <a:solidFill>
+                  <a:schemeClr val="tx1"/>
+                </a:solidFill>
+                <a:latin typeface="Times New Roman" panose="02020603050405020304" pitchFamily="18" charset="0"/>
+              </a:defRPr>
+            </a:lvl7pPr>
+            <a:lvl8pPr marL="3429000" indent="-228600" eaLnBrk="0" fontAlgn="base" hangingPunct="0">
+              <a:spcBef>
+                <a:spcPct val="20000"/>
+              </a:spcBef>
+              <a:spcAft>
+                <a:spcPct val="0"/>
+              </a:spcAft>
+              <a:buClr>
+                <a:schemeClr val="tx2"/>
+              </a:buClr>
+              <a:buChar char="•"/>
+              <a:defRPr sz="2000">
+                <a:solidFill>
+                  <a:schemeClr val="tx1"/>
+                </a:solidFill>
+                <a:latin typeface="Times New Roman" panose="02020603050405020304" pitchFamily="18" charset="0"/>
+              </a:defRPr>
+            </a:lvl8pPr>
+            <a:lvl9pPr marL="3886200" indent="-228600" eaLnBrk="0" fontAlgn="base" hangingPunct="0">
+              <a:spcBef>
+                <a:spcPct val="20000"/>
+              </a:spcBef>
+              <a:spcAft>
+                <a:spcPct val="0"/>
+              </a:spcAft>
+              <a:buClr>
+                <a:schemeClr val="tx2"/>
+              </a:buClr>
+              <a:buChar char="•"/>
+              <a:defRPr sz="2000">
+                <a:solidFill>
+                  <a:schemeClr val="tx1"/>
+                </a:solidFill>
+                <a:latin typeface="Times New Roman" panose="02020603050405020304" pitchFamily="18" charset="0"/>
+              </a:defRPr>
+            </a:lvl9pPr>
+          </a:lstStyle>
+          <a:p>
+            <a:pPr>
+              <a:spcBef>
+                <a:spcPct val="0"/>
+              </a:spcBef>
+              <a:buClrTx/>
+              <a:buSzTx/>
+              <a:buFontTx/>
+              <a:buNone/>
+            </a:pPr>
+            <a:endParaRPr lang="en-US" altLang="en-US" sz="2400"/>
+          </a:p>
+        </p:txBody>
+      </p:sp>
+      <p:sp>
+        <p:nvSpPr>
+          <p:cNvPr id="23559" name="Rectangle 6">
+            <a:extLst>
+              <a:ext uri="{FF2B5EF4-FFF2-40B4-BE49-F238E27FC236}">
+                <a16:creationId xmlns:a16="http://schemas.microsoft.com/office/drawing/2014/main" id="{37EDA6CA-D76D-4066-A60B-8DD5E422BD56}"/>
+              </a:ext>
+            </a:extLst>
+          </p:cNvPr>
+          <p:cNvSpPr>
+            <a:spLocks noChangeArrowheads="1"/>
+          </p:cNvSpPr>
+          <p:nvPr/>
+        </p:nvSpPr>
+        <p:spPr bwMode="auto">
+          <a:xfrm>
+            <a:off x="2800350" y="2846388"/>
+            <a:ext cx="9144000" cy="0"/>
+          </a:xfrm>
+          <a:prstGeom prst="rect">
+            <a:avLst/>
+          </a:prstGeom>
+          <a:noFill/>
+          <a:ln>
+            <a:noFill/>
+          </a:ln>
+          <a:effectLst/>
+          <a:extLst>
+            <a:ext uri="{909E8E84-426E-40DD-AFC4-6F175D3DCCD1}">
+              <a14:hiddenFill xmlns:a14="http://schemas.microsoft.com/office/drawing/2010/main">
+                <a:solidFill>
+                  <a:schemeClr val="accent1"/>
+                </a:solidFill>
+              </a14:hiddenFill>
+            </a:ext>
+            <a:ext uri="{91240B29-F687-4F45-9708-019B960494DF}">
+              <a14:hiddenLine xmlns:a14="http://schemas.microsoft.com/office/drawing/2010/main" w="12700">
+                <a:solidFill>
+                  <a:schemeClr val="tx1"/>
+                </a:solidFill>
+                <a:miter lim="800000"/>
+                <a:headEnd type="none" w="sm" len="sm"/>
+                <a:tailEnd type="none" w="sm" len="sm"/>
+              </a14:hiddenLine>
+            </a:ext>
+            <a:ext uri="{AF507438-7753-43E0-B8FC-AC1667EBCBE1}">
+              <a14:hiddenEffects xmlns:a14="http://schemas.microsoft.com/office/drawing/2010/main">
+                <a:effectLst>
+                  <a:outerShdw dist="35921" dir="2700000" algn="ctr" rotWithShape="0">
+                    <a:schemeClr val="bg2"/>
+                  </a:outerShdw>
+                </a:effectLst>
+              </a14:hiddenEffects>
+            </a:ext>
+          </a:extLst>
+        </p:spPr>
+        <p:txBody>
+          <a:bodyPr>
+            <a:spAutoFit/>
+          </a:bodyPr>
+          <a:lstStyle>
+            <a:lvl1pPr>
+              <a:spcBef>
+                <a:spcPct val="20000"/>
+              </a:spcBef>
+              <a:buClr>
+                <a:schemeClr val="tx2"/>
+              </a:buClr>
+              <a:buSzPct val="75000"/>
+              <a:buFont typeface="Monotype Sorts" pitchFamily="2" charset="2"/>
+              <a:buChar char="F"/>
+              <a:defRPr sz="3200">
+                <a:solidFill>
+                  <a:schemeClr val="tx1"/>
+                </a:solidFill>
+                <a:latin typeface="Times New Roman" panose="02020603050405020304" pitchFamily="18" charset="0"/>
+              </a:defRPr>
+            </a:lvl1pPr>
+            <a:lvl2pPr marL="742950" indent="-285750">
+              <a:spcBef>
+                <a:spcPct val="20000"/>
+              </a:spcBef>
+              <a:buClr>
+                <a:schemeClr val="tx1"/>
+              </a:buClr>
+              <a:buChar char="–"/>
+              <a:defRPr sz="2800">
+                <a:solidFill>
+                  <a:schemeClr val="tx1"/>
+                </a:solidFill>
+                <a:latin typeface="Times New Roman" panose="02020603050405020304" pitchFamily="18" charset="0"/>
+              </a:defRPr>
+            </a:lvl2pPr>
+            <a:lvl3pPr marL="1143000" indent="-228600">
+              <a:spcBef>
+                <a:spcPct val="20000"/>
+              </a:spcBef>
+              <a:buClr>
+                <a:schemeClr val="accent2"/>
+              </a:buClr>
+              <a:buSzPct val="65000"/>
+              <a:buFont typeface="Monotype Sorts" pitchFamily="2" charset="2"/>
+              <a:buChar char="u"/>
+              <a:defRPr sz="2400">
+                <a:solidFill>
+                  <a:schemeClr val="tx1"/>
+                </a:solidFill>
+                <a:latin typeface="Times New Roman" panose="02020603050405020304" pitchFamily="18" charset="0"/>
+              </a:defRPr>
+            </a:lvl3pPr>
+            <a:lvl4pPr marL="1600200" indent="-228600">
+              <a:spcBef>
+                <a:spcPct val="20000"/>
+              </a:spcBef>
+              <a:buClr>
+                <a:schemeClr val="tx1"/>
+              </a:buClr>
+              <a:buChar char="–"/>
+              <a:defRPr sz="2000">
+                <a:solidFill>
+                  <a:schemeClr val="tx1"/>
+                </a:solidFill>
+                <a:latin typeface="Times New Roman" panose="02020603050405020304" pitchFamily="18" charset="0"/>
+              </a:defRPr>
+            </a:lvl4pPr>
+            <a:lvl5pPr marL="2057400" indent="-228600">
+              <a:spcBef>
+                <a:spcPct val="20000"/>
+              </a:spcBef>
+              <a:buClr>
+                <a:schemeClr val="tx2"/>
+              </a:buClr>
+              <a:buChar char="•"/>
+              <a:defRPr sz="2000">
+                <a:solidFill>
+                  <a:schemeClr val="tx1"/>
+                </a:solidFill>
+                <a:latin typeface="Times New Roman" panose="02020603050405020304" pitchFamily="18" charset="0"/>
+              </a:defRPr>
+            </a:lvl5pPr>
+            <a:lvl6pPr marL="2514600" indent="-228600" eaLnBrk="0" fontAlgn="base" hangingPunct="0">
+              <a:spcBef>
+                <a:spcPct val="20000"/>
+              </a:spcBef>
+              <a:spcAft>
+                <a:spcPct val="0"/>
+              </a:spcAft>
+              <a:buClr>
+                <a:schemeClr val="tx2"/>
+              </a:buClr>
+              <a:buChar char="•"/>
+              <a:defRPr sz="2000">
+                <a:solidFill>
+                  <a:schemeClr val="tx1"/>
+                </a:solidFill>
+                <a:latin typeface="Times New Roman" panose="02020603050405020304" pitchFamily="18" charset="0"/>
+              </a:defRPr>
+            </a:lvl6pPr>
+            <a:lvl7pPr marL="2971800" indent="-228600" eaLnBrk="0" fontAlgn="base" hangingPunct="0">
+              <a:spcBef>
+                <a:spcPct val="20000"/>
+              </a:spcBef>
+              <a:spcAft>
+                <a:spcPct val="0"/>
+              </a:spcAft>
+              <a:buClr>
+                <a:schemeClr val="tx2"/>
+              </a:buClr>
+              <a:buChar char="•"/>
+              <a:defRPr sz="2000">
+                <a:solidFill>
+                  <a:schemeClr val="tx1"/>
+                </a:solidFill>
+                <a:latin typeface="Times New Roman" panose="02020603050405020304" pitchFamily="18" charset="0"/>
+              </a:defRPr>
+            </a:lvl7pPr>
+            <a:lvl8pPr marL="3429000" indent="-228600" eaLnBrk="0" fontAlgn="base" hangingPunct="0">
+              <a:spcBef>
+                <a:spcPct val="20000"/>
+              </a:spcBef>
+              <a:spcAft>
+                <a:spcPct val="0"/>
+              </a:spcAft>
+              <a:buClr>
+                <a:schemeClr val="tx2"/>
+              </a:buClr>
+              <a:buChar char="•"/>
+              <a:defRPr sz="2000">
+                <a:solidFill>
+                  <a:schemeClr val="tx1"/>
+                </a:solidFill>
+                <a:latin typeface="Times New Roman" panose="02020603050405020304" pitchFamily="18" charset="0"/>
+              </a:defRPr>
+            </a:lvl8pPr>
+            <a:lvl9pPr marL="3886200" indent="-228600" eaLnBrk="0" fontAlgn="base" hangingPunct="0">
+              <a:spcBef>
+                <a:spcPct val="20000"/>
+              </a:spcBef>
+              <a:spcAft>
+                <a:spcPct val="0"/>
+              </a:spcAft>
+              <a:buClr>
+                <a:schemeClr val="tx2"/>
+              </a:buClr>
+              <a:buChar char="•"/>
+              <a:defRPr sz="2000">
+                <a:solidFill>
+                  <a:schemeClr val="tx1"/>
+                </a:solidFill>
+                <a:latin typeface="Times New Roman" panose="02020603050405020304" pitchFamily="18" charset="0"/>
+              </a:defRPr>
+            </a:lvl9pPr>
+          </a:lstStyle>
+          <a:p>
+            <a:pPr>
+              <a:spcBef>
+                <a:spcPct val="0"/>
+              </a:spcBef>
+              <a:buClrTx/>
+              <a:buSzTx/>
+              <a:buFontTx/>
+              <a:buNone/>
+            </a:pPr>
+            <a:endParaRPr lang="en-US" altLang="en-US" sz="2400"/>
+          </a:p>
+        </p:txBody>
+      </p:sp>
+      <p:pic>
+        <p:nvPicPr>
+          <p:cNvPr id="23560" name="Picture 10">
+            <a:extLst>
+              <a:ext uri="{FF2B5EF4-FFF2-40B4-BE49-F238E27FC236}">
+                <a16:creationId xmlns:a16="http://schemas.microsoft.com/office/drawing/2014/main" id="{14F35DFA-7CDA-4BF4-AC77-A26DD78CC5FC}"/>
+              </a:ext>
+            </a:extLst>
+          </p:cNvPr>
+          <p:cNvPicPr>
+            <a:picLocks noChangeAspect="1" noChangeArrowheads="1"/>
+          </p:cNvPicPr>
+          <p:nvPr/>
+        </p:nvPicPr>
+        <p:blipFill>
+          <a:blip r:embed="rId3">
+            <a:extLst>
+              <a:ext uri="{28A0092B-C50C-407E-A947-70E740481C1C}">
+                <a14:useLocalDpi xmlns:a14="http://schemas.microsoft.com/office/drawing/2010/main" val="0"/>
+              </a:ext>
+            </a:extLst>
+          </a:blip>
+          <a:srcRect/>
+          <a:stretch>
+            <a:fillRect/>
+          </a:stretch>
+        </p:blipFill>
+        <p:spPr bwMode="auto">
+          <a:xfrm>
+            <a:off x="533400" y="3657600"/>
+            <a:ext cx="7880350" cy="2101850"/>
+          </a:xfrm>
+          <a:prstGeom prst="rect">
+            <a:avLst/>
+          </a:prstGeom>
+          <a:noFill/>
+          <a:ln>
+            <a:noFill/>
+          </a:ln>
+          <a:extLst>
+            <a:ext uri="{909E8E84-426E-40DD-AFC4-6F175D3DCCD1}">
+              <a14:hiddenFill xmlns:a14="http://schemas.microsoft.com/office/drawing/2010/main">
+                <a:solidFill>
+                  <a:schemeClr val="accent1"/>
+                </a:solidFill>
+              </a14:hiddenFill>
+            </a:ext>
+            <a:ext uri="{91240B29-F687-4F45-9708-019B960494DF}">
+              <a14:hiddenLine xmlns:a14="http://schemas.microsoft.com/office/drawing/2010/main" w="12700">
+                <a:solidFill>
+                  <a:schemeClr val="tx1"/>
+                </a:solidFill>
+                <a:miter lim="800000"/>
+                <a:headEnd type="none" w="sm" len="sm"/>
+                <a:tailEnd type="none" w="sm" len="sm"/>
+              </a14:hiddenLine>
+            </a:ext>
+          </a:extLst>
+        </p:spPr>
+      </p:pic>
+    </p:spTree>
+  </p:cSld>
+  <p:clrMapOvr>
+    <a:masterClrMapping/>
+  </p:clrMapOvr>
+</p:sld>
+</file>
+
+<file path=ppt/slides/slide22.xml><?xml version="1.0" encoding="utf-8"?>
+<p:sld xmlns:a="http://schemas.openxmlformats.org/drawingml/2006/main" xmlns:r="http://schemas.openxmlformats.org/officeDocument/2006/relationships" xmlns:p="http://schemas.openxmlformats.org/presentationml/2006/main">
+  <p:cSld>
+    <p:spTree>
+      <p:nvGrpSpPr>
+        <p:cNvPr id="1" name=""/>
+        <p:cNvGrpSpPr/>
+        <p:nvPr/>
+      </p:nvGrpSpPr>
+      <p:grpSpPr>
+        <a:xfrm>
+          <a:off x="0" y="0"/>
+          <a:ext cx="0" cy="0"/>
+          <a:chOff x="0" y="0"/>
+          <a:chExt cx="0" cy="0"/>
+        </a:xfrm>
+      </p:grpSpPr>
+      <p:sp>
+        <p:nvSpPr>
           <p:cNvPr id="24578" name="Slide Number Placeholder 4">
             <a:extLst>
               <a:ext uri="{FF2B5EF4-FFF2-40B4-BE49-F238E27FC236}">
@@ -31380,7 +35374,7 @@
                 <a:buFontTx/>
                 <a:buNone/>
               </a:pPr>
-              <a:t>20</a:t>
+              <a:t>22</a:t>
             </a:fld>
             <a:endParaRPr lang="en-US" altLang="en-US" sz="1400"/>
           </a:p>
@@ -33079,7 +37073,7 @@
 </p:sld>
 </file>
 
-<file path=ppt/slides/slide21.xml><?xml version="1.0" encoding="utf-8"?>
+<file path=ppt/slides/slide23.xml><?xml version="1.0" encoding="utf-8"?>
 <p:sld xmlns:a="http://schemas.openxmlformats.org/drawingml/2006/main" xmlns:r="http://schemas.openxmlformats.org/officeDocument/2006/relationships" xmlns:p="http://schemas.openxmlformats.org/presentationml/2006/main">
   <p:cSld>
     <p:spTree>
@@ -33291,7 +37285,7 @@
                 <a:buFontTx/>
                 <a:buNone/>
               </a:pPr>
-              <a:t>21</a:t>
+              <a:t>23</a:t>
             </a:fld>
             <a:endParaRPr lang="en-US" altLang="en-US" sz="1400"/>
           </a:p>
@@ -35217,7 +39211,7 @@
 </p:sld>
 </file>
 
-<file path=ppt/slides/slide22.xml><?xml version="1.0" encoding="utf-8"?>
+<file path=ppt/slides/slide24.xml><?xml version="1.0" encoding="utf-8"?>
 <p:sld xmlns:a="http://schemas.openxmlformats.org/drawingml/2006/main" xmlns:r="http://schemas.openxmlformats.org/officeDocument/2006/relationships" xmlns:p="http://schemas.openxmlformats.org/presentationml/2006/main">
   <p:cSld>
     <p:spTree>
@@ -35429,7 +39423,7 @@
                 <a:buFontTx/>
                 <a:buNone/>
               </a:pPr>
-              <a:t>22</a:t>
+              <a:t>24</a:t>
             </a:fld>
             <a:endParaRPr lang="en-US" altLang="en-US" sz="1400"/>
           </a:p>
@@ -36654,7 +40648,7 @@
 </p:sld>
 </file>
 
-<file path=ppt/slides/slide23.xml><?xml version="1.0" encoding="utf-8"?>
+<file path=ppt/slides/slide25.xml><?xml version="1.0" encoding="utf-8"?>
 <p:sld xmlns:a="http://schemas.openxmlformats.org/drawingml/2006/main" xmlns:r="http://schemas.openxmlformats.org/officeDocument/2006/relationships" xmlns:p="http://schemas.openxmlformats.org/presentationml/2006/main">
   <p:cSld>
     <p:spTree>
@@ -36866,7 +40860,7 @@
                 <a:buFontTx/>
                 <a:buNone/>
               </a:pPr>
-              <a:t>23</a:t>
+              <a:t>25</a:t>
             </a:fld>
             <a:endParaRPr lang="en-US" altLang="en-US" sz="1400"/>
           </a:p>
@@ -38315,7 +42309,7 @@
 </p:sld>
 </file>
 
-<file path=ppt/slides/slide24.xml><?xml version="1.0" encoding="utf-8"?>
+<file path=ppt/slides/slide26.xml><?xml version="1.0" encoding="utf-8"?>
 <p:sld xmlns:a="http://schemas.openxmlformats.org/drawingml/2006/main" xmlns:r="http://schemas.openxmlformats.org/officeDocument/2006/relationships" xmlns:p="http://schemas.openxmlformats.org/presentationml/2006/main">
   <p:cSld>
     <p:spTree>
@@ -38527,7 +42521,7 @@
                 <a:buFontTx/>
                 <a:buNone/>
               </a:pPr>
-              <a:t>24</a:t>
+              <a:t>26</a:t>
             </a:fld>
             <a:endParaRPr lang="en-US" altLang="en-US" sz="1400"/>
           </a:p>
@@ -40803,14 +44797,14 @@
           <a:effectLst/>
           <a:extLst>
             <a:ext uri="{909E8E84-426E-40dd-AFC4-6F175D3DCCD1}">
-              <a14:hiddenFill xmlns:a14="http://schemas.microsoft.com/office/drawing/2010/main" xmlns="">
+              <a14:hiddenFill xmlns="" xmlns:a14="http://schemas.microsoft.com/office/drawing/2010/main">
                 <a:solidFill>
                   <a:srgbClr val="FFFFFF"/>
                 </a:solidFill>
               </a14:hiddenFill>
             </a:ext>
             <a:ext uri="{91240B29-F687-4f45-9708-019B960494DF}">
-              <a14:hiddenLine xmlns:a14="http://schemas.microsoft.com/office/drawing/2010/main" xmlns="" w="9525">
+              <a14:hiddenLine xmlns="" xmlns:a14="http://schemas.microsoft.com/office/drawing/2010/main" w="9525">
                 <a:solidFill>
                   <a:srgbClr val="000000"/>
                 </a:solidFill>
@@ -41361,6 +45355,245 @@
       </p:grpSpPr>
       <p:sp>
         <p:nvSpPr>
+          <p:cNvPr id="2" name="Title 1">
+            <a:extLst>
+              <a:ext uri="{FF2B5EF4-FFF2-40B4-BE49-F238E27FC236}">
+                <a16:creationId xmlns:a16="http://schemas.microsoft.com/office/drawing/2014/main" id="{F9FBA3DB-9573-4DF7-9989-7E04060B401E}"/>
+              </a:ext>
+            </a:extLst>
+          </p:cNvPr>
+          <p:cNvSpPr>
+            <a:spLocks noGrp="1"/>
+          </p:cNvSpPr>
+          <p:nvPr>
+            <p:ph type="title"/>
+          </p:nvPr>
+        </p:nvSpPr>
+        <p:spPr/>
+        <p:txBody>
+          <a:bodyPr/>
+          <a:lstStyle/>
+          <a:p>
+            <a:r>
+              <a:rPr lang="en-US" altLang="en-US"/>
+              <a:t>Implementing Set Using Hashing</a:t>
+            </a:r>
+            <a:endParaRPr lang="en-US"/>
+          </a:p>
+        </p:txBody>
+      </p:sp>
+      <p:pic>
+        <p:nvPicPr>
+          <p:cNvPr id="7" name="Picture 6" descr="A diagram shows MyHashSet less than symbol E greater than symbol leading to the interface. For long description in Notes pane, press F6.">
+            <a:extLst>
+              <a:ext uri="{FF2B5EF4-FFF2-40B4-BE49-F238E27FC236}">
+                <a16:creationId xmlns:a16="http://schemas.microsoft.com/office/drawing/2014/main" id="{C0F7E4BE-2BAC-49FC-BE5A-795C5CE6A8E7}"/>
+              </a:ext>
+            </a:extLst>
+          </p:cNvPr>
+          <p:cNvPicPr>
+            <a:picLocks noChangeAspect="1"/>
+          </p:cNvPicPr>
+          <p:nvPr/>
+        </p:nvPicPr>
+        <p:blipFill>
+          <a:blip r:embed="rId3"/>
+          <a:stretch>
+            <a:fillRect/>
+          </a:stretch>
+        </p:blipFill>
+        <p:spPr>
+          <a:xfrm>
+            <a:off x="636209" y="2037796"/>
+            <a:ext cx="5345380" cy="3811115"/>
+          </a:xfrm>
+          <a:prstGeom prst="rect">
+            <a:avLst/>
+          </a:prstGeom>
+        </p:spPr>
+      </p:pic>
+      <p:sp>
+        <p:nvSpPr>
+          <p:cNvPr id="10" name="Text Placeholder 9">
+            <a:extLst>
+              <a:ext uri="{FF2B5EF4-FFF2-40B4-BE49-F238E27FC236}">
+                <a16:creationId xmlns:a16="http://schemas.microsoft.com/office/drawing/2014/main" id="{7CAAF094-6D47-4483-8FD3-AAA0CF359DAB}"/>
+              </a:ext>
+            </a:extLst>
+          </p:cNvPr>
+          <p:cNvSpPr>
+            <a:spLocks noGrp="1"/>
+          </p:cNvSpPr>
+          <p:nvPr>
+            <p:ph type="body" sz="quarter" idx="20"/>
+          </p:nvPr>
+        </p:nvSpPr>
+        <p:spPr>
+          <a:xfrm>
+            <a:off x="6666272" y="3300005"/>
+            <a:ext cx="1297858" cy="475840"/>
+          </a:xfrm>
+        </p:spPr>
+        <p:txBody>
+          <a:bodyPr/>
+          <a:lstStyle/>
+          <a:p>
+            <a:pPr>
+              <a:spcBef>
+                <a:spcPct val="0"/>
+              </a:spcBef>
+              <a:buClrTx/>
+              <a:buSzTx/>
+              <a:buFontTx/>
+              <a:buNone/>
+            </a:pPr>
+            <a:r>
+              <a:rPr lang="en-US" altLang="en-US" sz="2200" dirty="0">
+                <a:hlinkClick r:id="rId4" action="ppaction://hlinkfile" tooltip="https://liveexample.pearsoncmg.com/html/MySet.html">
+                  <a:extLst>
+                    <a:ext uri="{A12FA001-AC4F-418D-AE19-62706E023703}">
+                      <ahyp:hlinkClr xmlns:ahyp="http://schemas.microsoft.com/office/drawing/2018/hyperlinkcolor" val="tx"/>
+                    </a:ext>
+                  </a:extLst>
+                </a:hlinkClick>
+              </a:rPr>
+              <a:t>MySet</a:t>
+            </a:r>
+          </a:p>
+        </p:txBody>
+      </p:sp>
+      <p:sp>
+        <p:nvSpPr>
+          <p:cNvPr id="11" name="Text Placeholder 10">
+            <a:extLst>
+              <a:ext uri="{FF2B5EF4-FFF2-40B4-BE49-F238E27FC236}">
+                <a16:creationId xmlns:a16="http://schemas.microsoft.com/office/drawing/2014/main" id="{0838F26E-BEAE-48A4-AE48-4E6E65A48BAF}"/>
+              </a:ext>
+            </a:extLst>
+          </p:cNvPr>
+          <p:cNvSpPr>
+            <a:spLocks noGrp="1"/>
+          </p:cNvSpPr>
+          <p:nvPr>
+            <p:ph type="body" sz="quarter" idx="21"/>
+          </p:nvPr>
+        </p:nvSpPr>
+        <p:spPr>
+          <a:xfrm>
+            <a:off x="6356555" y="4011819"/>
+            <a:ext cx="1991032" cy="501189"/>
+          </a:xfrm>
+        </p:spPr>
+        <p:txBody>
+          <a:bodyPr/>
+          <a:lstStyle/>
+          <a:p>
+            <a:pPr>
+              <a:spcBef>
+                <a:spcPct val="0"/>
+              </a:spcBef>
+              <a:buClrTx/>
+              <a:buSzTx/>
+              <a:buFontTx/>
+              <a:buNone/>
+            </a:pPr>
+            <a:r>
+              <a:rPr lang="en-US" altLang="en-US" sz="2200" dirty="0">
+                <a:hlinkClick r:id="rId5" action="ppaction://hlinkfile" tooltip="https://liveexample.pearsoncmg.com/html/MyHashSet.html">
+                  <a:extLst>
+                    <a:ext uri="{A12FA001-AC4F-418D-AE19-62706E023703}">
+                      <ahyp:hlinkClr xmlns:ahyp="http://schemas.microsoft.com/office/drawing/2018/hyperlinkcolor" val="tx"/>
+                    </a:ext>
+                  </a:extLst>
+                </a:hlinkClick>
+              </a:rPr>
+              <a:t>MyHashSet</a:t>
+            </a:r>
+          </a:p>
+        </p:txBody>
+      </p:sp>
+      <p:sp>
+        <p:nvSpPr>
+          <p:cNvPr id="12" name="Text Placeholder 11">
+            <a:extLst>
+              <a:ext uri="{FF2B5EF4-FFF2-40B4-BE49-F238E27FC236}">
+                <a16:creationId xmlns:a16="http://schemas.microsoft.com/office/drawing/2014/main" id="{EDA60787-6D96-462F-A818-20BFB67C55F8}"/>
+              </a:ext>
+            </a:extLst>
+          </p:cNvPr>
+          <p:cNvSpPr>
+            <a:spLocks noGrp="1"/>
+          </p:cNvSpPr>
+          <p:nvPr>
+            <p:ph type="body" sz="quarter" idx="22"/>
+          </p:nvPr>
+        </p:nvSpPr>
+        <p:spPr>
+          <a:xfrm>
+            <a:off x="6215270" y="4747060"/>
+            <a:ext cx="2471530" cy="531966"/>
+          </a:xfrm>
+        </p:spPr>
+        <p:txBody>
+          <a:bodyPr/>
+          <a:lstStyle/>
+          <a:p>
+            <a:pPr>
+              <a:spcBef>
+                <a:spcPct val="0"/>
+              </a:spcBef>
+              <a:buClrTx/>
+              <a:buSzTx/>
+              <a:buFontTx/>
+              <a:buNone/>
+            </a:pPr>
+            <a:r>
+              <a:rPr lang="en-US" altLang="en-US" sz="2200" dirty="0">
+                <a:hlinkClick r:id="rId6" action="ppaction://hlinkfile" tooltip="https://liveexample.pearsoncmg.com/html/TestMyHashSet.html">
+                  <a:extLst>
+                    <a:ext uri="{A12FA001-AC4F-418D-AE19-62706E023703}">
+                      <ahyp:hlinkClr xmlns:ahyp="http://schemas.microsoft.com/office/drawing/2018/hyperlinkcolor" val="tx"/>
+                    </a:ext>
+                  </a:extLst>
+                </a:hlinkClick>
+              </a:rPr>
+              <a:t>TestMyHashSet</a:t>
+            </a:r>
+          </a:p>
+        </p:txBody>
+      </p:sp>
+    </p:spTree>
+    <p:extLst>
+      <p:ext uri="{BB962C8B-B14F-4D97-AF65-F5344CB8AC3E}">
+        <p14:creationId xmlns:p14="http://schemas.microsoft.com/office/powerpoint/2010/main" val="1068171813"/>
+      </p:ext>
+    </p:extLst>
+  </p:cSld>
+  <p:clrMapOvr>
+    <a:masterClrMapping/>
+  </p:clrMapOvr>
+</p:sld>
+</file>
+
+<file path=ppt/slides/slide9.xml><?xml version="1.0" encoding="utf-8"?>
+<p:sld xmlns:a="http://schemas.openxmlformats.org/drawingml/2006/main" xmlns:r="http://schemas.openxmlformats.org/officeDocument/2006/relationships" xmlns:p="http://schemas.openxmlformats.org/presentationml/2006/main">
+  <p:cSld>
+    <p:spTree>
+      <p:nvGrpSpPr>
+        <p:cNvPr id="1" name=""/>
+        <p:cNvGrpSpPr/>
+        <p:nvPr/>
+      </p:nvGrpSpPr>
+      <p:grpSpPr>
+        <a:xfrm>
+          <a:off x="0" y="0"/>
+          <a:ext cx="0" cy="0"/>
+          <a:chOff x="0" y="0"/>
+          <a:chExt cx="0" cy="0"/>
+        </a:xfrm>
+      </p:grpSpPr>
+      <p:sp>
+        <p:nvSpPr>
           <p:cNvPr id="7170" name="Slide Number Placeholder 4">
             <a:extLst>
               <a:ext uri="{FF2B5EF4-FFF2-40B4-BE49-F238E27FC236}">
@@ -41554,7 +45787,7 @@
                 <a:buFontTx/>
                 <a:buNone/>
               </a:pPr>
-              <a:t>8</a:t>
+              <a:t>9</a:t>
             </a:fld>
             <a:endParaRPr lang="en-US" altLang="en-US" sz="1400"/>
           </a:p>
@@ -42376,167 +46609,6 @@
         </p:spPr>
       </p:pic>
     </p:spTree>
-  </p:cSld>
-  <p:clrMapOvr>
-    <a:masterClrMapping/>
-  </p:clrMapOvr>
-</p:sld>
-</file>
-
-<file path=ppt/slides/slide9.xml><?xml version="1.0" encoding="utf-8"?>
-<p:sld xmlns:a="http://schemas.openxmlformats.org/drawingml/2006/main" xmlns:r="http://schemas.openxmlformats.org/officeDocument/2006/relationships" xmlns:p="http://schemas.openxmlformats.org/presentationml/2006/main">
-  <p:cSld>
-    <p:spTree>
-      <p:nvGrpSpPr>
-        <p:cNvPr id="1" name=""/>
-        <p:cNvGrpSpPr/>
-        <p:nvPr/>
-      </p:nvGrpSpPr>
-      <p:grpSpPr>
-        <a:xfrm>
-          <a:off x="0" y="0"/>
-          <a:ext cx="0" cy="0"/>
-          <a:chOff x="0" y="0"/>
-          <a:chExt cx="0" cy="0"/>
-        </a:xfrm>
-      </p:grpSpPr>
-      <p:sp>
-        <p:nvSpPr>
-          <p:cNvPr id="2" name="Title 1">
-            <a:extLst>
-              <a:ext uri="{FF2B5EF4-FFF2-40B4-BE49-F238E27FC236}">
-                <a16:creationId xmlns:a16="http://schemas.microsoft.com/office/drawing/2014/main" id="{1BAC4758-AD83-406B-B704-600F7B926BD7}"/>
-              </a:ext>
-            </a:extLst>
-          </p:cNvPr>
-          <p:cNvSpPr>
-            <a:spLocks noGrp="1"/>
-          </p:cNvSpPr>
-          <p:nvPr>
-            <p:ph type="title"/>
-          </p:nvPr>
-        </p:nvSpPr>
-        <p:spPr/>
-        <p:txBody>
-          <a:bodyPr/>
-          <a:lstStyle/>
-          <a:p>
-            <a:r>
-              <a:rPr lang="en-IN" dirty="0"/>
-              <a:t>The HashSet Class</a:t>
-            </a:r>
-          </a:p>
-        </p:txBody>
-      </p:sp>
-      <p:sp>
-        <p:nvSpPr>
-          <p:cNvPr id="3" name="Content Placeholder 2">
-            <a:extLst>
-              <a:ext uri="{FF2B5EF4-FFF2-40B4-BE49-F238E27FC236}">
-                <a16:creationId xmlns:a16="http://schemas.microsoft.com/office/drawing/2014/main" id="{6331A985-B6EC-4F55-BA65-53285CA1D6FE}"/>
-              </a:ext>
-            </a:extLst>
-          </p:cNvPr>
-          <p:cNvSpPr>
-            <a:spLocks noGrp="1"/>
-          </p:cNvSpPr>
-          <p:nvPr>
-            <p:ph sz="quarter" idx="13"/>
-          </p:nvPr>
-        </p:nvSpPr>
-        <p:spPr/>
-        <p:txBody>
-          <a:bodyPr/>
-          <a:lstStyle/>
-          <a:p>
-            <a:pPr marL="432" indent="0">
-              <a:buNone/>
-            </a:pPr>
-            <a:r>
-              <a:rPr lang="en-US" altLang="en-US" dirty="0">
-                <a:cs typeface="Times New Roman" panose="02020603050405020304" pitchFamily="18" charset="0"/>
-              </a:rPr>
-              <a:t>The HashSet class is a concrete class that implements Set. It can be used to store duplicate-free elements. For efficiency, objects added to a hash set need to implement the </a:t>
-            </a:r>
-            <a:r>
-              <a:rPr lang="en-US" altLang="en-US" dirty="0" err="1">
-                <a:cs typeface="Times New Roman" panose="02020603050405020304" pitchFamily="18" charset="0"/>
-              </a:rPr>
-              <a:t>hashCode</a:t>
-            </a:r>
-            <a:r>
-              <a:rPr lang="en-US" altLang="en-US" dirty="0">
-                <a:cs typeface="Times New Roman" panose="02020603050405020304" pitchFamily="18" charset="0"/>
-              </a:rPr>
-              <a:t> method in a manner that properly disperses the hash code.</a:t>
-            </a:r>
-          </a:p>
-        </p:txBody>
-      </p:sp>
-      <p:pic>
-        <p:nvPicPr>
-          <p:cNvPr id="5" name="Picture 9">
-            <a:extLst>
-              <a:ext uri="{FF2B5EF4-FFF2-40B4-BE49-F238E27FC236}">
-                <a16:creationId xmlns:a16="http://schemas.microsoft.com/office/drawing/2014/main" id="{A0BDD954-3D6E-4DEC-B6E0-6B567116068C}"/>
-              </a:ext>
-            </a:extLst>
-          </p:cNvPr>
-          <p:cNvPicPr>
-            <a:picLocks noChangeAspect="1" noChangeArrowheads="1"/>
-          </p:cNvPicPr>
-          <p:nvPr/>
-        </p:nvPicPr>
-        <p:blipFill rotWithShape="1">
-          <a:blip r:embed="rId3">
-            <a:extLst>
-              <a:ext uri="{28A0092B-C50C-407E-A947-70E740481C1C}">
-                <a14:useLocalDpi xmlns:a14="http://schemas.microsoft.com/office/drawing/2010/main" val="0"/>
-              </a:ext>
-            </a:extLst>
-          </a:blip>
-          <a:srcRect t="1991" b="57026"/>
-          <a:stretch/>
-        </p:blipFill>
-        <p:spPr bwMode="auto">
-          <a:xfrm>
-            <a:off x="339725" y="3733800"/>
-            <a:ext cx="8464550" cy="1569280"/>
-          </a:xfrm>
-          <a:prstGeom prst="rect">
-            <a:avLst/>
-          </a:prstGeom>
-          <a:noFill/>
-          <a:ln>
-            <a:noFill/>
-          </a:ln>
-          <a:extLst>
-            <a:ext uri="{909E8E84-426E-40DD-AFC4-6F175D3DCCD1}">
-              <a14:hiddenFill xmlns:a14="http://schemas.microsoft.com/office/drawing/2010/main">
-                <a:solidFill>
-                  <a:schemeClr val="accent1"/>
-                </a:solidFill>
-              </a14:hiddenFill>
-            </a:ext>
-            <a:ext uri="{91240B29-F687-4F45-9708-019B960494DF}">
-              <a14:hiddenLine xmlns:a14="http://schemas.microsoft.com/office/drawing/2010/main" w="12700">
-                <a:solidFill>
-                  <a:schemeClr val="tx1"/>
-                </a:solidFill>
-                <a:miter lim="800000"/>
-                <a:headEnd type="none" w="sm" len="sm"/>
-                <a:tailEnd type="none" w="sm" len="sm"/>
-              </a14:hiddenLine>
-            </a:ext>
-          </a:extLst>
-        </p:spPr>
-      </p:pic>
-    </p:spTree>
-    <p:extLst>
-      <p:ext uri="{BB962C8B-B14F-4D97-AF65-F5344CB8AC3E}">
-        <p14:creationId xmlns:p14="http://schemas.microsoft.com/office/powerpoint/2010/main" val="3745574572"/>
-      </p:ext>
-    </p:extLst>
   </p:cSld>
   <p:clrMapOvr>
     <a:masterClrMapping/>
